--- a/W5/W5S3 - FSM and RegEx Practice/Solutions/W5S3_solutions.pptx
+++ b/W5/W5S3 - FSM and RegEx Practice/Solutions/W5S3_solutions.pptx
@@ -217,8 +217,7 @@
 <file path=ppt/revisionInfo.xml><?xml version="1.0" encoding="utf-8"?>
 <p1510:revInfo xmlns:a="http://schemas.openxmlformats.org/drawingml/2006/main" xmlns:r="http://schemas.openxmlformats.org/officeDocument/2006/relationships" xmlns:p1510="http://schemas.microsoft.com/office/powerpoint/2015/10/main">
   <p1510:revLst>
-    <p1510:client id="{01F119BB-4DC1-4633-817B-0E51DD74E1BF}" v="2" dt="2025-02-27T03:43:00.109"/>
-    <p1510:client id="{2F13BD52-1E98-42DB-B4D3-880CEEA5195B}" v="2" dt="2025-02-26T06:05:12.774"/>
+    <p1510:client id="{52F891D4-B643-40CE-9C68-4EBAAA481236}" v="2" dt="2026-02-25T12:11:45.296"/>
   </p1510:revLst>
 </p1510:revInfo>
 </file>
@@ -226,3831 +225,26 @@
 <file path=ppt/changesInfos/changesInfo1.xml><?xml version="1.0" encoding="utf-8"?>
 <pc:chgInfo xmlns:a="http://schemas.openxmlformats.org/drawingml/2006/main" xmlns:r="http://schemas.openxmlformats.org/officeDocument/2006/relationships" xmlns:ac="http://schemas.microsoft.com/office/drawing/2013/main/command" xmlns:pc="http://schemas.microsoft.com/office/powerpoint/2013/main/command">
   <pc:docChgLst>
-    <pc:chgData name="Matthieu De Mari" userId="dfb708c9-d8dc-439f-9a3b-c772bf4a311c" providerId="ADAL" clId="{42899341-97D7-4A57-A557-A74C2BB5D6D1}"/>
-    <pc:docChg chg="custSel addSld delSld modSld sldOrd delSection modSection">
-      <pc:chgData name="Matthieu De Mari" userId="dfb708c9-d8dc-439f-9a3b-c772bf4a311c" providerId="ADAL" clId="{42899341-97D7-4A57-A557-A74C2BB5D6D1}" dt="2023-10-19T07:08:41.500" v="733" actId="20577"/>
-      <pc:docMkLst>
-        <pc:docMk/>
-      </pc:docMkLst>
-      <pc:sldChg chg="modSp">
-        <pc:chgData name="Matthieu De Mari" userId="dfb708c9-d8dc-439f-9a3b-c772bf4a311c" providerId="ADAL" clId="{42899341-97D7-4A57-A557-A74C2BB5D6D1}" dt="2023-10-19T07:04:10.473" v="537" actId="5793"/>
-        <pc:sldMkLst>
-          <pc:docMk/>
-          <pc:sldMk cId="3739270414" sldId="258"/>
-        </pc:sldMkLst>
-      </pc:sldChg>
-      <pc:sldChg chg="modSp">
-        <pc:chgData name="Matthieu De Mari" userId="dfb708c9-d8dc-439f-9a3b-c772bf4a311c" providerId="ADAL" clId="{42899341-97D7-4A57-A557-A74C2BB5D6D1}" dt="2023-10-19T07:04:14.914" v="539" actId="5793"/>
-        <pc:sldMkLst>
-          <pc:docMk/>
-          <pc:sldMk cId="3115582948" sldId="259"/>
-        </pc:sldMkLst>
-      </pc:sldChg>
-      <pc:sldChg chg="del">
-        <pc:chgData name="Matthieu De Mari" userId="dfb708c9-d8dc-439f-9a3b-c772bf4a311c" providerId="ADAL" clId="{42899341-97D7-4A57-A557-A74C2BB5D6D1}" dt="2023-10-19T07:04:28.819" v="544" actId="47"/>
-        <pc:sldMkLst>
-          <pc:docMk/>
-          <pc:sldMk cId="2366002138" sldId="265"/>
-        </pc:sldMkLst>
-      </pc:sldChg>
-      <pc:sldChg chg="modSp del mod">
-        <pc:chgData name="Matthieu De Mari" userId="dfb708c9-d8dc-439f-9a3b-c772bf4a311c" providerId="ADAL" clId="{42899341-97D7-4A57-A557-A74C2BB5D6D1}" dt="2023-10-19T07:04:25.564" v="543" actId="47"/>
-        <pc:sldMkLst>
-          <pc:docMk/>
-          <pc:sldMk cId="1944673108" sldId="268"/>
-        </pc:sldMkLst>
-      </pc:sldChg>
-      <pc:sldChg chg="modSp">
-        <pc:chgData name="Matthieu De Mari" userId="dfb708c9-d8dc-439f-9a3b-c772bf4a311c" providerId="ADAL" clId="{42899341-97D7-4A57-A557-A74C2BB5D6D1}" dt="2023-10-19T07:04:43.374" v="551" actId="20577"/>
-        <pc:sldMkLst>
-          <pc:docMk/>
-          <pc:sldMk cId="16380507" sldId="270"/>
-        </pc:sldMkLst>
-      </pc:sldChg>
-      <pc:sldChg chg="modSp mod">
-        <pc:chgData name="Matthieu De Mari" userId="dfb708c9-d8dc-439f-9a3b-c772bf4a311c" providerId="ADAL" clId="{42899341-97D7-4A57-A557-A74C2BB5D6D1}" dt="2023-10-19T06:53:15.189" v="3" actId="20577"/>
-        <pc:sldMkLst>
-          <pc:docMk/>
-          <pc:sldMk cId="1040156172" sldId="377"/>
-        </pc:sldMkLst>
-      </pc:sldChg>
-      <pc:sldChg chg="modSp">
-        <pc:chgData name="Matthieu De Mari" userId="dfb708c9-d8dc-439f-9a3b-c772bf4a311c" providerId="ADAL" clId="{42899341-97D7-4A57-A557-A74C2BB5D6D1}" dt="2023-10-19T07:04:16.584" v="540" actId="5793"/>
-        <pc:sldMkLst>
-          <pc:docMk/>
-          <pc:sldMk cId="2105998534" sldId="379"/>
-        </pc:sldMkLst>
-      </pc:sldChg>
-      <pc:sldChg chg="modSp mod">
-        <pc:chgData name="Matthieu De Mari" userId="dfb708c9-d8dc-439f-9a3b-c772bf4a311c" providerId="ADAL" clId="{42899341-97D7-4A57-A557-A74C2BB5D6D1}" dt="2023-10-19T07:04:12.614" v="538" actId="5793"/>
-        <pc:sldMkLst>
-          <pc:docMk/>
-          <pc:sldMk cId="1213996271" sldId="382"/>
-        </pc:sldMkLst>
-      </pc:sldChg>
-      <pc:sldChg chg="modSp mod">
-        <pc:chgData name="Matthieu De Mari" userId="dfb708c9-d8dc-439f-9a3b-c772bf4a311c" providerId="ADAL" clId="{42899341-97D7-4A57-A557-A74C2BB5D6D1}" dt="2023-10-19T07:02:45.195" v="536" actId="20577"/>
-        <pc:sldMkLst>
-          <pc:docMk/>
-          <pc:sldMk cId="1161233365" sldId="422"/>
-        </pc:sldMkLst>
-      </pc:sldChg>
-      <pc:sldChg chg="modSp mod">
-        <pc:chgData name="Matthieu De Mari" userId="dfb708c9-d8dc-439f-9a3b-c772bf4a311c" providerId="ADAL" clId="{42899341-97D7-4A57-A557-A74C2BB5D6D1}" dt="2023-10-19T07:08:26.494" v="722" actId="20577"/>
-        <pc:sldMkLst>
-          <pc:docMk/>
-          <pc:sldMk cId="2244529904" sldId="425"/>
-        </pc:sldMkLst>
-      </pc:sldChg>
-      <pc:sldChg chg="modSp mod ord">
-        <pc:chgData name="Matthieu De Mari" userId="dfb708c9-d8dc-439f-9a3b-c772bf4a311c" providerId="ADAL" clId="{42899341-97D7-4A57-A557-A74C2BB5D6D1}" dt="2023-10-19T07:08:19.205" v="718" actId="20577"/>
-        <pc:sldMkLst>
-          <pc:docMk/>
-          <pc:sldMk cId="1586635455" sldId="427"/>
-        </pc:sldMkLst>
-      </pc:sldChg>
-      <pc:sldChg chg="modSp mod">
-        <pc:chgData name="Matthieu De Mari" userId="dfb708c9-d8dc-439f-9a3b-c772bf4a311c" providerId="ADAL" clId="{42899341-97D7-4A57-A557-A74C2BB5D6D1}" dt="2023-10-19T07:08:30.087" v="724" actId="20577"/>
-        <pc:sldMkLst>
-          <pc:docMk/>
-          <pc:sldMk cId="1474802136" sldId="456"/>
-        </pc:sldMkLst>
-      </pc:sldChg>
-      <pc:sldChg chg="modSp mod">
-        <pc:chgData name="Matthieu De Mari" userId="dfb708c9-d8dc-439f-9a3b-c772bf4a311c" providerId="ADAL" clId="{42899341-97D7-4A57-A557-A74C2BB5D6D1}" dt="2023-10-19T07:08:32.843" v="726" actId="20577"/>
-        <pc:sldMkLst>
-          <pc:docMk/>
-          <pc:sldMk cId="813445278" sldId="461"/>
-        </pc:sldMkLst>
-      </pc:sldChg>
-      <pc:sldChg chg="modSp">
-        <pc:chgData name="Matthieu De Mari" userId="dfb708c9-d8dc-439f-9a3b-c772bf4a311c" providerId="ADAL" clId="{42899341-97D7-4A57-A557-A74C2BB5D6D1}" dt="2023-10-19T07:02:01.229" v="516" actId="20577"/>
-        <pc:sldMkLst>
-          <pc:docMk/>
-          <pc:sldMk cId="3007767847" sldId="463"/>
-        </pc:sldMkLst>
-      </pc:sldChg>
-      <pc:sldChg chg="modSp mod">
-        <pc:chgData name="Matthieu De Mari" userId="dfb708c9-d8dc-439f-9a3b-c772bf4a311c" providerId="ADAL" clId="{42899341-97D7-4A57-A557-A74C2BB5D6D1}" dt="2023-10-19T07:02:15.386" v="519" actId="20577"/>
-        <pc:sldMkLst>
-          <pc:docMk/>
-          <pc:sldMk cId="47889816" sldId="464"/>
-        </pc:sldMkLst>
-      </pc:sldChg>
-      <pc:sldChg chg="modSp mod">
-        <pc:chgData name="Matthieu De Mari" userId="dfb708c9-d8dc-439f-9a3b-c772bf4a311c" providerId="ADAL" clId="{42899341-97D7-4A57-A557-A74C2BB5D6D1}" dt="2023-10-19T06:55:48.787" v="11" actId="20577"/>
-        <pc:sldMkLst>
-          <pc:docMk/>
-          <pc:sldMk cId="4107990403" sldId="466"/>
-        </pc:sldMkLst>
-      </pc:sldChg>
-      <pc:sldChg chg="modSp mod">
-        <pc:chgData name="Matthieu De Mari" userId="dfb708c9-d8dc-439f-9a3b-c772bf4a311c" providerId="ADAL" clId="{42899341-97D7-4A57-A557-A74C2BB5D6D1}" dt="2023-10-19T06:55:52.587" v="13" actId="20577"/>
-        <pc:sldMkLst>
-          <pc:docMk/>
-          <pc:sldMk cId="4111616225" sldId="467"/>
-        </pc:sldMkLst>
-      </pc:sldChg>
-      <pc:sldChg chg="del">
-        <pc:chgData name="Matthieu De Mari" userId="dfb708c9-d8dc-439f-9a3b-c772bf4a311c" providerId="ADAL" clId="{42899341-97D7-4A57-A557-A74C2BB5D6D1}" dt="2023-10-19T06:55:32.464" v="9" actId="47"/>
-        <pc:sldMkLst>
-          <pc:docMk/>
-          <pc:sldMk cId="1003937956" sldId="469"/>
-        </pc:sldMkLst>
-      </pc:sldChg>
-      <pc:sldChg chg="del">
-        <pc:chgData name="Matthieu De Mari" userId="dfb708c9-d8dc-439f-9a3b-c772bf4a311c" providerId="ADAL" clId="{42899341-97D7-4A57-A557-A74C2BB5D6D1}" dt="2023-10-19T06:55:58.348" v="14" actId="47"/>
-        <pc:sldMkLst>
-          <pc:docMk/>
-          <pc:sldMk cId="1494991067" sldId="470"/>
-        </pc:sldMkLst>
-      </pc:sldChg>
-      <pc:sldChg chg="modSp mod ord">
-        <pc:chgData name="Matthieu De Mari" userId="dfb708c9-d8dc-439f-9a3b-c772bf4a311c" providerId="ADAL" clId="{42899341-97D7-4A57-A557-A74C2BB5D6D1}" dt="2023-10-19T07:08:23.104" v="720" actId="20577"/>
-        <pc:sldMkLst>
-          <pc:docMk/>
-          <pc:sldMk cId="3221576718" sldId="471"/>
-        </pc:sldMkLst>
-      </pc:sldChg>
-      <pc:sldChg chg="modSp mod">
-        <pc:chgData name="Matthieu De Mari" userId="dfb708c9-d8dc-439f-9a3b-c772bf4a311c" providerId="ADAL" clId="{42899341-97D7-4A57-A557-A74C2BB5D6D1}" dt="2023-10-19T07:08:41.500" v="733" actId="20577"/>
-        <pc:sldMkLst>
-          <pc:docMk/>
-          <pc:sldMk cId="2469439250" sldId="472"/>
-        </pc:sldMkLst>
-      </pc:sldChg>
-      <pc:sldChg chg="del">
-        <pc:chgData name="Matthieu De Mari" userId="dfb708c9-d8dc-439f-9a3b-c772bf4a311c" providerId="ADAL" clId="{42899341-97D7-4A57-A557-A74C2BB5D6D1}" dt="2023-10-19T07:00:39.105" v="396" actId="47"/>
-        <pc:sldMkLst>
-          <pc:docMk/>
-          <pc:sldMk cId="197640958" sldId="474"/>
-        </pc:sldMkLst>
-      </pc:sldChg>
-      <pc:sldChg chg="modSp mod">
-        <pc:chgData name="Matthieu De Mari" userId="dfb708c9-d8dc-439f-9a3b-c772bf4a311c" providerId="ADAL" clId="{42899341-97D7-4A57-A557-A74C2BB5D6D1}" dt="2023-10-19T07:08:35.844" v="728" actId="20577"/>
-        <pc:sldMkLst>
-          <pc:docMk/>
-          <pc:sldMk cId="453310084" sldId="475"/>
-        </pc:sldMkLst>
-      </pc:sldChg>
-      <pc:sldChg chg="modSp add mod">
-        <pc:chgData name="Matthieu De Mari" userId="dfb708c9-d8dc-439f-9a3b-c772bf4a311c" providerId="ADAL" clId="{42899341-97D7-4A57-A557-A74C2BB5D6D1}" dt="2023-10-19T06:56:08.139" v="16" actId="20577"/>
-        <pc:sldMkLst>
-          <pc:docMk/>
-          <pc:sldMk cId="1028518339" sldId="476"/>
-        </pc:sldMkLst>
-      </pc:sldChg>
-      <pc:sldChg chg="modSp add mod">
-        <pc:chgData name="Matthieu De Mari" userId="dfb708c9-d8dc-439f-9a3b-c772bf4a311c" providerId="ADAL" clId="{42899341-97D7-4A57-A557-A74C2BB5D6D1}" dt="2023-10-19T06:56:13.362" v="18" actId="20577"/>
-        <pc:sldMkLst>
-          <pc:docMk/>
-          <pc:sldMk cId="932509960" sldId="478"/>
-        </pc:sldMkLst>
-      </pc:sldChg>
-      <pc:sldChg chg="add">
-        <pc:chgData name="Matthieu De Mari" userId="dfb708c9-d8dc-439f-9a3b-c772bf4a311c" providerId="ADAL" clId="{42899341-97D7-4A57-A557-A74C2BB5D6D1}" dt="2023-10-19T06:54:44.182" v="6"/>
-        <pc:sldMkLst>
-          <pc:docMk/>
-          <pc:sldMk cId="1094051178" sldId="479"/>
-        </pc:sldMkLst>
-      </pc:sldChg>
-      <pc:sldChg chg="add">
-        <pc:chgData name="Matthieu De Mari" userId="dfb708c9-d8dc-439f-9a3b-c772bf4a311c" providerId="ADAL" clId="{42899341-97D7-4A57-A557-A74C2BB5D6D1}" dt="2023-10-19T06:54:44.182" v="6"/>
-        <pc:sldMkLst>
-          <pc:docMk/>
-          <pc:sldMk cId="1275862355" sldId="480"/>
-        </pc:sldMkLst>
-      </pc:sldChg>
-      <pc:sldChg chg="add">
-        <pc:chgData name="Matthieu De Mari" userId="dfb708c9-d8dc-439f-9a3b-c772bf4a311c" providerId="ADAL" clId="{42899341-97D7-4A57-A557-A74C2BB5D6D1}" dt="2023-10-19T06:54:44.182" v="6"/>
-        <pc:sldMkLst>
-          <pc:docMk/>
-          <pc:sldMk cId="2239257233" sldId="481"/>
-        </pc:sldMkLst>
-      </pc:sldChg>
-      <pc:sldChg chg="add">
-        <pc:chgData name="Matthieu De Mari" userId="dfb708c9-d8dc-439f-9a3b-c772bf4a311c" providerId="ADAL" clId="{42899341-97D7-4A57-A557-A74C2BB5D6D1}" dt="2023-10-19T06:54:44.182" v="6"/>
-        <pc:sldMkLst>
-          <pc:docMk/>
-          <pc:sldMk cId="2562768069" sldId="482"/>
-        </pc:sldMkLst>
-      </pc:sldChg>
-      <pc:sldChg chg="add">
-        <pc:chgData name="Matthieu De Mari" userId="dfb708c9-d8dc-439f-9a3b-c772bf4a311c" providerId="ADAL" clId="{42899341-97D7-4A57-A557-A74C2BB5D6D1}" dt="2023-10-19T06:54:44.182" v="6"/>
-        <pc:sldMkLst>
-          <pc:docMk/>
-          <pc:sldMk cId="3541171842" sldId="483"/>
-        </pc:sldMkLst>
-      </pc:sldChg>
-      <pc:sldChg chg="add">
-        <pc:chgData name="Matthieu De Mari" userId="dfb708c9-d8dc-439f-9a3b-c772bf4a311c" providerId="ADAL" clId="{42899341-97D7-4A57-A557-A74C2BB5D6D1}" dt="2023-10-19T06:54:44.182" v="6"/>
-        <pc:sldMkLst>
-          <pc:docMk/>
-          <pc:sldMk cId="199935466" sldId="484"/>
-        </pc:sldMkLst>
-      </pc:sldChg>
-      <pc:sldChg chg="add">
-        <pc:chgData name="Matthieu De Mari" userId="dfb708c9-d8dc-439f-9a3b-c772bf4a311c" providerId="ADAL" clId="{42899341-97D7-4A57-A557-A74C2BB5D6D1}" dt="2023-10-19T06:54:44.182" v="6"/>
-        <pc:sldMkLst>
-          <pc:docMk/>
-          <pc:sldMk cId="3459688009" sldId="485"/>
-        </pc:sldMkLst>
-      </pc:sldChg>
-      <pc:sldChg chg="add">
-        <pc:chgData name="Matthieu De Mari" userId="dfb708c9-d8dc-439f-9a3b-c772bf4a311c" providerId="ADAL" clId="{42899341-97D7-4A57-A557-A74C2BB5D6D1}" dt="2023-10-19T06:54:44.182" v="6"/>
-        <pc:sldMkLst>
-          <pc:docMk/>
-          <pc:sldMk cId="3530460312" sldId="486"/>
-        </pc:sldMkLst>
-      </pc:sldChg>
-      <pc:sldChg chg="add ord">
-        <pc:chgData name="Matthieu De Mari" userId="dfb708c9-d8dc-439f-9a3b-c772bf4a311c" providerId="ADAL" clId="{42899341-97D7-4A57-A557-A74C2BB5D6D1}" dt="2023-10-19T07:07:31.826" v="589"/>
-        <pc:sldMkLst>
-          <pc:docMk/>
-          <pc:sldMk cId="125150915" sldId="487"/>
-        </pc:sldMkLst>
-      </pc:sldChg>
-      <pc:sldChg chg="add ord">
-        <pc:chgData name="Matthieu De Mari" userId="dfb708c9-d8dc-439f-9a3b-c772bf4a311c" providerId="ADAL" clId="{42899341-97D7-4A57-A557-A74C2BB5D6D1}" dt="2023-10-19T07:07:31.826" v="589"/>
-        <pc:sldMkLst>
-          <pc:docMk/>
-          <pc:sldMk cId="1228659976" sldId="488"/>
-        </pc:sldMkLst>
-      </pc:sldChg>
-      <pc:sldChg chg="add ord">
-        <pc:chgData name="Matthieu De Mari" userId="dfb708c9-d8dc-439f-9a3b-c772bf4a311c" providerId="ADAL" clId="{42899341-97D7-4A57-A557-A74C2BB5D6D1}" dt="2023-10-19T07:07:31.826" v="589"/>
-        <pc:sldMkLst>
-          <pc:docMk/>
-          <pc:sldMk cId="3872619914" sldId="489"/>
-        </pc:sldMkLst>
-      </pc:sldChg>
-      <pc:sldChg chg="addSp delSp modSp new mod modClrScheme chgLayout">
-        <pc:chgData name="Matthieu De Mari" userId="dfb708c9-d8dc-439f-9a3b-c772bf4a311c" providerId="ADAL" clId="{42899341-97D7-4A57-A557-A74C2BB5D6D1}" dt="2023-10-19T07:08:15.504" v="716" actId="20577"/>
-        <pc:sldMkLst>
-          <pc:docMk/>
-          <pc:sldMk cId="3123829798" sldId="490"/>
-        </pc:sldMkLst>
-      </pc:sldChg>
-      <pc:sldChg chg="modSp add mod">
-        <pc:chgData name="Matthieu De Mari" userId="dfb708c9-d8dc-439f-9a3b-c772bf4a311c" providerId="ADAL" clId="{42899341-97D7-4A57-A557-A74C2BB5D6D1}" dt="2023-10-19T07:07:34.959" v="591" actId="20577"/>
-        <pc:sldMkLst>
-          <pc:docMk/>
-          <pc:sldMk cId="3899213262" sldId="491"/>
-        </pc:sldMkLst>
-      </pc:sldChg>
-      <pc:sldChg chg="modSp add mod">
-        <pc:chgData name="Matthieu De Mari" userId="dfb708c9-d8dc-439f-9a3b-c772bf4a311c" providerId="ADAL" clId="{42899341-97D7-4A57-A557-A74C2BB5D6D1}" dt="2023-10-19T07:07:40.119" v="595" actId="20577"/>
-        <pc:sldMkLst>
-          <pc:docMk/>
-          <pc:sldMk cId="3076288606" sldId="492"/>
-        </pc:sldMkLst>
-      </pc:sldChg>
-    </pc:docChg>
-  </pc:docChgLst>
-  <pc:docChgLst>
-    <pc:chgData name="Matthieu De Mari" userId="dfb708c9-d8dc-439f-9a3b-c772bf4a311c" providerId="ADAL" clId="{D10BC687-4E20-4D11-9F60-7BC7405FA16E}"/>
-    <pc:docChg chg="custSel modSld">
-      <pc:chgData name="Matthieu De Mari" userId="dfb708c9-d8dc-439f-9a3b-c772bf4a311c" providerId="ADAL" clId="{D10BC687-4E20-4D11-9F60-7BC7405FA16E}" dt="2023-05-15T04:12:07.158" v="44" actId="20577"/>
+    <pc:chgData name="Matthieu De Mari" userId="dfb708c9-d8dc-439f-9a3b-c772bf4a311c" providerId="ADAL" clId="{81E9B007-0C2C-493E-9B93-55A62C9C1F12}"/>
+    <pc:docChg chg="modSld">
+      <pc:chgData name="Matthieu De Mari" userId="dfb708c9-d8dc-439f-9a3b-c772bf4a311c" providerId="ADAL" clId="{81E9B007-0C2C-493E-9B93-55A62C9C1F12}" dt="2026-02-25T12:11:45.296" v="15"/>
       <pc:docMkLst>
         <pc:docMk/>
       </pc:docMkLst>
       <pc:sldChg chg="modSp mod">
-        <pc:chgData name="Matthieu De Mari" userId="dfb708c9-d8dc-439f-9a3b-c772bf4a311c" providerId="ADAL" clId="{D10BC687-4E20-4D11-9F60-7BC7405FA16E}" dt="2023-05-15T04:09:26.532" v="18" actId="313"/>
-        <pc:sldMkLst>
-          <pc:docMk/>
-          <pc:sldMk cId="4226169062" sldId="423"/>
-        </pc:sldMkLst>
-      </pc:sldChg>
-      <pc:sldChg chg="modSp mod">
-        <pc:chgData name="Matthieu De Mari" userId="dfb708c9-d8dc-439f-9a3b-c772bf4a311c" providerId="ADAL" clId="{D10BC687-4E20-4D11-9F60-7BC7405FA16E}" dt="2023-05-15T04:11:09.013" v="26" actId="20577"/>
-        <pc:sldMkLst>
-          <pc:docMk/>
-          <pc:sldMk cId="2244529904" sldId="425"/>
-        </pc:sldMkLst>
-      </pc:sldChg>
-      <pc:sldChg chg="modSp mod">
-        <pc:chgData name="Matthieu De Mari" userId="dfb708c9-d8dc-439f-9a3b-c772bf4a311c" providerId="ADAL" clId="{D10BC687-4E20-4D11-9F60-7BC7405FA16E}" dt="2023-05-15T04:12:07.158" v="44" actId="20577"/>
-        <pc:sldMkLst>
-          <pc:docMk/>
-          <pc:sldMk cId="197640958" sldId="474"/>
-        </pc:sldMkLst>
-      </pc:sldChg>
-    </pc:docChg>
-  </pc:docChgLst>
-  <pc:docChgLst>
-    <pc:chgData name="Matthieu De Mari" userId="dfb708c9-d8dc-439f-9a3b-c772bf4a311c" providerId="ADAL" clId="{4E399D58-50D1-46C2-8982-3F7E3C91B930}"/>
-    <pc:docChg chg="undo custSel addSld delSld modSld sldOrd addSection delSection modSection">
-      <pc:chgData name="Matthieu De Mari" userId="dfb708c9-d8dc-439f-9a3b-c772bf4a311c" providerId="ADAL" clId="{4E399D58-50D1-46C2-8982-3F7E3C91B930}" dt="2024-03-14T06:21:52.075" v="4270" actId="20577"/>
-      <pc:docMkLst>
-        <pc:docMk/>
-      </pc:docMkLst>
-      <pc:sldChg chg="del">
-        <pc:chgData name="Matthieu De Mari" userId="dfb708c9-d8dc-439f-9a3b-c772bf4a311c" providerId="ADAL" clId="{4E399D58-50D1-46C2-8982-3F7E3C91B930}" dt="2023-10-19T07:24:57.625" v="49" actId="47"/>
-        <pc:sldMkLst>
-          <pc:docMk/>
-          <pc:sldMk cId="3739270414" sldId="258"/>
-        </pc:sldMkLst>
-      </pc:sldChg>
-      <pc:sldChg chg="del">
-        <pc:chgData name="Matthieu De Mari" userId="dfb708c9-d8dc-439f-9a3b-c772bf4a311c" providerId="ADAL" clId="{4E399D58-50D1-46C2-8982-3F7E3C91B930}" dt="2023-10-19T07:24:57.625" v="49" actId="47"/>
-        <pc:sldMkLst>
-          <pc:docMk/>
-          <pc:sldMk cId="3115582948" sldId="259"/>
-        </pc:sldMkLst>
-      </pc:sldChg>
-      <pc:sldChg chg="del">
-        <pc:chgData name="Matthieu De Mari" userId="dfb708c9-d8dc-439f-9a3b-c772bf4a311c" providerId="ADAL" clId="{4E399D58-50D1-46C2-8982-3F7E3C91B930}" dt="2023-10-19T07:24:57.625" v="49" actId="47"/>
-        <pc:sldMkLst>
-          <pc:docMk/>
-          <pc:sldMk cId="16380507" sldId="270"/>
-        </pc:sldMkLst>
-      </pc:sldChg>
-      <pc:sldChg chg="del">
-        <pc:chgData name="Matthieu De Mari" userId="dfb708c9-d8dc-439f-9a3b-c772bf4a311c" providerId="ADAL" clId="{4E399D58-50D1-46C2-8982-3F7E3C91B930}" dt="2023-10-19T07:24:57.625" v="49" actId="47"/>
-        <pc:sldMkLst>
-          <pc:docMk/>
-          <pc:sldMk cId="483806848" sldId="271"/>
-        </pc:sldMkLst>
-      </pc:sldChg>
-      <pc:sldChg chg="modSp mod">
-        <pc:chgData name="Matthieu De Mari" userId="dfb708c9-d8dc-439f-9a3b-c772bf4a311c" providerId="ADAL" clId="{4E399D58-50D1-46C2-8982-3F7E3C91B930}" dt="2023-10-19T07:24:53.597" v="47" actId="20577"/>
-        <pc:sldMkLst>
-          <pc:docMk/>
-          <pc:sldMk cId="1040156172" sldId="377"/>
-        </pc:sldMkLst>
-      </pc:sldChg>
-      <pc:sldChg chg="del">
-        <pc:chgData name="Matthieu De Mari" userId="dfb708c9-d8dc-439f-9a3b-c772bf4a311c" providerId="ADAL" clId="{4E399D58-50D1-46C2-8982-3F7E3C91B930}" dt="2023-10-19T07:24:57.625" v="49" actId="47"/>
-        <pc:sldMkLst>
-          <pc:docMk/>
-          <pc:sldMk cId="2105998534" sldId="379"/>
-        </pc:sldMkLst>
-      </pc:sldChg>
-      <pc:sldChg chg="del">
-        <pc:chgData name="Matthieu De Mari" userId="dfb708c9-d8dc-439f-9a3b-c772bf4a311c" providerId="ADAL" clId="{4E399D58-50D1-46C2-8982-3F7E3C91B930}" dt="2023-10-19T07:24:57.625" v="49" actId="47"/>
-        <pc:sldMkLst>
-          <pc:docMk/>
-          <pc:sldMk cId="1213996271" sldId="382"/>
-        </pc:sldMkLst>
-      </pc:sldChg>
-      <pc:sldChg chg="del">
-        <pc:chgData name="Matthieu De Mari" userId="dfb708c9-d8dc-439f-9a3b-c772bf4a311c" providerId="ADAL" clId="{4E399D58-50D1-46C2-8982-3F7E3C91B930}" dt="2023-10-19T07:24:56.418" v="48" actId="47"/>
-        <pc:sldMkLst>
-          <pc:docMk/>
-          <pc:sldMk cId="1161233365" sldId="422"/>
-        </pc:sldMkLst>
-      </pc:sldChg>
-      <pc:sldChg chg="del">
-        <pc:chgData name="Matthieu De Mari" userId="dfb708c9-d8dc-439f-9a3b-c772bf4a311c" providerId="ADAL" clId="{4E399D58-50D1-46C2-8982-3F7E3C91B930}" dt="2023-10-19T07:25:02.803" v="56" actId="47"/>
-        <pc:sldMkLst>
-          <pc:docMk/>
-          <pc:sldMk cId="4226169062" sldId="423"/>
-        </pc:sldMkLst>
-      </pc:sldChg>
-      <pc:sldChg chg="del">
-        <pc:chgData name="Matthieu De Mari" userId="dfb708c9-d8dc-439f-9a3b-c772bf4a311c" providerId="ADAL" clId="{4E399D58-50D1-46C2-8982-3F7E3C91B930}" dt="2023-10-19T07:24:59.987" v="52" actId="47"/>
-        <pc:sldMkLst>
-          <pc:docMk/>
-          <pc:sldMk cId="4050696508" sldId="424"/>
-        </pc:sldMkLst>
-      </pc:sldChg>
-      <pc:sldChg chg="modSp add del mod">
-        <pc:chgData name="Matthieu De Mari" userId="dfb708c9-d8dc-439f-9a3b-c772bf4a311c" providerId="ADAL" clId="{4E399D58-50D1-46C2-8982-3F7E3C91B930}" dt="2024-02-15T07:48:24.977" v="3115" actId="20577"/>
-        <pc:sldMkLst>
-          <pc:docMk/>
-          <pc:sldMk cId="2244529904" sldId="425"/>
-        </pc:sldMkLst>
-      </pc:sldChg>
-      <pc:sldChg chg="modSp add del mod">
-        <pc:chgData name="Matthieu De Mari" userId="dfb708c9-d8dc-439f-9a3b-c772bf4a311c" providerId="ADAL" clId="{4E399D58-50D1-46C2-8982-3F7E3C91B930}" dt="2024-02-15T07:40:41.315" v="2716" actId="27636"/>
-        <pc:sldMkLst>
-          <pc:docMk/>
-          <pc:sldMk cId="1586635455" sldId="427"/>
-        </pc:sldMkLst>
-      </pc:sldChg>
-      <pc:sldChg chg="del">
-        <pc:chgData name="Matthieu De Mari" userId="dfb708c9-d8dc-439f-9a3b-c772bf4a311c" providerId="ADAL" clId="{4E399D58-50D1-46C2-8982-3F7E3C91B930}" dt="2023-10-19T07:24:58.442" v="50" actId="47"/>
-        <pc:sldMkLst>
-          <pc:docMk/>
-          <pc:sldMk cId="76065098" sldId="429"/>
-        </pc:sldMkLst>
-      </pc:sldChg>
-      <pc:sldChg chg="del">
-        <pc:chgData name="Matthieu De Mari" userId="dfb708c9-d8dc-439f-9a3b-c772bf4a311c" providerId="ADAL" clId="{4E399D58-50D1-46C2-8982-3F7E3C91B930}" dt="2023-10-19T07:24:58.442" v="50" actId="47"/>
-        <pc:sldMkLst>
-          <pc:docMk/>
-          <pc:sldMk cId="600619302" sldId="430"/>
-        </pc:sldMkLst>
-      </pc:sldChg>
-      <pc:sldChg chg="del">
-        <pc:chgData name="Matthieu De Mari" userId="dfb708c9-d8dc-439f-9a3b-c772bf4a311c" providerId="ADAL" clId="{4E399D58-50D1-46C2-8982-3F7E3C91B930}" dt="2023-10-19T07:24:58.442" v="50" actId="47"/>
-        <pc:sldMkLst>
-          <pc:docMk/>
-          <pc:sldMk cId="2954873226" sldId="431"/>
-        </pc:sldMkLst>
-      </pc:sldChg>
-      <pc:sldChg chg="del">
-        <pc:chgData name="Matthieu De Mari" userId="dfb708c9-d8dc-439f-9a3b-c772bf4a311c" providerId="ADAL" clId="{4E399D58-50D1-46C2-8982-3F7E3C91B930}" dt="2023-10-19T07:24:58.442" v="50" actId="47"/>
-        <pc:sldMkLst>
-          <pc:docMk/>
-          <pc:sldMk cId="2366763698" sldId="432"/>
-        </pc:sldMkLst>
-      </pc:sldChg>
-      <pc:sldChg chg="del">
-        <pc:chgData name="Matthieu De Mari" userId="dfb708c9-d8dc-439f-9a3b-c772bf4a311c" providerId="ADAL" clId="{4E399D58-50D1-46C2-8982-3F7E3C91B930}" dt="2023-10-19T07:24:58.442" v="50" actId="47"/>
-        <pc:sldMkLst>
-          <pc:docMk/>
-          <pc:sldMk cId="1791834708" sldId="433"/>
-        </pc:sldMkLst>
-      </pc:sldChg>
-      <pc:sldChg chg="del">
-        <pc:chgData name="Matthieu De Mari" userId="dfb708c9-d8dc-439f-9a3b-c772bf4a311c" providerId="ADAL" clId="{4E399D58-50D1-46C2-8982-3F7E3C91B930}" dt="2023-10-19T07:24:58.442" v="50" actId="47"/>
-        <pc:sldMkLst>
-          <pc:docMk/>
-          <pc:sldMk cId="2266139316" sldId="434"/>
-        </pc:sldMkLst>
-      </pc:sldChg>
-      <pc:sldChg chg="del">
-        <pc:chgData name="Matthieu De Mari" userId="dfb708c9-d8dc-439f-9a3b-c772bf4a311c" providerId="ADAL" clId="{4E399D58-50D1-46C2-8982-3F7E3C91B930}" dt="2023-10-19T07:24:59.294" v="51" actId="47"/>
-        <pc:sldMkLst>
-          <pc:docMk/>
-          <pc:sldMk cId="282863324" sldId="437"/>
-        </pc:sldMkLst>
-      </pc:sldChg>
-      <pc:sldChg chg="del">
-        <pc:chgData name="Matthieu De Mari" userId="dfb708c9-d8dc-439f-9a3b-c772bf4a311c" providerId="ADAL" clId="{4E399D58-50D1-46C2-8982-3F7E3C91B930}" dt="2023-10-19T07:24:59.294" v="51" actId="47"/>
-        <pc:sldMkLst>
-          <pc:docMk/>
-          <pc:sldMk cId="1648531005" sldId="438"/>
-        </pc:sldMkLst>
-      </pc:sldChg>
-      <pc:sldChg chg="del">
-        <pc:chgData name="Matthieu De Mari" userId="dfb708c9-d8dc-439f-9a3b-c772bf4a311c" providerId="ADAL" clId="{4E399D58-50D1-46C2-8982-3F7E3C91B930}" dt="2023-10-19T07:24:59.294" v="51" actId="47"/>
-        <pc:sldMkLst>
-          <pc:docMk/>
-          <pc:sldMk cId="2577277130" sldId="439"/>
-        </pc:sldMkLst>
-      </pc:sldChg>
-      <pc:sldChg chg="del">
-        <pc:chgData name="Matthieu De Mari" userId="dfb708c9-d8dc-439f-9a3b-c772bf4a311c" providerId="ADAL" clId="{4E399D58-50D1-46C2-8982-3F7E3C91B930}" dt="2023-10-19T07:24:59.294" v="51" actId="47"/>
-        <pc:sldMkLst>
-          <pc:docMk/>
-          <pc:sldMk cId="2191919470" sldId="440"/>
-        </pc:sldMkLst>
-      </pc:sldChg>
-      <pc:sldChg chg="del">
-        <pc:chgData name="Matthieu De Mari" userId="dfb708c9-d8dc-439f-9a3b-c772bf4a311c" providerId="ADAL" clId="{4E399D58-50D1-46C2-8982-3F7E3C91B930}" dt="2023-10-19T07:24:59.294" v="51" actId="47"/>
-        <pc:sldMkLst>
-          <pc:docMk/>
-          <pc:sldMk cId="2257941384" sldId="441"/>
-        </pc:sldMkLst>
-      </pc:sldChg>
-      <pc:sldChg chg="del">
-        <pc:chgData name="Matthieu De Mari" userId="dfb708c9-d8dc-439f-9a3b-c772bf4a311c" providerId="ADAL" clId="{4E399D58-50D1-46C2-8982-3F7E3C91B930}" dt="2023-10-19T07:24:59.294" v="51" actId="47"/>
-        <pc:sldMkLst>
-          <pc:docMk/>
-          <pc:sldMk cId="3705292892" sldId="444"/>
-        </pc:sldMkLst>
-      </pc:sldChg>
-      <pc:sldChg chg="del">
-        <pc:chgData name="Matthieu De Mari" userId="dfb708c9-d8dc-439f-9a3b-c772bf4a311c" providerId="ADAL" clId="{4E399D58-50D1-46C2-8982-3F7E3C91B930}" dt="2023-10-19T07:24:59.987" v="52" actId="47"/>
-        <pc:sldMkLst>
-          <pc:docMk/>
-          <pc:sldMk cId="3585737502" sldId="445"/>
-        </pc:sldMkLst>
-      </pc:sldChg>
-      <pc:sldChg chg="del">
-        <pc:chgData name="Matthieu De Mari" userId="dfb708c9-d8dc-439f-9a3b-c772bf4a311c" providerId="ADAL" clId="{4E399D58-50D1-46C2-8982-3F7E3C91B930}" dt="2023-10-19T07:24:59.987" v="52" actId="47"/>
-        <pc:sldMkLst>
-          <pc:docMk/>
-          <pc:sldMk cId="1738845767" sldId="448"/>
-        </pc:sldMkLst>
-      </pc:sldChg>
-      <pc:sldChg chg="del">
-        <pc:chgData name="Matthieu De Mari" userId="dfb708c9-d8dc-439f-9a3b-c772bf4a311c" providerId="ADAL" clId="{4E399D58-50D1-46C2-8982-3F7E3C91B930}" dt="2023-10-19T07:25:00.695" v="53" actId="47"/>
-        <pc:sldMkLst>
-          <pc:docMk/>
-          <pc:sldMk cId="3149159304" sldId="449"/>
-        </pc:sldMkLst>
-      </pc:sldChg>
-      <pc:sldChg chg="del">
-        <pc:chgData name="Matthieu De Mari" userId="dfb708c9-d8dc-439f-9a3b-c772bf4a311c" providerId="ADAL" clId="{4E399D58-50D1-46C2-8982-3F7E3C91B930}" dt="2023-10-19T07:25:00.695" v="53" actId="47"/>
-        <pc:sldMkLst>
-          <pc:docMk/>
-          <pc:sldMk cId="2020760118" sldId="450"/>
-        </pc:sldMkLst>
-      </pc:sldChg>
-      <pc:sldChg chg="del">
-        <pc:chgData name="Matthieu De Mari" userId="dfb708c9-d8dc-439f-9a3b-c772bf4a311c" providerId="ADAL" clId="{4E399D58-50D1-46C2-8982-3F7E3C91B930}" dt="2023-10-19T07:25:01.294" v="54" actId="47"/>
-        <pc:sldMkLst>
-          <pc:docMk/>
-          <pc:sldMk cId="1242261096" sldId="451"/>
-        </pc:sldMkLst>
-      </pc:sldChg>
-      <pc:sldChg chg="del">
-        <pc:chgData name="Matthieu De Mari" userId="dfb708c9-d8dc-439f-9a3b-c772bf4a311c" providerId="ADAL" clId="{4E399D58-50D1-46C2-8982-3F7E3C91B930}" dt="2023-10-19T07:25:02.094" v="55" actId="47"/>
-        <pc:sldMkLst>
-          <pc:docMk/>
-          <pc:sldMk cId="3102642038" sldId="453"/>
-        </pc:sldMkLst>
-      </pc:sldChg>
-      <pc:sldChg chg="del">
-        <pc:chgData name="Matthieu De Mari" userId="dfb708c9-d8dc-439f-9a3b-c772bf4a311c" providerId="ADAL" clId="{4E399D58-50D1-46C2-8982-3F7E3C91B930}" dt="2023-10-19T07:25:02.094" v="55" actId="47"/>
-        <pc:sldMkLst>
-          <pc:docMk/>
-          <pc:sldMk cId="4072425385" sldId="454"/>
-        </pc:sldMkLst>
-      </pc:sldChg>
-      <pc:sldChg chg="del">
-        <pc:chgData name="Matthieu De Mari" userId="dfb708c9-d8dc-439f-9a3b-c772bf4a311c" providerId="ADAL" clId="{4E399D58-50D1-46C2-8982-3F7E3C91B930}" dt="2023-10-19T07:24:58.442" v="50" actId="47"/>
-        <pc:sldMkLst>
-          <pc:docMk/>
-          <pc:sldMk cId="1628282840" sldId="455"/>
-        </pc:sldMkLst>
-      </pc:sldChg>
-      <pc:sldChg chg="modSp add del mod ord">
-        <pc:chgData name="Matthieu De Mari" userId="dfb708c9-d8dc-439f-9a3b-c772bf4a311c" providerId="ADAL" clId="{4E399D58-50D1-46C2-8982-3F7E3C91B930}" dt="2024-02-14T04:57:15.748" v="1545"/>
-        <pc:sldMkLst>
-          <pc:docMk/>
-          <pc:sldMk cId="1474802136" sldId="456"/>
-        </pc:sldMkLst>
-      </pc:sldChg>
-      <pc:sldChg chg="del">
-        <pc:chgData name="Matthieu De Mari" userId="dfb708c9-d8dc-439f-9a3b-c772bf4a311c" providerId="ADAL" clId="{4E399D58-50D1-46C2-8982-3F7E3C91B930}" dt="2023-10-19T07:25:03.633" v="57" actId="47"/>
-        <pc:sldMkLst>
-          <pc:docMk/>
-          <pc:sldMk cId="3858745428" sldId="457"/>
-        </pc:sldMkLst>
-      </pc:sldChg>
-      <pc:sldChg chg="del">
-        <pc:chgData name="Matthieu De Mari" userId="dfb708c9-d8dc-439f-9a3b-c772bf4a311c" providerId="ADAL" clId="{4E399D58-50D1-46C2-8982-3F7E3C91B930}" dt="2023-10-19T07:25:03.633" v="57" actId="47"/>
-        <pc:sldMkLst>
-          <pc:docMk/>
-          <pc:sldMk cId="3624547080" sldId="459"/>
-        </pc:sldMkLst>
-      </pc:sldChg>
-      <pc:sldChg chg="del">
-        <pc:chgData name="Matthieu De Mari" userId="dfb708c9-d8dc-439f-9a3b-c772bf4a311c" providerId="ADAL" clId="{4E399D58-50D1-46C2-8982-3F7E3C91B930}" dt="2023-10-19T07:25:03.633" v="57" actId="47"/>
-        <pc:sldMkLst>
-          <pc:docMk/>
-          <pc:sldMk cId="727967492" sldId="460"/>
-        </pc:sldMkLst>
-      </pc:sldChg>
-      <pc:sldChg chg="modSp add del mod">
-        <pc:chgData name="Matthieu De Mari" userId="dfb708c9-d8dc-439f-9a3b-c772bf4a311c" providerId="ADAL" clId="{4E399D58-50D1-46C2-8982-3F7E3C91B930}" dt="2024-02-15T07:47:43.528" v="3089" actId="113"/>
-        <pc:sldMkLst>
-          <pc:docMk/>
-          <pc:sldMk cId="813445278" sldId="461"/>
-        </pc:sldMkLst>
-      </pc:sldChg>
-      <pc:sldChg chg="del">
-        <pc:chgData name="Matthieu De Mari" userId="dfb708c9-d8dc-439f-9a3b-c772bf4a311c" providerId="ADAL" clId="{4E399D58-50D1-46C2-8982-3F7E3C91B930}" dt="2023-10-19T07:25:03.633" v="57" actId="47"/>
-        <pc:sldMkLst>
-          <pc:docMk/>
-          <pc:sldMk cId="2989704858" sldId="462"/>
-        </pc:sldMkLst>
-      </pc:sldChg>
-      <pc:sldChg chg="del">
-        <pc:chgData name="Matthieu De Mari" userId="dfb708c9-d8dc-439f-9a3b-c772bf4a311c" providerId="ADAL" clId="{4E399D58-50D1-46C2-8982-3F7E3C91B930}" dt="2023-10-19T07:25:04.423" v="58" actId="47"/>
-        <pc:sldMkLst>
-          <pc:docMk/>
-          <pc:sldMk cId="3007767847" sldId="463"/>
-        </pc:sldMkLst>
-      </pc:sldChg>
-      <pc:sldChg chg="del">
-        <pc:chgData name="Matthieu De Mari" userId="dfb708c9-d8dc-439f-9a3b-c772bf4a311c" providerId="ADAL" clId="{4E399D58-50D1-46C2-8982-3F7E3C91B930}" dt="2023-10-19T07:25:04.423" v="58" actId="47"/>
-        <pc:sldMkLst>
-          <pc:docMk/>
-          <pc:sldMk cId="47889816" sldId="464"/>
-        </pc:sldMkLst>
-      </pc:sldChg>
-      <pc:sldChg chg="del">
-        <pc:chgData name="Matthieu De Mari" userId="dfb708c9-d8dc-439f-9a3b-c772bf4a311c" providerId="ADAL" clId="{4E399D58-50D1-46C2-8982-3F7E3C91B930}" dt="2023-10-19T07:25:05.055" v="59" actId="47"/>
-        <pc:sldMkLst>
-          <pc:docMk/>
-          <pc:sldMk cId="4050530474" sldId="465"/>
-        </pc:sldMkLst>
-      </pc:sldChg>
-      <pc:sldChg chg="del">
-        <pc:chgData name="Matthieu De Mari" userId="dfb708c9-d8dc-439f-9a3b-c772bf4a311c" providerId="ADAL" clId="{4E399D58-50D1-46C2-8982-3F7E3C91B930}" dt="2023-10-19T07:25:05.055" v="59" actId="47"/>
-        <pc:sldMkLst>
-          <pc:docMk/>
-          <pc:sldMk cId="4107990403" sldId="466"/>
-        </pc:sldMkLst>
-      </pc:sldChg>
-      <pc:sldChg chg="del">
-        <pc:chgData name="Matthieu De Mari" userId="dfb708c9-d8dc-439f-9a3b-c772bf4a311c" providerId="ADAL" clId="{4E399D58-50D1-46C2-8982-3F7E3C91B930}" dt="2023-10-19T07:25:05.055" v="59" actId="47"/>
-        <pc:sldMkLst>
-          <pc:docMk/>
-          <pc:sldMk cId="4111616225" sldId="467"/>
-        </pc:sldMkLst>
-      </pc:sldChg>
-      <pc:sldChg chg="del">
-        <pc:chgData name="Matthieu De Mari" userId="dfb708c9-d8dc-439f-9a3b-c772bf4a311c" providerId="ADAL" clId="{4E399D58-50D1-46C2-8982-3F7E3C91B930}" dt="2023-10-19T07:25:05.055" v="59" actId="47"/>
-        <pc:sldMkLst>
-          <pc:docMk/>
-          <pc:sldMk cId="1345006296" sldId="468"/>
-        </pc:sldMkLst>
-      </pc:sldChg>
-      <pc:sldChg chg="modSp add del mod">
-        <pc:chgData name="Matthieu De Mari" userId="dfb708c9-d8dc-439f-9a3b-c772bf4a311c" providerId="ADAL" clId="{4E399D58-50D1-46C2-8982-3F7E3C91B930}" dt="2023-10-19T07:25:29.365" v="70" actId="20577"/>
-        <pc:sldMkLst>
-          <pc:docMk/>
-          <pc:sldMk cId="3221576718" sldId="471"/>
-        </pc:sldMkLst>
-      </pc:sldChg>
-      <pc:sldChg chg="modSp add del mod">
-        <pc:chgData name="Matthieu De Mari" userId="dfb708c9-d8dc-439f-9a3b-c772bf4a311c" providerId="ADAL" clId="{4E399D58-50D1-46C2-8982-3F7E3C91B930}" dt="2024-02-15T07:43:33.007" v="2963" actId="20577"/>
-        <pc:sldMkLst>
-          <pc:docMk/>
-          <pc:sldMk cId="2469439250" sldId="472"/>
-        </pc:sldMkLst>
-      </pc:sldChg>
-      <pc:sldChg chg="del">
-        <pc:chgData name="Matthieu De Mari" userId="dfb708c9-d8dc-439f-9a3b-c772bf4a311c" providerId="ADAL" clId="{4E399D58-50D1-46C2-8982-3F7E3C91B930}" dt="2023-10-19T07:25:03.633" v="57" actId="47"/>
-        <pc:sldMkLst>
-          <pc:docMk/>
-          <pc:sldMk cId="2053185467" sldId="473"/>
-        </pc:sldMkLst>
-      </pc:sldChg>
-      <pc:sldChg chg="modSp add del mod">
-        <pc:chgData name="Matthieu De Mari" userId="dfb708c9-d8dc-439f-9a3b-c772bf4a311c" providerId="ADAL" clId="{4E399D58-50D1-46C2-8982-3F7E3C91B930}" dt="2024-02-16T02:20:48.025" v="3318" actId="20577"/>
-        <pc:sldMkLst>
-          <pc:docMk/>
-          <pc:sldMk cId="453310084" sldId="475"/>
-        </pc:sldMkLst>
-      </pc:sldChg>
-      <pc:sldChg chg="del">
-        <pc:chgData name="Matthieu De Mari" userId="dfb708c9-d8dc-439f-9a3b-c772bf4a311c" providerId="ADAL" clId="{4E399D58-50D1-46C2-8982-3F7E3C91B930}" dt="2023-10-19T07:25:05.803" v="60" actId="47"/>
-        <pc:sldMkLst>
-          <pc:docMk/>
-          <pc:sldMk cId="1028518339" sldId="476"/>
-        </pc:sldMkLst>
-      </pc:sldChg>
-      <pc:sldChg chg="modSp add mod">
-        <pc:chgData name="Matthieu De Mari" userId="dfb708c9-d8dc-439f-9a3b-c772bf4a311c" providerId="ADAL" clId="{4E399D58-50D1-46C2-8982-3F7E3C91B930}" dt="2024-02-15T07:42:46.742" v="2913" actId="20577"/>
-        <pc:sldMkLst>
-          <pc:docMk/>
-          <pc:sldMk cId="4165722588" sldId="476"/>
-        </pc:sldMkLst>
-      </pc:sldChg>
-      <pc:sldChg chg="modSp add del mod">
-        <pc:chgData name="Matthieu De Mari" userId="dfb708c9-d8dc-439f-9a3b-c772bf4a311c" providerId="ADAL" clId="{4E399D58-50D1-46C2-8982-3F7E3C91B930}" dt="2024-02-14T04:58:16.260" v="1566" actId="47"/>
-        <pc:sldMkLst>
-          <pc:docMk/>
-          <pc:sldMk cId="1830181928" sldId="477"/>
-        </pc:sldMkLst>
-      </pc:sldChg>
-      <pc:sldChg chg="del">
-        <pc:chgData name="Matthieu De Mari" userId="dfb708c9-d8dc-439f-9a3b-c772bf4a311c" providerId="ADAL" clId="{4E399D58-50D1-46C2-8982-3F7E3C91B930}" dt="2023-10-19T07:25:05.803" v="60" actId="47"/>
-        <pc:sldMkLst>
-          <pc:docMk/>
-          <pc:sldMk cId="932509960" sldId="478"/>
-        </pc:sldMkLst>
-      </pc:sldChg>
-      <pc:sldChg chg="modSp new mod">
-        <pc:chgData name="Matthieu De Mari" userId="dfb708c9-d8dc-439f-9a3b-c772bf4a311c" providerId="ADAL" clId="{4E399D58-50D1-46C2-8982-3F7E3C91B930}" dt="2023-10-19T07:37:45.783" v="924" actId="20577"/>
-        <pc:sldMkLst>
-          <pc:docMk/>
-          <pc:sldMk cId="4291604125" sldId="478"/>
-        </pc:sldMkLst>
-      </pc:sldChg>
-      <pc:sldChg chg="del">
-        <pc:chgData name="Matthieu De Mari" userId="dfb708c9-d8dc-439f-9a3b-c772bf4a311c" providerId="ADAL" clId="{4E399D58-50D1-46C2-8982-3F7E3C91B930}" dt="2023-10-19T07:25:05.803" v="60" actId="47"/>
-        <pc:sldMkLst>
-          <pc:docMk/>
-          <pc:sldMk cId="1094051178" sldId="479"/>
-        </pc:sldMkLst>
-      </pc:sldChg>
-      <pc:sldChg chg="modSp new mod">
-        <pc:chgData name="Matthieu De Mari" userId="dfb708c9-d8dc-439f-9a3b-c772bf4a311c" providerId="ADAL" clId="{4E399D58-50D1-46C2-8982-3F7E3C91B930}" dt="2024-03-14T06:21:16.360" v="4265" actId="20577"/>
-        <pc:sldMkLst>
-          <pc:docMk/>
-          <pc:sldMk cId="4293451329" sldId="479"/>
-        </pc:sldMkLst>
-      </pc:sldChg>
-      <pc:sldChg chg="del">
-        <pc:chgData name="Matthieu De Mari" userId="dfb708c9-d8dc-439f-9a3b-c772bf4a311c" providerId="ADAL" clId="{4E399D58-50D1-46C2-8982-3F7E3C91B930}" dt="2023-10-19T07:25:05.803" v="60" actId="47"/>
-        <pc:sldMkLst>
-          <pc:docMk/>
-          <pc:sldMk cId="1275862355" sldId="480"/>
-        </pc:sldMkLst>
-      </pc:sldChg>
-      <pc:sldChg chg="modSp new mod ord">
-        <pc:chgData name="Matthieu De Mari" userId="dfb708c9-d8dc-439f-9a3b-c772bf4a311c" providerId="ADAL" clId="{4E399D58-50D1-46C2-8982-3F7E3C91B930}" dt="2024-03-14T06:21:52.075" v="4270" actId="20577"/>
-        <pc:sldMkLst>
-          <pc:docMk/>
-          <pc:sldMk cId="1299130042" sldId="480"/>
-        </pc:sldMkLst>
-      </pc:sldChg>
-      <pc:sldChg chg="del">
-        <pc:chgData name="Matthieu De Mari" userId="dfb708c9-d8dc-439f-9a3b-c772bf4a311c" providerId="ADAL" clId="{4E399D58-50D1-46C2-8982-3F7E3C91B930}" dt="2023-10-19T07:25:05.803" v="60" actId="47"/>
-        <pc:sldMkLst>
-          <pc:docMk/>
-          <pc:sldMk cId="2239257233" sldId="481"/>
-        </pc:sldMkLst>
-      </pc:sldChg>
-      <pc:sldChg chg="add">
-        <pc:chgData name="Matthieu De Mari" userId="dfb708c9-d8dc-439f-9a3b-c772bf4a311c" providerId="ADAL" clId="{4E399D58-50D1-46C2-8982-3F7E3C91B930}" dt="2024-02-15T03:39:00.303" v="2304"/>
-        <pc:sldMkLst>
-          <pc:docMk/>
-          <pc:sldMk cId="2420944380" sldId="481"/>
-        </pc:sldMkLst>
-      </pc:sldChg>
-      <pc:sldChg chg="del">
-        <pc:chgData name="Matthieu De Mari" userId="dfb708c9-d8dc-439f-9a3b-c772bf4a311c" providerId="ADAL" clId="{4E399D58-50D1-46C2-8982-3F7E3C91B930}" dt="2023-10-19T07:25:05.803" v="60" actId="47"/>
-        <pc:sldMkLst>
-          <pc:docMk/>
-          <pc:sldMk cId="2562768069" sldId="482"/>
-        </pc:sldMkLst>
-      </pc:sldChg>
-      <pc:sldChg chg="add">
-        <pc:chgData name="Matthieu De Mari" userId="dfb708c9-d8dc-439f-9a3b-c772bf4a311c" providerId="ADAL" clId="{4E399D58-50D1-46C2-8982-3F7E3C91B930}" dt="2024-02-15T03:39:00.303" v="2304"/>
-        <pc:sldMkLst>
-          <pc:docMk/>
-          <pc:sldMk cId="3878320393" sldId="482"/>
-        </pc:sldMkLst>
-      </pc:sldChg>
-      <pc:sldChg chg="modSp add mod">
-        <pc:chgData name="Matthieu De Mari" userId="dfb708c9-d8dc-439f-9a3b-c772bf4a311c" providerId="ADAL" clId="{4E399D58-50D1-46C2-8982-3F7E3C91B930}" dt="2024-02-15T03:39:08.854" v="2332" actId="20577"/>
-        <pc:sldMkLst>
-          <pc:docMk/>
-          <pc:sldMk cId="1200781502" sldId="483"/>
-        </pc:sldMkLst>
-      </pc:sldChg>
-      <pc:sldChg chg="del">
-        <pc:chgData name="Matthieu De Mari" userId="dfb708c9-d8dc-439f-9a3b-c772bf4a311c" providerId="ADAL" clId="{4E399D58-50D1-46C2-8982-3F7E3C91B930}" dt="2023-10-19T07:25:05.803" v="60" actId="47"/>
-        <pc:sldMkLst>
-          <pc:docMk/>
-          <pc:sldMk cId="3541171842" sldId="483"/>
-        </pc:sldMkLst>
-      </pc:sldChg>
-      <pc:sldChg chg="del">
-        <pc:chgData name="Matthieu De Mari" userId="dfb708c9-d8dc-439f-9a3b-c772bf4a311c" providerId="ADAL" clId="{4E399D58-50D1-46C2-8982-3F7E3C91B930}" dt="2023-10-19T07:25:05.803" v="60" actId="47"/>
-        <pc:sldMkLst>
-          <pc:docMk/>
-          <pc:sldMk cId="199935466" sldId="484"/>
-        </pc:sldMkLst>
-      </pc:sldChg>
-      <pc:sldChg chg="modSp add mod">
-        <pc:chgData name="Matthieu De Mari" userId="dfb708c9-d8dc-439f-9a3b-c772bf4a311c" providerId="ADAL" clId="{4E399D58-50D1-46C2-8982-3F7E3C91B930}" dt="2024-02-16T02:19:01.183" v="3180" actId="20577"/>
-        <pc:sldMkLst>
-          <pc:docMk/>
-          <pc:sldMk cId="4147471152" sldId="484"/>
-        </pc:sldMkLst>
-      </pc:sldChg>
-      <pc:sldChg chg="del">
-        <pc:chgData name="Matthieu De Mari" userId="dfb708c9-d8dc-439f-9a3b-c772bf4a311c" providerId="ADAL" clId="{4E399D58-50D1-46C2-8982-3F7E3C91B930}" dt="2023-10-19T07:25:05.803" v="60" actId="47"/>
-        <pc:sldMkLst>
-          <pc:docMk/>
-          <pc:sldMk cId="3459688009" sldId="485"/>
-        </pc:sldMkLst>
-      </pc:sldChg>
-      <pc:sldChg chg="addSp delSp modSp add mod">
-        <pc:chgData name="Matthieu De Mari" userId="dfb708c9-d8dc-439f-9a3b-c772bf4a311c" providerId="ADAL" clId="{4E399D58-50D1-46C2-8982-3F7E3C91B930}" dt="2024-02-22T03:14:48.974" v="3329" actId="1076"/>
-        <pc:sldMkLst>
-          <pc:docMk/>
-          <pc:sldMk cId="4073739501" sldId="485"/>
-        </pc:sldMkLst>
-      </pc:sldChg>
-      <pc:sldChg chg="addSp modSp add mod">
-        <pc:chgData name="Matthieu De Mari" userId="dfb708c9-d8dc-439f-9a3b-c772bf4a311c" providerId="ADAL" clId="{4E399D58-50D1-46C2-8982-3F7E3C91B930}" dt="2024-02-16T02:19:40.516" v="3230" actId="20577"/>
-        <pc:sldMkLst>
-          <pc:docMk/>
-          <pc:sldMk cId="1154408730" sldId="486"/>
-        </pc:sldMkLst>
-      </pc:sldChg>
-      <pc:sldChg chg="del">
-        <pc:chgData name="Matthieu De Mari" userId="dfb708c9-d8dc-439f-9a3b-c772bf4a311c" providerId="ADAL" clId="{4E399D58-50D1-46C2-8982-3F7E3C91B930}" dt="2023-10-19T07:25:05.803" v="60" actId="47"/>
-        <pc:sldMkLst>
-          <pc:docMk/>
-          <pc:sldMk cId="3530460312" sldId="486"/>
-        </pc:sldMkLst>
-      </pc:sldChg>
-      <pc:sldChg chg="del">
-        <pc:chgData name="Matthieu De Mari" userId="dfb708c9-d8dc-439f-9a3b-c772bf4a311c" providerId="ADAL" clId="{4E399D58-50D1-46C2-8982-3F7E3C91B930}" dt="2023-10-19T07:25:06.493" v="61" actId="47"/>
-        <pc:sldMkLst>
-          <pc:docMk/>
-          <pc:sldMk cId="125150915" sldId="487"/>
-        </pc:sldMkLst>
-      </pc:sldChg>
-      <pc:sldChg chg="modSp add del mod">
-        <pc:chgData name="Matthieu De Mari" userId="dfb708c9-d8dc-439f-9a3b-c772bf4a311c" providerId="ADAL" clId="{4E399D58-50D1-46C2-8982-3F7E3C91B930}" dt="2024-02-22T06:33:59.525" v="4261" actId="47"/>
-        <pc:sldMkLst>
-          <pc:docMk/>
-          <pc:sldMk cId="2113834828" sldId="487"/>
-        </pc:sldMkLst>
-      </pc:sldChg>
-      <pc:sldChg chg="modSp add del mod">
-        <pc:chgData name="Matthieu De Mari" userId="dfb708c9-d8dc-439f-9a3b-c772bf4a311c" providerId="ADAL" clId="{4E399D58-50D1-46C2-8982-3F7E3C91B930}" dt="2024-02-22T06:30:16.499" v="4259" actId="2696"/>
-        <pc:sldMkLst>
-          <pc:docMk/>
-          <pc:sldMk cId="539403101" sldId="488"/>
-        </pc:sldMkLst>
-      </pc:sldChg>
-      <pc:sldChg chg="del">
-        <pc:chgData name="Matthieu De Mari" userId="dfb708c9-d8dc-439f-9a3b-c772bf4a311c" providerId="ADAL" clId="{4E399D58-50D1-46C2-8982-3F7E3C91B930}" dt="2023-10-19T07:25:06.493" v="61" actId="47"/>
-        <pc:sldMkLst>
-          <pc:docMk/>
-          <pc:sldMk cId="1228659976" sldId="488"/>
-        </pc:sldMkLst>
-      </pc:sldChg>
-      <pc:sldChg chg="addSp modSp add del mod">
-        <pc:chgData name="Matthieu De Mari" userId="dfb708c9-d8dc-439f-9a3b-c772bf4a311c" providerId="ADAL" clId="{4E399D58-50D1-46C2-8982-3F7E3C91B930}" dt="2024-02-22T06:30:25.834" v="4260" actId="2696"/>
-        <pc:sldMkLst>
-          <pc:docMk/>
-          <pc:sldMk cId="1857698675" sldId="489"/>
-        </pc:sldMkLst>
-      </pc:sldChg>
-      <pc:sldChg chg="del">
-        <pc:chgData name="Matthieu De Mari" userId="dfb708c9-d8dc-439f-9a3b-c772bf4a311c" providerId="ADAL" clId="{4E399D58-50D1-46C2-8982-3F7E3C91B930}" dt="2023-10-19T07:25:06.493" v="61" actId="47"/>
-        <pc:sldMkLst>
-          <pc:docMk/>
-          <pc:sldMk cId="3872619914" sldId="489"/>
-        </pc:sldMkLst>
-      </pc:sldChg>
-      <pc:sldChg chg="del">
-        <pc:chgData name="Matthieu De Mari" userId="dfb708c9-d8dc-439f-9a3b-c772bf4a311c" providerId="ADAL" clId="{4E399D58-50D1-46C2-8982-3F7E3C91B930}" dt="2023-10-19T07:25:07.798" v="63" actId="47"/>
-        <pc:sldMkLst>
-          <pc:docMk/>
-          <pc:sldMk cId="3123829798" sldId="490"/>
-        </pc:sldMkLst>
-      </pc:sldChg>
-      <pc:sldChg chg="add">
-        <pc:chgData name="Matthieu De Mari" userId="dfb708c9-d8dc-439f-9a3b-c772bf4a311c" providerId="ADAL" clId="{4E399D58-50D1-46C2-8982-3F7E3C91B930}" dt="2024-02-22T06:29:39.895" v="4258" actId="2890"/>
-        <pc:sldMkLst>
-          <pc:docMk/>
-          <pc:sldMk cId="3733989984" sldId="490"/>
-        </pc:sldMkLst>
-      </pc:sldChg>
-      <pc:sldChg chg="del">
-        <pc:chgData name="Matthieu De Mari" userId="dfb708c9-d8dc-439f-9a3b-c772bf4a311c" providerId="ADAL" clId="{4E399D58-50D1-46C2-8982-3F7E3C91B930}" dt="2023-10-19T07:25:07.196" v="62" actId="47"/>
-        <pc:sldMkLst>
-          <pc:docMk/>
-          <pc:sldMk cId="3899213262" sldId="491"/>
-        </pc:sldMkLst>
-      </pc:sldChg>
-      <pc:sldChg chg="del">
-        <pc:chgData name="Matthieu De Mari" userId="dfb708c9-d8dc-439f-9a3b-c772bf4a311c" providerId="ADAL" clId="{4E399D58-50D1-46C2-8982-3F7E3C91B930}" dt="2023-10-19T07:25:07.196" v="62" actId="47"/>
-        <pc:sldMkLst>
-          <pc:docMk/>
-          <pc:sldMk cId="3076288606" sldId="492"/>
-        </pc:sldMkLst>
-      </pc:sldChg>
-    </pc:docChg>
-  </pc:docChgLst>
-  <pc:docChgLst>
-    <pc:chgData name="Matthieu De Mari" userId="dfb708c9-d8dc-439f-9a3b-c772bf4a311c" providerId="ADAL" clId="{01F119BB-4DC1-4633-817B-0E51DD74E1BF}"/>
-    <pc:docChg chg="undo custSel addSld modSld modSection">
-      <pc:chgData name="Matthieu De Mari" userId="dfb708c9-d8dc-439f-9a3b-c772bf4a311c" providerId="ADAL" clId="{01F119BB-4DC1-4633-817B-0E51DD74E1BF}" dt="2025-02-27T03:51:06.128" v="546" actId="20577"/>
-      <pc:docMkLst>
-        <pc:docMk/>
-      </pc:docMkLst>
-      <pc:sldChg chg="modSp add mod">
-        <pc:chgData name="Matthieu De Mari" userId="dfb708c9-d8dc-439f-9a3b-c772bf4a311c" providerId="ADAL" clId="{01F119BB-4DC1-4633-817B-0E51DD74E1BF}" dt="2025-02-27T03:42:52.735" v="2" actId="20577"/>
-        <pc:sldMkLst>
-          <pc:docMk/>
-          <pc:sldMk cId="1287680873" sldId="488"/>
-        </pc:sldMkLst>
-        <pc:spChg chg="mod">
-          <ac:chgData name="Matthieu De Mari" userId="dfb708c9-d8dc-439f-9a3b-c772bf4a311c" providerId="ADAL" clId="{01F119BB-4DC1-4633-817B-0E51DD74E1BF}" dt="2025-02-27T03:42:52.735" v="2" actId="20577"/>
-          <ac:spMkLst>
-            <pc:docMk/>
-            <pc:sldMk cId="1287680873" sldId="488"/>
-            <ac:spMk id="2" creationId="{9D7A6C26-E324-2252-13C0-5021C71AEC1A}"/>
-          </ac:spMkLst>
-        </pc:spChg>
-      </pc:sldChg>
-      <pc:sldChg chg="modSp add mod">
-        <pc:chgData name="Matthieu De Mari" userId="dfb708c9-d8dc-439f-9a3b-c772bf4a311c" providerId="ADAL" clId="{01F119BB-4DC1-4633-817B-0E51DD74E1BF}" dt="2025-02-27T03:42:55.509" v="4" actId="20577"/>
-        <pc:sldMkLst>
-          <pc:docMk/>
-          <pc:sldMk cId="3212913181" sldId="489"/>
-        </pc:sldMkLst>
-        <pc:spChg chg="mod">
-          <ac:chgData name="Matthieu De Mari" userId="dfb708c9-d8dc-439f-9a3b-c772bf4a311c" providerId="ADAL" clId="{01F119BB-4DC1-4633-817B-0E51DD74E1BF}" dt="2025-02-27T03:42:55.509" v="4" actId="20577"/>
-          <ac:spMkLst>
-            <pc:docMk/>
-            <pc:sldMk cId="3212913181" sldId="489"/>
-            <ac:spMk id="2" creationId="{EEBDAB8C-62B5-14AD-14A3-C08E0F5D914B}"/>
-          </ac:spMkLst>
-        </pc:spChg>
-      </pc:sldChg>
-      <pc:sldChg chg="modSp add mod">
-        <pc:chgData name="Matthieu De Mari" userId="dfb708c9-d8dc-439f-9a3b-c772bf4a311c" providerId="ADAL" clId="{01F119BB-4DC1-4633-817B-0E51DD74E1BF}" dt="2025-02-27T03:43:34.926" v="136" actId="20577"/>
-        <pc:sldMkLst>
-          <pc:docMk/>
-          <pc:sldMk cId="1805925943" sldId="494"/>
-        </pc:sldMkLst>
-        <pc:spChg chg="mod">
-          <ac:chgData name="Matthieu De Mari" userId="dfb708c9-d8dc-439f-9a3b-c772bf4a311c" providerId="ADAL" clId="{01F119BB-4DC1-4633-817B-0E51DD74E1BF}" dt="2025-02-27T03:43:34.926" v="136" actId="20577"/>
-          <ac:spMkLst>
-            <pc:docMk/>
-            <pc:sldMk cId="1805925943" sldId="494"/>
-            <ac:spMk id="2" creationId="{6B422E25-5BDC-44A4-782D-E10C19914AD0}"/>
-          </ac:spMkLst>
-        </pc:spChg>
-        <pc:spChg chg="mod">
-          <ac:chgData name="Matthieu De Mari" userId="dfb708c9-d8dc-439f-9a3b-c772bf4a311c" providerId="ADAL" clId="{01F119BB-4DC1-4633-817B-0E51DD74E1BF}" dt="2025-02-27T03:43:29.646" v="128" actId="20577"/>
-          <ac:spMkLst>
-            <pc:docMk/>
-            <pc:sldMk cId="1805925943" sldId="494"/>
-            <ac:spMk id="3" creationId="{029D53AE-33B4-1E84-C3CA-779E01865F3C}"/>
-          </ac:spMkLst>
-        </pc:spChg>
-      </pc:sldChg>
-      <pc:sldChg chg="addSp delSp modSp add mod modClrScheme chgLayout">
-        <pc:chgData name="Matthieu De Mari" userId="dfb708c9-d8dc-439f-9a3b-c772bf4a311c" providerId="ADAL" clId="{01F119BB-4DC1-4633-817B-0E51DD74E1BF}" dt="2025-02-27T03:44:37.199" v="220" actId="20577"/>
-        <pc:sldMkLst>
-          <pc:docMk/>
-          <pc:sldMk cId="1047907544" sldId="495"/>
-        </pc:sldMkLst>
-        <pc:spChg chg="mod ord">
-          <ac:chgData name="Matthieu De Mari" userId="dfb708c9-d8dc-439f-9a3b-c772bf4a311c" providerId="ADAL" clId="{01F119BB-4DC1-4633-817B-0E51DD74E1BF}" dt="2025-02-27T03:44:14.568" v="194" actId="700"/>
-          <ac:spMkLst>
-            <pc:docMk/>
-            <pc:sldMk cId="1047907544" sldId="495"/>
-            <ac:spMk id="2" creationId="{C4B4258F-027F-2034-B904-CD92D21EDA37}"/>
-          </ac:spMkLst>
-        </pc:spChg>
-        <pc:spChg chg="mod ord">
-          <ac:chgData name="Matthieu De Mari" userId="dfb708c9-d8dc-439f-9a3b-c772bf4a311c" providerId="ADAL" clId="{01F119BB-4DC1-4633-817B-0E51DD74E1BF}" dt="2025-02-27T03:44:37.199" v="220" actId="20577"/>
-          <ac:spMkLst>
-            <pc:docMk/>
-            <pc:sldMk cId="1047907544" sldId="495"/>
-            <ac:spMk id="4" creationId="{760E0488-B9CB-D4AE-791C-BB0C7D10C672}"/>
-          </ac:spMkLst>
-        </pc:spChg>
-        <pc:spChg chg="del">
-          <ac:chgData name="Matthieu De Mari" userId="dfb708c9-d8dc-439f-9a3b-c772bf4a311c" providerId="ADAL" clId="{01F119BB-4DC1-4633-817B-0E51DD74E1BF}" dt="2025-02-27T03:44:10.189" v="193" actId="478"/>
-          <ac:spMkLst>
-            <pc:docMk/>
-            <pc:sldMk cId="1047907544" sldId="495"/>
-            <ac:spMk id="11" creationId="{45F1F001-4AFC-6471-7EC6-02EF999CFE0B}"/>
-          </ac:spMkLst>
-        </pc:spChg>
-        <pc:spChg chg="del">
-          <ac:chgData name="Matthieu De Mari" userId="dfb708c9-d8dc-439f-9a3b-c772bf4a311c" providerId="ADAL" clId="{01F119BB-4DC1-4633-817B-0E51DD74E1BF}" dt="2025-02-27T03:44:10.189" v="193" actId="478"/>
-          <ac:spMkLst>
-            <pc:docMk/>
-            <pc:sldMk cId="1047907544" sldId="495"/>
-            <ac:spMk id="12" creationId="{02B01252-1259-8F27-21A7-39325DBF69D5}"/>
-          </ac:spMkLst>
-        </pc:spChg>
-        <pc:spChg chg="del">
-          <ac:chgData name="Matthieu De Mari" userId="dfb708c9-d8dc-439f-9a3b-c772bf4a311c" providerId="ADAL" clId="{01F119BB-4DC1-4633-817B-0E51DD74E1BF}" dt="2025-02-27T03:44:10.189" v="193" actId="478"/>
-          <ac:spMkLst>
-            <pc:docMk/>
-            <pc:sldMk cId="1047907544" sldId="495"/>
-            <ac:spMk id="15" creationId="{27FFA99B-6494-9D5E-C0FF-A63D9DE4F342}"/>
-          </ac:spMkLst>
-        </pc:spChg>
-        <pc:spChg chg="del">
-          <ac:chgData name="Matthieu De Mari" userId="dfb708c9-d8dc-439f-9a3b-c772bf4a311c" providerId="ADAL" clId="{01F119BB-4DC1-4633-817B-0E51DD74E1BF}" dt="2025-02-27T03:44:10.189" v="193" actId="478"/>
-          <ac:spMkLst>
-            <pc:docMk/>
-            <pc:sldMk cId="1047907544" sldId="495"/>
-            <ac:spMk id="27" creationId="{02BB54BB-1795-9DBB-03CF-E65CF8446EE3}"/>
-          </ac:spMkLst>
-        </pc:spChg>
-        <pc:spChg chg="del">
-          <ac:chgData name="Matthieu De Mari" userId="dfb708c9-d8dc-439f-9a3b-c772bf4a311c" providerId="ADAL" clId="{01F119BB-4DC1-4633-817B-0E51DD74E1BF}" dt="2025-02-27T03:44:10.189" v="193" actId="478"/>
-          <ac:spMkLst>
-            <pc:docMk/>
-            <pc:sldMk cId="1047907544" sldId="495"/>
-            <ac:spMk id="30" creationId="{EA38DA43-9069-EE9E-97A3-D391E16816E4}"/>
-          </ac:spMkLst>
-        </pc:spChg>
-        <pc:spChg chg="del">
-          <ac:chgData name="Matthieu De Mari" userId="dfb708c9-d8dc-439f-9a3b-c772bf4a311c" providerId="ADAL" clId="{01F119BB-4DC1-4633-817B-0E51DD74E1BF}" dt="2025-02-27T03:44:10.189" v="193" actId="478"/>
-          <ac:spMkLst>
-            <pc:docMk/>
-            <pc:sldMk cId="1047907544" sldId="495"/>
-            <ac:spMk id="31" creationId="{B8BD461A-8397-E906-D38D-6FD77EC361ED}"/>
-          </ac:spMkLst>
-        </pc:spChg>
-        <pc:spChg chg="del">
-          <ac:chgData name="Matthieu De Mari" userId="dfb708c9-d8dc-439f-9a3b-c772bf4a311c" providerId="ADAL" clId="{01F119BB-4DC1-4633-817B-0E51DD74E1BF}" dt="2025-02-27T03:44:10.189" v="193" actId="478"/>
-          <ac:spMkLst>
-            <pc:docMk/>
-            <pc:sldMk cId="1047907544" sldId="495"/>
-            <ac:spMk id="32" creationId="{405AA6AC-A7EE-71E5-C915-9E3E29E5C455}"/>
-          </ac:spMkLst>
-        </pc:spChg>
-        <pc:spChg chg="del">
-          <ac:chgData name="Matthieu De Mari" userId="dfb708c9-d8dc-439f-9a3b-c772bf4a311c" providerId="ADAL" clId="{01F119BB-4DC1-4633-817B-0E51DD74E1BF}" dt="2025-02-27T03:44:10.189" v="193" actId="478"/>
-          <ac:spMkLst>
-            <pc:docMk/>
-            <pc:sldMk cId="1047907544" sldId="495"/>
-            <ac:spMk id="33" creationId="{5A7EA8E8-4D57-996D-8461-37A2B2AD2B33}"/>
-          </ac:spMkLst>
-        </pc:spChg>
-        <pc:spChg chg="del">
-          <ac:chgData name="Matthieu De Mari" userId="dfb708c9-d8dc-439f-9a3b-c772bf4a311c" providerId="ADAL" clId="{01F119BB-4DC1-4633-817B-0E51DD74E1BF}" dt="2025-02-27T03:44:10.189" v="193" actId="478"/>
-          <ac:spMkLst>
-            <pc:docMk/>
-            <pc:sldMk cId="1047907544" sldId="495"/>
-            <ac:spMk id="35" creationId="{5EDC4947-7C95-B1C5-CC92-DE91654CBEC8}"/>
-          </ac:spMkLst>
-        </pc:spChg>
-        <pc:spChg chg="del">
-          <ac:chgData name="Matthieu De Mari" userId="dfb708c9-d8dc-439f-9a3b-c772bf4a311c" providerId="ADAL" clId="{01F119BB-4DC1-4633-817B-0E51DD74E1BF}" dt="2025-02-27T03:44:10.189" v="193" actId="478"/>
-          <ac:spMkLst>
-            <pc:docMk/>
-            <pc:sldMk cId="1047907544" sldId="495"/>
-            <ac:spMk id="36" creationId="{E24B7F74-941D-FFB4-00A9-A40B06660753}"/>
-          </ac:spMkLst>
-        </pc:spChg>
-        <pc:picChg chg="add mod">
-          <ac:chgData name="Matthieu De Mari" userId="dfb708c9-d8dc-439f-9a3b-c772bf4a311c" providerId="ADAL" clId="{01F119BB-4DC1-4633-817B-0E51DD74E1BF}" dt="2025-02-27T03:44:26.074" v="200" actId="1440"/>
-          <ac:picMkLst>
-            <pc:docMk/>
-            <pc:sldMk cId="1047907544" sldId="495"/>
-            <ac:picMk id="5" creationId="{49C9F1B8-98C4-3DF8-EB00-7A56D3FB3BE2}"/>
-          </ac:picMkLst>
-        </pc:picChg>
-      </pc:sldChg>
-      <pc:sldChg chg="delSp modSp add mod">
-        <pc:chgData name="Matthieu De Mari" userId="dfb708c9-d8dc-439f-9a3b-c772bf4a311c" providerId="ADAL" clId="{01F119BB-4DC1-4633-817B-0E51DD74E1BF}" dt="2025-02-27T03:47:50.322" v="364" actId="20577"/>
-        <pc:sldMkLst>
-          <pc:docMk/>
-          <pc:sldMk cId="676228117" sldId="496"/>
-        </pc:sldMkLst>
-        <pc:spChg chg="mod">
-          <ac:chgData name="Matthieu De Mari" userId="dfb708c9-d8dc-439f-9a3b-c772bf4a311c" providerId="ADAL" clId="{01F119BB-4DC1-4633-817B-0E51DD74E1BF}" dt="2025-02-27T03:47:50.322" v="364" actId="20577"/>
-          <ac:spMkLst>
-            <pc:docMk/>
-            <pc:sldMk cId="676228117" sldId="496"/>
-            <ac:spMk id="4" creationId="{E487A5DE-294A-4206-C771-AA76AF255208}"/>
-          </ac:spMkLst>
-        </pc:spChg>
-        <pc:picChg chg="del">
-          <ac:chgData name="Matthieu De Mari" userId="dfb708c9-d8dc-439f-9a3b-c772bf4a311c" providerId="ADAL" clId="{01F119BB-4DC1-4633-817B-0E51DD74E1BF}" dt="2025-02-27T03:45:10.337" v="278" actId="478"/>
-          <ac:picMkLst>
-            <pc:docMk/>
-            <pc:sldMk cId="676228117" sldId="496"/>
-            <ac:picMk id="5" creationId="{1937D1C7-0AD5-E48F-FCEF-073A31A9F018}"/>
-          </ac:picMkLst>
-        </pc:picChg>
-      </pc:sldChg>
-      <pc:sldChg chg="modSp add mod">
-        <pc:chgData name="Matthieu De Mari" userId="dfb708c9-d8dc-439f-9a3b-c772bf4a311c" providerId="ADAL" clId="{01F119BB-4DC1-4633-817B-0E51DD74E1BF}" dt="2025-02-27T03:51:06.128" v="546" actId="20577"/>
+        <pc:chgData name="Matthieu De Mari" userId="dfb708c9-d8dc-439f-9a3b-c772bf4a311c" providerId="ADAL" clId="{81E9B007-0C2C-493E-9B93-55A62C9C1F12}" dt="2026-02-25T12:11:45.296" v="15"/>
         <pc:sldMkLst>
           <pc:docMk/>
           <pc:sldMk cId="735803367" sldId="497"/>
         </pc:sldMkLst>
         <pc:spChg chg="mod">
-          <ac:chgData name="Matthieu De Mari" userId="dfb708c9-d8dc-439f-9a3b-c772bf4a311c" providerId="ADAL" clId="{01F119BB-4DC1-4633-817B-0E51DD74E1BF}" dt="2025-02-27T03:51:06.128" v="546" actId="20577"/>
+          <ac:chgData name="Matthieu De Mari" userId="dfb708c9-d8dc-439f-9a3b-c772bf4a311c" providerId="ADAL" clId="{81E9B007-0C2C-493E-9B93-55A62C9C1F12}" dt="2026-02-25T12:11:45.296" v="15"/>
           <ac:spMkLst>
             <pc:docMk/>
             <pc:sldMk cId="735803367" sldId="497"/>
             <ac:spMk id="3" creationId="{B69A07B3-A9E8-C946-60F8-7CFFF438192F}"/>
           </ac:spMkLst>
         </pc:spChg>
-      </pc:sldChg>
-    </pc:docChg>
-  </pc:docChgLst>
-  <pc:docChgLst>
-    <pc:chgData name="Matthieu De Mari" userId="dfb708c9-d8dc-439f-9a3b-c772bf4a311c" providerId="ADAL" clId="{2F13BD52-1E98-42DB-B4D3-880CEEA5195B}"/>
-    <pc:docChg chg="undo custSel addSld delSld modSld sldOrd addSection delSection modSection">
-      <pc:chgData name="Matthieu De Mari" userId="dfb708c9-d8dc-439f-9a3b-c772bf4a311c" providerId="ADAL" clId="{2F13BD52-1E98-42DB-B4D3-880CEEA5195B}" dt="2025-02-27T02:04:52.940" v="2199" actId="20577"/>
-      <pc:docMkLst>
-        <pc:docMk/>
-      </pc:docMkLst>
-      <pc:sldChg chg="modSp mod">
-        <pc:chgData name="Matthieu De Mari" userId="dfb708c9-d8dc-439f-9a3b-c772bf4a311c" providerId="ADAL" clId="{2F13BD52-1E98-42DB-B4D3-880CEEA5195B}" dt="2025-02-26T05:49:58.787" v="8" actId="20577"/>
-        <pc:sldMkLst>
-          <pc:docMk/>
-          <pc:sldMk cId="1040156172" sldId="377"/>
-        </pc:sldMkLst>
-        <pc:spChg chg="mod">
-          <ac:chgData name="Matthieu De Mari" userId="dfb708c9-d8dc-439f-9a3b-c772bf4a311c" providerId="ADAL" clId="{2F13BD52-1E98-42DB-B4D3-880CEEA5195B}" dt="2025-02-26T05:49:58.787" v="8" actId="20577"/>
-          <ac:spMkLst>
-            <pc:docMk/>
-            <pc:sldMk cId="1040156172" sldId="377"/>
-            <ac:spMk id="2" creationId="{080CEB46-CC16-4D19-8C2C-AEE9471D8168}"/>
-          </ac:spMkLst>
-        </pc:spChg>
-      </pc:sldChg>
-      <pc:sldChg chg="modSp mod">
-        <pc:chgData name="Matthieu De Mari" userId="dfb708c9-d8dc-439f-9a3b-c772bf4a311c" providerId="ADAL" clId="{2F13BD52-1E98-42DB-B4D3-880CEEA5195B}" dt="2025-02-26T06:07:58.051" v="1227" actId="20577"/>
-        <pc:sldMkLst>
-          <pc:docMk/>
-          <pc:sldMk cId="2244529904" sldId="425"/>
-        </pc:sldMkLst>
-        <pc:spChg chg="mod">
-          <ac:chgData name="Matthieu De Mari" userId="dfb708c9-d8dc-439f-9a3b-c772bf4a311c" providerId="ADAL" clId="{2F13BD52-1E98-42DB-B4D3-880CEEA5195B}" dt="2025-02-26T06:07:58.051" v="1227" actId="20577"/>
-          <ac:spMkLst>
-            <pc:docMk/>
-            <pc:sldMk cId="2244529904" sldId="425"/>
-            <ac:spMk id="2" creationId="{172D8A17-E60D-362A-62E7-52411B12BA29}"/>
-          </ac:spMkLst>
-        </pc:spChg>
-      </pc:sldChg>
-      <pc:sldChg chg="modSp mod">
-        <pc:chgData name="Matthieu De Mari" userId="dfb708c9-d8dc-439f-9a3b-c772bf4a311c" providerId="ADAL" clId="{2F13BD52-1E98-42DB-B4D3-880CEEA5195B}" dt="2025-02-27T01:43:13.553" v="2160"/>
-        <pc:sldMkLst>
-          <pc:docMk/>
-          <pc:sldMk cId="1586635455" sldId="427"/>
-        </pc:sldMkLst>
-        <pc:spChg chg="mod">
-          <ac:chgData name="Matthieu De Mari" userId="dfb708c9-d8dc-439f-9a3b-c772bf4a311c" providerId="ADAL" clId="{2F13BD52-1E98-42DB-B4D3-880CEEA5195B}" dt="2025-02-27T01:43:13.553" v="2160"/>
-          <ac:spMkLst>
-            <pc:docMk/>
-            <pc:sldMk cId="1586635455" sldId="427"/>
-            <ac:spMk id="2" creationId="{45CA648A-AE56-92BD-5D3B-752FC65D5D3A}"/>
-          </ac:spMkLst>
-        </pc:spChg>
-        <pc:spChg chg="mod">
-          <ac:chgData name="Matthieu De Mari" userId="dfb708c9-d8dc-439f-9a3b-c772bf4a311c" providerId="ADAL" clId="{2F13BD52-1E98-42DB-B4D3-880CEEA5195B}" dt="2025-02-26T05:58:20.290" v="523" actId="20577"/>
-          <ac:spMkLst>
-            <pc:docMk/>
-            <pc:sldMk cId="1586635455" sldId="427"/>
-            <ac:spMk id="3" creationId="{ACD1531A-DF2E-8A8B-EC2F-9959422B11B6}"/>
-          </ac:spMkLst>
-        </pc:spChg>
-        <pc:spChg chg="mod">
-          <ac:chgData name="Matthieu De Mari" userId="dfb708c9-d8dc-439f-9a3b-c772bf4a311c" providerId="ADAL" clId="{2F13BD52-1E98-42DB-B4D3-880CEEA5195B}" dt="2025-02-26T05:57:51.894" v="485" actId="113"/>
-          <ac:spMkLst>
-            <pc:docMk/>
-            <pc:sldMk cId="1586635455" sldId="427"/>
-            <ac:spMk id="4" creationId="{7ECEB8E3-EE89-9C30-2760-98585B94777D}"/>
-          </ac:spMkLst>
-        </pc:spChg>
-      </pc:sldChg>
-      <pc:sldChg chg="del">
-        <pc:chgData name="Matthieu De Mari" userId="dfb708c9-d8dc-439f-9a3b-c772bf4a311c" providerId="ADAL" clId="{2F13BD52-1E98-42DB-B4D3-880CEEA5195B}" dt="2025-02-26T06:02:00.569" v="676" actId="47"/>
-        <pc:sldMkLst>
-          <pc:docMk/>
-          <pc:sldMk cId="1474802136" sldId="456"/>
-        </pc:sldMkLst>
-      </pc:sldChg>
-      <pc:sldChg chg="modSp mod ord">
-        <pc:chgData name="Matthieu De Mari" userId="dfb708c9-d8dc-439f-9a3b-c772bf4a311c" providerId="ADAL" clId="{2F13BD52-1E98-42DB-B4D3-880CEEA5195B}" dt="2025-02-27T02:04:52.940" v="2199" actId="20577"/>
-        <pc:sldMkLst>
-          <pc:docMk/>
-          <pc:sldMk cId="813445278" sldId="461"/>
-        </pc:sldMkLst>
-        <pc:spChg chg="mod">
-          <ac:chgData name="Matthieu De Mari" userId="dfb708c9-d8dc-439f-9a3b-c772bf4a311c" providerId="ADAL" clId="{2F13BD52-1E98-42DB-B4D3-880CEEA5195B}" dt="2025-02-27T01:43:07.879" v="2158" actId="20577"/>
-          <ac:spMkLst>
-            <pc:docMk/>
-            <pc:sldMk cId="813445278" sldId="461"/>
-            <ac:spMk id="2" creationId="{3E62BBD4-DD1B-5251-E3E3-787BE668D63E}"/>
-          </ac:spMkLst>
-        </pc:spChg>
-        <pc:spChg chg="mod">
-          <ac:chgData name="Matthieu De Mari" userId="dfb708c9-d8dc-439f-9a3b-c772bf4a311c" providerId="ADAL" clId="{2F13BD52-1E98-42DB-B4D3-880CEEA5195B}" dt="2025-02-27T02:04:52.940" v="2199" actId="20577"/>
-          <ac:spMkLst>
-            <pc:docMk/>
-            <pc:sldMk cId="813445278" sldId="461"/>
-            <ac:spMk id="4" creationId="{B7EA05B0-4FFE-B6B2-11E3-F6DFC537CAF2}"/>
-          </ac:spMkLst>
-        </pc:spChg>
-      </pc:sldChg>
-      <pc:sldChg chg="addSp delSp modSp mod">
-        <pc:chgData name="Matthieu De Mari" userId="dfb708c9-d8dc-439f-9a3b-c772bf4a311c" providerId="ADAL" clId="{2F13BD52-1E98-42DB-B4D3-880CEEA5195B}" dt="2025-02-27T01:43:15.924" v="2162"/>
-        <pc:sldMkLst>
-          <pc:docMk/>
-          <pc:sldMk cId="3221576718" sldId="471"/>
-        </pc:sldMkLst>
-        <pc:spChg chg="mod">
-          <ac:chgData name="Matthieu De Mari" userId="dfb708c9-d8dc-439f-9a3b-c772bf4a311c" providerId="ADAL" clId="{2F13BD52-1E98-42DB-B4D3-880CEEA5195B}" dt="2025-02-27T01:43:15.924" v="2162"/>
-          <ac:spMkLst>
-            <pc:docMk/>
-            <pc:sldMk cId="3221576718" sldId="471"/>
-            <ac:spMk id="2" creationId="{45CA648A-AE56-92BD-5D3B-752FC65D5D3A}"/>
-          </ac:spMkLst>
-        </pc:spChg>
-        <pc:spChg chg="mod">
-          <ac:chgData name="Matthieu De Mari" userId="dfb708c9-d8dc-439f-9a3b-c772bf4a311c" providerId="ADAL" clId="{2F13BD52-1E98-42DB-B4D3-880CEEA5195B}" dt="2025-02-26T05:59:15.108" v="567" actId="20577"/>
-          <ac:spMkLst>
-            <pc:docMk/>
-            <pc:sldMk cId="3221576718" sldId="471"/>
-            <ac:spMk id="3" creationId="{ACD1531A-DF2E-8A8B-EC2F-9959422B11B6}"/>
-          </ac:spMkLst>
-        </pc:spChg>
-        <pc:spChg chg="add del">
-          <ac:chgData name="Matthieu De Mari" userId="dfb708c9-d8dc-439f-9a3b-c772bf4a311c" providerId="ADAL" clId="{2F13BD52-1E98-42DB-B4D3-880CEEA5195B}" dt="2025-02-26T05:51:40.910" v="197" actId="22"/>
-          <ac:spMkLst>
-            <pc:docMk/>
-            <pc:sldMk cId="3221576718" sldId="471"/>
-            <ac:spMk id="5" creationId="{B23333AF-BC39-7F65-E0CB-645DF8B178F3}"/>
-          </ac:spMkLst>
-        </pc:spChg>
-      </pc:sldChg>
-      <pc:sldChg chg="modSp mod">
-        <pc:chgData name="Matthieu De Mari" userId="dfb708c9-d8dc-439f-9a3b-c772bf4a311c" providerId="ADAL" clId="{2F13BD52-1E98-42DB-B4D3-880CEEA5195B}" dt="2025-02-26T06:16:26.739" v="1977" actId="20577"/>
-        <pc:sldMkLst>
-          <pc:docMk/>
-          <pc:sldMk cId="2469439250" sldId="472"/>
-        </pc:sldMkLst>
-        <pc:spChg chg="mod">
-          <ac:chgData name="Matthieu De Mari" userId="dfb708c9-d8dc-439f-9a3b-c772bf4a311c" providerId="ADAL" clId="{2F13BD52-1E98-42DB-B4D3-880CEEA5195B}" dt="2025-02-26T06:09:49.966" v="1335" actId="20577"/>
-          <ac:spMkLst>
-            <pc:docMk/>
-            <pc:sldMk cId="2469439250" sldId="472"/>
-            <ac:spMk id="2" creationId="{45CA648A-AE56-92BD-5D3B-752FC65D5D3A}"/>
-          </ac:spMkLst>
-        </pc:spChg>
-        <pc:spChg chg="mod">
-          <ac:chgData name="Matthieu De Mari" userId="dfb708c9-d8dc-439f-9a3b-c772bf4a311c" providerId="ADAL" clId="{2F13BD52-1E98-42DB-B4D3-880CEEA5195B}" dt="2025-02-26T06:16:26.739" v="1977" actId="20577"/>
-          <ac:spMkLst>
-            <pc:docMk/>
-            <pc:sldMk cId="2469439250" sldId="472"/>
-            <ac:spMk id="3" creationId="{ACD1531A-DF2E-8A8B-EC2F-9959422B11B6}"/>
-          </ac:spMkLst>
-        </pc:spChg>
-      </pc:sldChg>
-      <pc:sldChg chg="addSp delSp modSp mod">
-        <pc:chgData name="Matthieu De Mari" userId="dfb708c9-d8dc-439f-9a3b-c772bf4a311c" providerId="ADAL" clId="{2F13BD52-1E98-42DB-B4D3-880CEEA5195B}" dt="2025-02-26T06:15:01.971" v="1883" actId="20577"/>
-        <pc:sldMkLst>
-          <pc:docMk/>
-          <pc:sldMk cId="453310084" sldId="475"/>
-        </pc:sldMkLst>
-        <pc:spChg chg="mod">
-          <ac:chgData name="Matthieu De Mari" userId="dfb708c9-d8dc-439f-9a3b-c772bf4a311c" providerId="ADAL" clId="{2F13BD52-1E98-42DB-B4D3-880CEEA5195B}" dt="2025-02-26T06:09:32.323" v="1327" actId="20577"/>
-          <ac:spMkLst>
-            <pc:docMk/>
-            <pc:sldMk cId="453310084" sldId="475"/>
-            <ac:spMk id="2" creationId="{7FE5EEB4-0350-8BF6-2588-5A070D893179}"/>
-          </ac:spMkLst>
-        </pc:spChg>
-        <pc:spChg chg="mod">
-          <ac:chgData name="Matthieu De Mari" userId="dfb708c9-d8dc-439f-9a3b-c772bf4a311c" providerId="ADAL" clId="{2F13BD52-1E98-42DB-B4D3-880CEEA5195B}" dt="2025-02-26T06:15:01.971" v="1883" actId="20577"/>
-          <ac:spMkLst>
-            <pc:docMk/>
-            <pc:sldMk cId="453310084" sldId="475"/>
-            <ac:spMk id="3" creationId="{C2D30554-1CE4-F556-52DE-9DD7CF541817}"/>
-          </ac:spMkLst>
-        </pc:spChg>
-        <pc:spChg chg="add del">
-          <ac:chgData name="Matthieu De Mari" userId="dfb708c9-d8dc-439f-9a3b-c772bf4a311c" providerId="ADAL" clId="{2F13BD52-1E98-42DB-B4D3-880CEEA5195B}" dt="2025-02-26T05:52:25.260" v="215" actId="22"/>
-          <ac:spMkLst>
-            <pc:docMk/>
-            <pc:sldMk cId="453310084" sldId="475"/>
-            <ac:spMk id="5" creationId="{7B5263A0-DC4C-CCD8-2838-6748AFA37BFD}"/>
-          </ac:spMkLst>
-        </pc:spChg>
-      </pc:sldChg>
-      <pc:sldChg chg="modSp del mod">
-        <pc:chgData name="Matthieu De Mari" userId="dfb708c9-d8dc-439f-9a3b-c772bf4a311c" providerId="ADAL" clId="{2F13BD52-1E98-42DB-B4D3-880CEEA5195B}" dt="2025-02-26T06:08:23.623" v="1234" actId="47"/>
-        <pc:sldMkLst>
-          <pc:docMk/>
-          <pc:sldMk cId="4165722588" sldId="476"/>
-        </pc:sldMkLst>
-        <pc:spChg chg="mod">
-          <ac:chgData name="Matthieu De Mari" userId="dfb708c9-d8dc-439f-9a3b-c772bf4a311c" providerId="ADAL" clId="{2F13BD52-1E98-42DB-B4D3-880CEEA5195B}" dt="2025-02-26T05:55:30.460" v="353" actId="20577"/>
-          <ac:spMkLst>
-            <pc:docMk/>
-            <pc:sldMk cId="4165722588" sldId="476"/>
-            <ac:spMk id="3" creationId="{BC04F5BD-E60C-C34E-E6DB-FED2D849BCC1}"/>
-          </ac:spMkLst>
-        </pc:spChg>
-      </pc:sldChg>
-      <pc:sldChg chg="modSp mod">
-        <pc:chgData name="Matthieu De Mari" userId="dfb708c9-d8dc-439f-9a3b-c772bf4a311c" providerId="ADAL" clId="{2F13BD52-1E98-42DB-B4D3-880CEEA5195B}" dt="2025-02-26T06:18:27.741" v="2124" actId="207"/>
-        <pc:sldMkLst>
-          <pc:docMk/>
-          <pc:sldMk cId="4291604125" sldId="478"/>
-        </pc:sldMkLst>
-        <pc:spChg chg="mod">
-          <ac:chgData name="Matthieu De Mari" userId="dfb708c9-d8dc-439f-9a3b-c772bf4a311c" providerId="ADAL" clId="{2F13BD52-1E98-42DB-B4D3-880CEEA5195B}" dt="2025-02-26T06:18:27.741" v="2124" actId="207"/>
-          <ac:spMkLst>
-            <pc:docMk/>
-            <pc:sldMk cId="4291604125" sldId="478"/>
-            <ac:spMk id="3" creationId="{78A40D30-5DA4-2380-8026-32BB9AF1E449}"/>
-          </ac:spMkLst>
-        </pc:spChg>
-      </pc:sldChg>
-      <pc:sldChg chg="modSp mod ord">
-        <pc:chgData name="Matthieu De Mari" userId="dfb708c9-d8dc-439f-9a3b-c772bf4a311c" providerId="ADAL" clId="{2F13BD52-1E98-42DB-B4D3-880CEEA5195B}" dt="2025-02-27T01:43:20.894" v="2166"/>
-        <pc:sldMkLst>
-          <pc:docMk/>
-          <pc:sldMk cId="4293451329" sldId="479"/>
-        </pc:sldMkLst>
-        <pc:spChg chg="mod">
-          <ac:chgData name="Matthieu De Mari" userId="dfb708c9-d8dc-439f-9a3b-c772bf4a311c" providerId="ADAL" clId="{2F13BD52-1E98-42DB-B4D3-880CEEA5195B}" dt="2025-02-27T01:43:20.894" v="2166"/>
-          <ac:spMkLst>
-            <pc:docMk/>
-            <pc:sldMk cId="4293451329" sldId="479"/>
-            <ac:spMk id="2" creationId="{21E30FDD-41EF-72FB-7D17-9CF281904A7A}"/>
-          </ac:spMkLst>
-        </pc:spChg>
-        <pc:spChg chg="mod">
-          <ac:chgData name="Matthieu De Mari" userId="dfb708c9-d8dc-439f-9a3b-c772bf4a311c" providerId="ADAL" clId="{2F13BD52-1E98-42DB-B4D3-880CEEA5195B}" dt="2025-02-26T06:13:25.372" v="1822" actId="313"/>
-          <ac:spMkLst>
-            <pc:docMk/>
-            <pc:sldMk cId="4293451329" sldId="479"/>
-            <ac:spMk id="3" creationId="{2FFA8A1F-C034-8100-4C77-99713E725DBA}"/>
-          </ac:spMkLst>
-        </pc:spChg>
-      </pc:sldChg>
-      <pc:sldChg chg="addSp delSp modSp mod ord">
-        <pc:chgData name="Matthieu De Mari" userId="dfb708c9-d8dc-439f-9a3b-c772bf4a311c" providerId="ADAL" clId="{2F13BD52-1E98-42DB-B4D3-880CEEA5195B}" dt="2025-02-26T06:17:45.321" v="2029" actId="20577"/>
-        <pc:sldMkLst>
-          <pc:docMk/>
-          <pc:sldMk cId="1299130042" sldId="480"/>
-        </pc:sldMkLst>
-        <pc:spChg chg="mod">
-          <ac:chgData name="Matthieu De Mari" userId="dfb708c9-d8dc-439f-9a3b-c772bf4a311c" providerId="ADAL" clId="{2F13BD52-1E98-42DB-B4D3-880CEEA5195B}" dt="2025-02-26T06:17:45.321" v="2029" actId="20577"/>
-          <ac:spMkLst>
-            <pc:docMk/>
-            <pc:sldMk cId="1299130042" sldId="480"/>
-            <ac:spMk id="3" creationId="{82876C5B-EC9B-9707-2E3C-496D72ABC73E}"/>
-          </ac:spMkLst>
-        </pc:spChg>
-        <pc:spChg chg="add del">
-          <ac:chgData name="Matthieu De Mari" userId="dfb708c9-d8dc-439f-9a3b-c772bf4a311c" providerId="ADAL" clId="{2F13BD52-1E98-42DB-B4D3-880CEEA5195B}" dt="2025-02-26T05:52:37.123" v="219" actId="22"/>
-          <ac:spMkLst>
-            <pc:docMk/>
-            <pc:sldMk cId="1299130042" sldId="480"/>
-            <ac:spMk id="5" creationId="{2A455EFB-C8C1-3BE2-4D0F-B342A79D386F}"/>
-          </ac:spMkLst>
-        </pc:spChg>
-      </pc:sldChg>
-      <pc:sldChg chg="del">
-        <pc:chgData name="Matthieu De Mari" userId="dfb708c9-d8dc-439f-9a3b-c772bf4a311c" providerId="ADAL" clId="{2F13BD52-1E98-42DB-B4D3-880CEEA5195B}" dt="2025-02-26T06:05:31.154" v="967" actId="47"/>
-        <pc:sldMkLst>
-          <pc:docMk/>
-          <pc:sldMk cId="2420944380" sldId="481"/>
-        </pc:sldMkLst>
-      </pc:sldChg>
-      <pc:sldChg chg="modSp mod">
-        <pc:chgData name="Matthieu De Mari" userId="dfb708c9-d8dc-439f-9a3b-c772bf4a311c" providerId="ADAL" clId="{2F13BD52-1E98-42DB-B4D3-880CEEA5195B}" dt="2025-02-26T06:17:57.002" v="2042" actId="113"/>
-        <pc:sldMkLst>
-          <pc:docMk/>
-          <pc:sldMk cId="3878320393" sldId="482"/>
-        </pc:sldMkLst>
-        <pc:spChg chg="mod">
-          <ac:chgData name="Matthieu De Mari" userId="dfb708c9-d8dc-439f-9a3b-c772bf4a311c" providerId="ADAL" clId="{2F13BD52-1E98-42DB-B4D3-880CEEA5195B}" dt="2025-02-26T06:17:57.002" v="2042" actId="113"/>
-          <ac:spMkLst>
-            <pc:docMk/>
-            <pc:sldMk cId="3878320393" sldId="482"/>
-            <ac:spMk id="3" creationId="{220F8BCD-1F74-0CCD-9D50-EB70D633319C}"/>
-          </ac:spMkLst>
-        </pc:spChg>
-      </pc:sldChg>
-      <pc:sldChg chg="ord">
-        <pc:chgData name="Matthieu De Mari" userId="dfb708c9-d8dc-439f-9a3b-c772bf4a311c" providerId="ADAL" clId="{2F13BD52-1E98-42DB-B4D3-880CEEA5195B}" dt="2025-02-26T05:52:48.443" v="223" actId="20578"/>
-        <pc:sldMkLst>
-          <pc:docMk/>
-          <pc:sldMk cId="1200781502" sldId="483"/>
-        </pc:sldMkLst>
-      </pc:sldChg>
-      <pc:sldChg chg="modSp mod">
-        <pc:chgData name="Matthieu De Mari" userId="dfb708c9-d8dc-439f-9a3b-c772bf4a311c" providerId="ADAL" clId="{2F13BD52-1E98-42DB-B4D3-880CEEA5195B}" dt="2025-02-26T06:08:00.626" v="1229" actId="20577"/>
-        <pc:sldMkLst>
-          <pc:docMk/>
-          <pc:sldMk cId="4147471152" sldId="484"/>
-        </pc:sldMkLst>
-        <pc:spChg chg="mod">
-          <ac:chgData name="Matthieu De Mari" userId="dfb708c9-d8dc-439f-9a3b-c772bf4a311c" providerId="ADAL" clId="{2F13BD52-1E98-42DB-B4D3-880CEEA5195B}" dt="2025-02-26T06:08:00.626" v="1229" actId="20577"/>
-          <ac:spMkLst>
-            <pc:docMk/>
-            <pc:sldMk cId="4147471152" sldId="484"/>
-            <ac:spMk id="2" creationId="{9182E136-FA8A-5292-BF4F-E8E407896CF5}"/>
-          </ac:spMkLst>
-        </pc:spChg>
-        <pc:spChg chg="mod">
-          <ac:chgData name="Matthieu De Mari" userId="dfb708c9-d8dc-439f-9a3b-c772bf4a311c" providerId="ADAL" clId="{2F13BD52-1E98-42DB-B4D3-880CEEA5195B}" dt="2025-02-26T06:01:12.439" v="671" actId="20577"/>
-          <ac:spMkLst>
-            <pc:docMk/>
-            <pc:sldMk cId="4147471152" sldId="484"/>
-            <ac:spMk id="3" creationId="{5FCE61D7-6FC0-FC0A-CD4E-0A8E9DD3D7E7}"/>
-          </ac:spMkLst>
-        </pc:spChg>
-      </pc:sldChg>
-      <pc:sldChg chg="modSp mod">
-        <pc:chgData name="Matthieu De Mari" userId="dfb708c9-d8dc-439f-9a3b-c772bf4a311c" providerId="ADAL" clId="{2F13BD52-1E98-42DB-B4D3-880CEEA5195B}" dt="2025-02-26T06:08:03.974" v="1231" actId="20577"/>
-        <pc:sldMkLst>
-          <pc:docMk/>
-          <pc:sldMk cId="4073739501" sldId="485"/>
-        </pc:sldMkLst>
-        <pc:spChg chg="mod">
-          <ac:chgData name="Matthieu De Mari" userId="dfb708c9-d8dc-439f-9a3b-c772bf4a311c" providerId="ADAL" clId="{2F13BD52-1E98-42DB-B4D3-880CEEA5195B}" dt="2025-02-26T06:08:03.974" v="1231" actId="20577"/>
-          <ac:spMkLst>
-            <pc:docMk/>
-            <pc:sldMk cId="4073739501" sldId="485"/>
-            <ac:spMk id="2" creationId="{F5863C5D-7160-E63A-91A1-C51F7BE6E23A}"/>
-          </ac:spMkLst>
-        </pc:spChg>
-      </pc:sldChg>
-      <pc:sldChg chg="addSp delSp modSp mod">
-        <pc:chgData name="Matthieu De Mari" userId="dfb708c9-d8dc-439f-9a3b-c772bf4a311c" providerId="ADAL" clId="{2F13BD52-1E98-42DB-B4D3-880CEEA5195B}" dt="2025-02-26T06:14:21.329" v="1854" actId="20577"/>
-        <pc:sldMkLst>
-          <pc:docMk/>
-          <pc:sldMk cId="1154408730" sldId="486"/>
-        </pc:sldMkLst>
-        <pc:spChg chg="mod">
-          <ac:chgData name="Matthieu De Mari" userId="dfb708c9-d8dc-439f-9a3b-c772bf4a311c" providerId="ADAL" clId="{2F13BD52-1E98-42DB-B4D3-880CEEA5195B}" dt="2025-02-26T06:08:06.881" v="1233" actId="20577"/>
-          <ac:spMkLst>
-            <pc:docMk/>
-            <pc:sldMk cId="1154408730" sldId="486"/>
-            <ac:spMk id="2" creationId="{6A0B713C-9E0E-2CC8-4B9D-357A7B664BCA}"/>
-          </ac:spMkLst>
-        </pc:spChg>
-        <pc:spChg chg="mod">
-          <ac:chgData name="Matthieu De Mari" userId="dfb708c9-d8dc-439f-9a3b-c772bf4a311c" providerId="ADAL" clId="{2F13BD52-1E98-42DB-B4D3-880CEEA5195B}" dt="2025-02-26T06:14:21.329" v="1854" actId="20577"/>
-          <ac:spMkLst>
-            <pc:docMk/>
-            <pc:sldMk cId="1154408730" sldId="486"/>
-            <ac:spMk id="3" creationId="{DB472E66-0DA2-4A70-BE8D-790977876E78}"/>
-          </ac:spMkLst>
-        </pc:spChg>
-        <pc:spChg chg="add del">
-          <ac:chgData name="Matthieu De Mari" userId="dfb708c9-d8dc-439f-9a3b-c772bf4a311c" providerId="ADAL" clId="{2F13BD52-1E98-42DB-B4D3-880CEEA5195B}" dt="2025-02-26T05:51:51.177" v="201" actId="22"/>
-          <ac:spMkLst>
-            <pc:docMk/>
-            <pc:sldMk cId="1154408730" sldId="486"/>
-            <ac:spMk id="6" creationId="{CD211755-A41B-9104-5FB9-6B83D3F8392F}"/>
-          </ac:spMkLst>
-        </pc:spChg>
-      </pc:sldChg>
-      <pc:sldChg chg="modSp mod">
-        <pc:chgData name="Matthieu De Mari" userId="dfb708c9-d8dc-439f-9a3b-c772bf4a311c" providerId="ADAL" clId="{2F13BD52-1E98-42DB-B4D3-880CEEA5195B}" dt="2025-02-26T06:08:54.339" v="1303" actId="20577"/>
-        <pc:sldMkLst>
-          <pc:docMk/>
-          <pc:sldMk cId="3733989984" sldId="490"/>
-        </pc:sldMkLst>
-        <pc:spChg chg="mod">
-          <ac:chgData name="Matthieu De Mari" userId="dfb708c9-d8dc-439f-9a3b-c772bf4a311c" providerId="ADAL" clId="{2F13BD52-1E98-42DB-B4D3-880CEEA5195B}" dt="2025-02-26T06:08:54.339" v="1303" actId="20577"/>
-          <ac:spMkLst>
-            <pc:docMk/>
-            <pc:sldMk cId="3733989984" sldId="490"/>
-            <ac:spMk id="2" creationId="{CD2B5CF4-0CAB-D495-9135-1E2FDB32D032}"/>
-          </ac:spMkLst>
-        </pc:spChg>
-        <pc:spChg chg="mod">
-          <ac:chgData name="Matthieu De Mari" userId="dfb708c9-d8dc-439f-9a3b-c772bf4a311c" providerId="ADAL" clId="{2F13BD52-1E98-42DB-B4D3-880CEEA5195B}" dt="2025-02-26T06:08:50.671" v="1301" actId="20577"/>
-          <ac:spMkLst>
-            <pc:docMk/>
-            <pc:sldMk cId="3733989984" sldId="490"/>
-            <ac:spMk id="4" creationId="{8EDBFC2F-EAEA-C7A2-C1BD-F564C9ACE713}"/>
-          </ac:spMkLst>
-        </pc:spChg>
-      </pc:sldChg>
-      <pc:sldChg chg="modSp add mod">
-        <pc:chgData name="Matthieu De Mari" userId="dfb708c9-d8dc-439f-9a3b-c772bf4a311c" providerId="ADAL" clId="{2F13BD52-1E98-42DB-B4D3-880CEEA5195B}" dt="2025-02-27T01:43:18.335" v="2164"/>
-        <pc:sldMkLst>
-          <pc:docMk/>
-          <pc:sldMk cId="2375976011" sldId="491"/>
-        </pc:sldMkLst>
-        <pc:spChg chg="mod">
-          <ac:chgData name="Matthieu De Mari" userId="dfb708c9-d8dc-439f-9a3b-c772bf4a311c" providerId="ADAL" clId="{2F13BD52-1E98-42DB-B4D3-880CEEA5195B}" dt="2025-02-27T01:43:18.335" v="2164"/>
-          <ac:spMkLst>
-            <pc:docMk/>
-            <pc:sldMk cId="2375976011" sldId="491"/>
-            <ac:spMk id="2" creationId="{8F3D8235-7CDE-0D0F-486A-DD55CD63D767}"/>
-          </ac:spMkLst>
-        </pc:spChg>
-        <pc:spChg chg="mod">
-          <ac:chgData name="Matthieu De Mari" userId="dfb708c9-d8dc-439f-9a3b-c772bf4a311c" providerId="ADAL" clId="{2F13BD52-1E98-42DB-B4D3-880CEEA5195B}" dt="2025-02-26T06:00:16.767" v="639" actId="20577"/>
-          <ac:spMkLst>
-            <pc:docMk/>
-            <pc:sldMk cId="2375976011" sldId="491"/>
-            <ac:spMk id="3" creationId="{6A79C618-ACBF-3E67-9273-E97C3B59427B}"/>
-          </ac:spMkLst>
-        </pc:spChg>
-      </pc:sldChg>
-      <pc:sldChg chg="addSp delSp modSp new mod modClrScheme chgLayout">
-        <pc:chgData name="Matthieu De Mari" userId="dfb708c9-d8dc-439f-9a3b-c772bf4a311c" providerId="ADAL" clId="{2F13BD52-1E98-42DB-B4D3-880CEEA5195B}" dt="2025-02-26T06:07:43.430" v="1224" actId="20577"/>
-        <pc:sldMkLst>
-          <pc:docMk/>
-          <pc:sldMk cId="2371486849" sldId="492"/>
-        </pc:sldMkLst>
-        <pc:spChg chg="del mod ord">
-          <ac:chgData name="Matthieu De Mari" userId="dfb708c9-d8dc-439f-9a3b-c772bf4a311c" providerId="ADAL" clId="{2F13BD52-1E98-42DB-B4D3-880CEEA5195B}" dt="2025-02-26T06:07:17.170" v="1096" actId="700"/>
-          <ac:spMkLst>
-            <pc:docMk/>
-            <pc:sldMk cId="2371486849" sldId="492"/>
-            <ac:spMk id="2" creationId="{1A381718-5FB3-0449-4C4E-7985760A009B}"/>
-          </ac:spMkLst>
-        </pc:spChg>
-        <pc:spChg chg="del mod ord">
-          <ac:chgData name="Matthieu De Mari" userId="dfb708c9-d8dc-439f-9a3b-c772bf4a311c" providerId="ADAL" clId="{2F13BD52-1E98-42DB-B4D3-880CEEA5195B}" dt="2025-02-26T06:07:17.170" v="1096" actId="700"/>
-          <ac:spMkLst>
-            <pc:docMk/>
-            <pc:sldMk cId="2371486849" sldId="492"/>
-            <ac:spMk id="3" creationId="{60BC1BA2-D269-6AD3-1F05-AE612190B18C}"/>
-          </ac:spMkLst>
-        </pc:spChg>
-        <pc:spChg chg="add mod ord">
-          <ac:chgData name="Matthieu De Mari" userId="dfb708c9-d8dc-439f-9a3b-c772bf4a311c" providerId="ADAL" clId="{2F13BD52-1E98-42DB-B4D3-880CEEA5195B}" dt="2025-02-26T06:07:27.161" v="1152" actId="20577"/>
-          <ac:spMkLst>
-            <pc:docMk/>
-            <pc:sldMk cId="2371486849" sldId="492"/>
-            <ac:spMk id="4" creationId="{08925B64-A0B0-E757-2BFD-15DAAF967AB6}"/>
-          </ac:spMkLst>
-        </pc:spChg>
-        <pc:spChg chg="add mod ord">
-          <ac:chgData name="Matthieu De Mari" userId="dfb708c9-d8dc-439f-9a3b-c772bf4a311c" providerId="ADAL" clId="{2F13BD52-1E98-42DB-B4D3-880CEEA5195B}" dt="2025-02-26T06:07:43.430" v="1224" actId="20577"/>
-          <ac:spMkLst>
-            <pc:docMk/>
-            <pc:sldMk cId="2371486849" sldId="492"/>
-            <ac:spMk id="5" creationId="{815996DF-1B4D-A28C-088A-848D3A88140B}"/>
-          </ac:spMkLst>
-        </pc:spChg>
-      </pc:sldChg>
-      <pc:sldChg chg="modSp new mod">
-        <pc:chgData name="Matthieu De Mari" userId="dfb708c9-d8dc-439f-9a3b-c772bf4a311c" providerId="ADAL" clId="{2F13BD52-1E98-42DB-B4D3-880CEEA5195B}" dt="2025-02-26T06:16:51.491" v="1983" actId="115"/>
-        <pc:sldMkLst>
-          <pc:docMk/>
-          <pc:sldMk cId="3009801703" sldId="493"/>
-        </pc:sldMkLst>
-        <pc:spChg chg="mod">
-          <ac:chgData name="Matthieu De Mari" userId="dfb708c9-d8dc-439f-9a3b-c772bf4a311c" providerId="ADAL" clId="{2F13BD52-1E98-42DB-B4D3-880CEEA5195B}" dt="2025-02-26T06:10:00.969" v="1348" actId="20577"/>
-          <ac:spMkLst>
-            <pc:docMk/>
-            <pc:sldMk cId="3009801703" sldId="493"/>
-            <ac:spMk id="2" creationId="{1FC8C2DD-15F8-3FC2-A335-7C317CF4212B}"/>
-          </ac:spMkLst>
-        </pc:spChg>
-        <pc:spChg chg="mod">
-          <ac:chgData name="Matthieu De Mari" userId="dfb708c9-d8dc-439f-9a3b-c772bf4a311c" providerId="ADAL" clId="{2F13BD52-1E98-42DB-B4D3-880CEEA5195B}" dt="2025-02-26T06:16:51.491" v="1983" actId="115"/>
-          <ac:spMkLst>
-            <pc:docMk/>
-            <pc:sldMk cId="3009801703" sldId="493"/>
-            <ac:spMk id="3" creationId="{74DA8B18-27A6-89B4-E1DE-98CEFD98726D}"/>
-          </ac:spMkLst>
-        </pc:spChg>
-      </pc:sldChg>
-    </pc:docChg>
-  </pc:docChgLst>
-  <pc:docChgLst>
-    <pc:chgData name="Matthieu De Mari" userId="dfb708c9-d8dc-439f-9a3b-c772bf4a311c" providerId="ADAL" clId="{CF6A5140-9227-409F-9187-B98CCD837415}"/>
-    <pc:docChg chg="undo redo custSel addSld delSld modSld sldOrd addSection delSection modSection">
-      <pc:chgData name="Matthieu De Mari" userId="dfb708c9-d8dc-439f-9a3b-c772bf4a311c" providerId="ADAL" clId="{CF6A5140-9227-409F-9187-B98CCD837415}" dt="2023-03-15T07:15:42.443" v="11209" actId="20577"/>
-      <pc:docMkLst>
-        <pc:docMk/>
-      </pc:docMkLst>
-      <pc:sldChg chg="add">
-        <pc:chgData name="Matthieu De Mari" userId="dfb708c9-d8dc-439f-9a3b-c772bf4a311c" providerId="ADAL" clId="{CF6A5140-9227-409F-9187-B98CCD837415}" dt="2023-03-08T06:42:49.197" v="464"/>
-        <pc:sldMkLst>
-          <pc:docMk/>
-          <pc:sldMk cId="3739270414" sldId="258"/>
-        </pc:sldMkLst>
-      </pc:sldChg>
-      <pc:sldChg chg="modSp add mod">
-        <pc:chgData name="Matthieu De Mari" userId="dfb708c9-d8dc-439f-9a3b-c772bf4a311c" providerId="ADAL" clId="{CF6A5140-9227-409F-9187-B98CCD837415}" dt="2023-03-08T06:45:03.461" v="613" actId="20577"/>
-        <pc:sldMkLst>
-          <pc:docMk/>
-          <pc:sldMk cId="3115582948" sldId="259"/>
-        </pc:sldMkLst>
-      </pc:sldChg>
-      <pc:sldChg chg="add">
-        <pc:chgData name="Matthieu De Mari" userId="dfb708c9-d8dc-439f-9a3b-c772bf4a311c" providerId="ADAL" clId="{CF6A5140-9227-409F-9187-B98CCD837415}" dt="2023-03-08T06:42:49.197" v="464"/>
-        <pc:sldMkLst>
-          <pc:docMk/>
-          <pc:sldMk cId="2366002138" sldId="265"/>
-        </pc:sldMkLst>
-      </pc:sldChg>
-      <pc:sldChg chg="add">
-        <pc:chgData name="Matthieu De Mari" userId="dfb708c9-d8dc-439f-9a3b-c772bf4a311c" providerId="ADAL" clId="{CF6A5140-9227-409F-9187-B98CCD837415}" dt="2023-03-08T06:42:49.197" v="464"/>
-        <pc:sldMkLst>
-          <pc:docMk/>
-          <pc:sldMk cId="1944673108" sldId="268"/>
-        </pc:sldMkLst>
-      </pc:sldChg>
-      <pc:sldChg chg="modSp add mod">
-        <pc:chgData name="Matthieu De Mari" userId="dfb708c9-d8dc-439f-9a3b-c772bf4a311c" providerId="ADAL" clId="{CF6A5140-9227-409F-9187-B98CCD837415}" dt="2023-03-08T06:45:38.844" v="651" actId="20577"/>
-        <pc:sldMkLst>
-          <pc:docMk/>
-          <pc:sldMk cId="16380507" sldId="270"/>
-        </pc:sldMkLst>
-      </pc:sldChg>
-      <pc:sldChg chg="add">
-        <pc:chgData name="Matthieu De Mari" userId="dfb708c9-d8dc-439f-9a3b-c772bf4a311c" providerId="ADAL" clId="{CF6A5140-9227-409F-9187-B98CCD837415}" dt="2023-03-08T06:42:49.197" v="464"/>
-        <pc:sldMkLst>
-          <pc:docMk/>
-          <pc:sldMk cId="483806848" sldId="271"/>
-        </pc:sldMkLst>
-      </pc:sldChg>
-      <pc:sldChg chg="del">
-        <pc:chgData name="Matthieu De Mari" userId="dfb708c9-d8dc-439f-9a3b-c772bf4a311c" providerId="ADAL" clId="{CF6A5140-9227-409F-9187-B98CCD837415}" dt="2023-03-08T06:05:16.161" v="65" actId="47"/>
-        <pc:sldMkLst>
-          <pc:docMk/>
-          <pc:sldMk cId="1628130454" sldId="272"/>
-        </pc:sldMkLst>
-      </pc:sldChg>
-      <pc:sldChg chg="del">
-        <pc:chgData name="Matthieu De Mari" userId="dfb708c9-d8dc-439f-9a3b-c772bf4a311c" providerId="ADAL" clId="{CF6A5140-9227-409F-9187-B98CCD837415}" dt="2023-03-08T06:05:16.161" v="65" actId="47"/>
-        <pc:sldMkLst>
-          <pc:docMk/>
-          <pc:sldMk cId="3014069118" sldId="273"/>
-        </pc:sldMkLst>
-      </pc:sldChg>
-      <pc:sldChg chg="del">
-        <pc:chgData name="Matthieu De Mari" userId="dfb708c9-d8dc-439f-9a3b-c772bf4a311c" providerId="ADAL" clId="{CF6A5140-9227-409F-9187-B98CCD837415}" dt="2023-03-08T06:05:16.161" v="65" actId="47"/>
-        <pc:sldMkLst>
-          <pc:docMk/>
-          <pc:sldMk cId="1813455260" sldId="274"/>
-        </pc:sldMkLst>
-      </pc:sldChg>
-      <pc:sldChg chg="add del">
-        <pc:chgData name="Matthieu De Mari" userId="dfb708c9-d8dc-439f-9a3b-c772bf4a311c" providerId="ADAL" clId="{CF6A5140-9227-409F-9187-B98CCD837415}" dt="2023-03-09T08:09:47.699" v="10404" actId="47"/>
-        <pc:sldMkLst>
-          <pc:docMk/>
-          <pc:sldMk cId="4232115997" sldId="303"/>
-        </pc:sldMkLst>
-      </pc:sldChg>
-      <pc:sldChg chg="modSp del mod">
-        <pc:chgData name="Matthieu De Mari" userId="dfb708c9-d8dc-439f-9a3b-c772bf4a311c" providerId="ADAL" clId="{CF6A5140-9227-409F-9187-B98CCD837415}" dt="2023-03-09T08:10:07.550" v="10409" actId="47"/>
-        <pc:sldMkLst>
-          <pc:docMk/>
-          <pc:sldMk cId="2858358615" sldId="314"/>
-        </pc:sldMkLst>
-      </pc:sldChg>
-      <pc:sldChg chg="modSp mod">
-        <pc:chgData name="Matthieu De Mari" userId="dfb708c9-d8dc-439f-9a3b-c772bf4a311c" providerId="ADAL" clId="{CF6A5140-9227-409F-9187-B98CCD837415}" dt="2023-03-09T08:31:34.970" v="10417" actId="20577"/>
-        <pc:sldMkLst>
-          <pc:docMk/>
-          <pc:sldMk cId="1040156172" sldId="377"/>
-        </pc:sldMkLst>
-      </pc:sldChg>
-      <pc:sldChg chg="del">
-        <pc:chgData name="Matthieu De Mari" userId="dfb708c9-d8dc-439f-9a3b-c772bf4a311c" providerId="ADAL" clId="{CF6A5140-9227-409F-9187-B98CCD837415}" dt="2023-03-08T06:05:17.999" v="67" actId="47"/>
-        <pc:sldMkLst>
-          <pc:docMk/>
-          <pc:sldMk cId="820057187" sldId="378"/>
-        </pc:sldMkLst>
-      </pc:sldChg>
-      <pc:sldChg chg="del">
-        <pc:chgData name="Matthieu De Mari" userId="dfb708c9-d8dc-439f-9a3b-c772bf4a311c" providerId="ADAL" clId="{CF6A5140-9227-409F-9187-B98CCD837415}" dt="2023-03-08T06:05:24.214" v="74" actId="47"/>
-        <pc:sldMkLst>
-          <pc:docMk/>
-          <pc:sldMk cId="691565538" sldId="379"/>
-        </pc:sldMkLst>
-      </pc:sldChg>
-      <pc:sldChg chg="add">
-        <pc:chgData name="Matthieu De Mari" userId="dfb708c9-d8dc-439f-9a3b-c772bf4a311c" providerId="ADAL" clId="{CF6A5140-9227-409F-9187-B98CCD837415}" dt="2023-03-08T06:42:49.197" v="464"/>
-        <pc:sldMkLst>
-          <pc:docMk/>
-          <pc:sldMk cId="2105998534" sldId="379"/>
-        </pc:sldMkLst>
-      </pc:sldChg>
-      <pc:sldChg chg="del">
-        <pc:chgData name="Matthieu De Mari" userId="dfb708c9-d8dc-439f-9a3b-c772bf4a311c" providerId="ADAL" clId="{CF6A5140-9227-409F-9187-B98CCD837415}" dt="2023-03-08T06:05:17.054" v="66" actId="47"/>
-        <pc:sldMkLst>
-          <pc:docMk/>
-          <pc:sldMk cId="4217274173" sldId="380"/>
-        </pc:sldMkLst>
-      </pc:sldChg>
-      <pc:sldChg chg="del">
-        <pc:chgData name="Matthieu De Mari" userId="dfb708c9-d8dc-439f-9a3b-c772bf4a311c" providerId="ADAL" clId="{CF6A5140-9227-409F-9187-B98CCD837415}" dt="2023-03-08T06:05:21.493" v="71" actId="47"/>
-        <pc:sldMkLst>
-          <pc:docMk/>
-          <pc:sldMk cId="1253114987" sldId="381"/>
-        </pc:sldMkLst>
-      </pc:sldChg>
-      <pc:sldChg chg="del">
-        <pc:chgData name="Matthieu De Mari" userId="dfb708c9-d8dc-439f-9a3b-c772bf4a311c" providerId="ADAL" clId="{CF6A5140-9227-409F-9187-B98CCD837415}" dt="2023-03-08T06:05:18.882" v="68" actId="47"/>
-        <pc:sldMkLst>
-          <pc:docMk/>
-          <pc:sldMk cId="336152115" sldId="382"/>
-        </pc:sldMkLst>
-      </pc:sldChg>
-      <pc:sldChg chg="modSp add mod">
-        <pc:chgData name="Matthieu De Mari" userId="dfb708c9-d8dc-439f-9a3b-c772bf4a311c" providerId="ADAL" clId="{CF6A5140-9227-409F-9187-B98CCD837415}" dt="2023-03-08T06:44:39.947" v="606" actId="20577"/>
-        <pc:sldMkLst>
-          <pc:docMk/>
-          <pc:sldMk cId="1213996271" sldId="382"/>
-        </pc:sldMkLst>
-      </pc:sldChg>
-      <pc:sldChg chg="del">
-        <pc:chgData name="Matthieu De Mari" userId="dfb708c9-d8dc-439f-9a3b-c772bf4a311c" providerId="ADAL" clId="{CF6A5140-9227-409F-9187-B98CCD837415}" dt="2023-03-08T06:05:20.621" v="70" actId="47"/>
-        <pc:sldMkLst>
-          <pc:docMk/>
-          <pc:sldMk cId="1681210728" sldId="383"/>
-        </pc:sldMkLst>
-      </pc:sldChg>
-      <pc:sldChg chg="del">
-        <pc:chgData name="Matthieu De Mari" userId="dfb708c9-d8dc-439f-9a3b-c772bf4a311c" providerId="ADAL" clId="{CF6A5140-9227-409F-9187-B98CCD837415}" dt="2023-03-08T06:05:19.819" v="69" actId="47"/>
-        <pc:sldMkLst>
-          <pc:docMk/>
-          <pc:sldMk cId="1342602480" sldId="384"/>
-        </pc:sldMkLst>
-      </pc:sldChg>
-      <pc:sldChg chg="del">
-        <pc:chgData name="Matthieu De Mari" userId="dfb708c9-d8dc-439f-9a3b-c772bf4a311c" providerId="ADAL" clId="{CF6A5140-9227-409F-9187-B98CCD837415}" dt="2023-03-08T06:05:17.999" v="67" actId="47"/>
-        <pc:sldMkLst>
-          <pc:docMk/>
-          <pc:sldMk cId="3061177336" sldId="385"/>
-        </pc:sldMkLst>
-      </pc:sldChg>
-      <pc:sldChg chg="del">
-        <pc:chgData name="Matthieu De Mari" userId="dfb708c9-d8dc-439f-9a3b-c772bf4a311c" providerId="ADAL" clId="{CF6A5140-9227-409F-9187-B98CCD837415}" dt="2023-03-08T06:05:18.882" v="68" actId="47"/>
-        <pc:sldMkLst>
-          <pc:docMk/>
-          <pc:sldMk cId="1114751945" sldId="386"/>
-        </pc:sldMkLst>
-      </pc:sldChg>
-      <pc:sldChg chg="del">
-        <pc:chgData name="Matthieu De Mari" userId="dfb708c9-d8dc-439f-9a3b-c772bf4a311c" providerId="ADAL" clId="{CF6A5140-9227-409F-9187-B98CCD837415}" dt="2023-03-08T06:05:18.882" v="68" actId="47"/>
-        <pc:sldMkLst>
-          <pc:docMk/>
-          <pc:sldMk cId="881014307" sldId="387"/>
-        </pc:sldMkLst>
-      </pc:sldChg>
-      <pc:sldChg chg="del">
-        <pc:chgData name="Matthieu De Mari" userId="dfb708c9-d8dc-439f-9a3b-c772bf4a311c" providerId="ADAL" clId="{CF6A5140-9227-409F-9187-B98CCD837415}" dt="2023-03-08T06:05:18.882" v="68" actId="47"/>
-        <pc:sldMkLst>
-          <pc:docMk/>
-          <pc:sldMk cId="1359818059" sldId="389"/>
-        </pc:sldMkLst>
-      </pc:sldChg>
-      <pc:sldChg chg="del">
-        <pc:chgData name="Matthieu De Mari" userId="dfb708c9-d8dc-439f-9a3b-c772bf4a311c" providerId="ADAL" clId="{CF6A5140-9227-409F-9187-B98CCD837415}" dt="2023-03-08T06:05:18.882" v="68" actId="47"/>
-        <pc:sldMkLst>
-          <pc:docMk/>
-          <pc:sldMk cId="1233822438" sldId="390"/>
-        </pc:sldMkLst>
-      </pc:sldChg>
-      <pc:sldChg chg="del">
-        <pc:chgData name="Matthieu De Mari" userId="dfb708c9-d8dc-439f-9a3b-c772bf4a311c" providerId="ADAL" clId="{CF6A5140-9227-409F-9187-B98CCD837415}" dt="2023-03-08T06:05:18.882" v="68" actId="47"/>
-        <pc:sldMkLst>
-          <pc:docMk/>
-          <pc:sldMk cId="2406012581" sldId="391"/>
-        </pc:sldMkLst>
-      </pc:sldChg>
-      <pc:sldChg chg="del">
-        <pc:chgData name="Matthieu De Mari" userId="dfb708c9-d8dc-439f-9a3b-c772bf4a311c" providerId="ADAL" clId="{CF6A5140-9227-409F-9187-B98CCD837415}" dt="2023-03-08T06:05:18.882" v="68" actId="47"/>
-        <pc:sldMkLst>
-          <pc:docMk/>
-          <pc:sldMk cId="1269624659" sldId="392"/>
-        </pc:sldMkLst>
-      </pc:sldChg>
-      <pc:sldChg chg="del">
-        <pc:chgData name="Matthieu De Mari" userId="dfb708c9-d8dc-439f-9a3b-c772bf4a311c" providerId="ADAL" clId="{CF6A5140-9227-409F-9187-B98CCD837415}" dt="2023-03-08T06:05:19.819" v="69" actId="47"/>
-        <pc:sldMkLst>
-          <pc:docMk/>
-          <pc:sldMk cId="1060213588" sldId="393"/>
-        </pc:sldMkLst>
-      </pc:sldChg>
-      <pc:sldChg chg="del">
-        <pc:chgData name="Matthieu De Mari" userId="dfb708c9-d8dc-439f-9a3b-c772bf4a311c" providerId="ADAL" clId="{CF6A5140-9227-409F-9187-B98CCD837415}" dt="2023-03-08T06:05:19.819" v="69" actId="47"/>
-        <pc:sldMkLst>
-          <pc:docMk/>
-          <pc:sldMk cId="1215328976" sldId="394"/>
-        </pc:sldMkLst>
-      </pc:sldChg>
-      <pc:sldChg chg="del">
-        <pc:chgData name="Matthieu De Mari" userId="dfb708c9-d8dc-439f-9a3b-c772bf4a311c" providerId="ADAL" clId="{CF6A5140-9227-409F-9187-B98CCD837415}" dt="2023-03-08T06:05:19.819" v="69" actId="47"/>
-        <pc:sldMkLst>
-          <pc:docMk/>
-          <pc:sldMk cId="3544056403" sldId="395"/>
-        </pc:sldMkLst>
-      </pc:sldChg>
-      <pc:sldChg chg="del">
-        <pc:chgData name="Matthieu De Mari" userId="dfb708c9-d8dc-439f-9a3b-c772bf4a311c" providerId="ADAL" clId="{CF6A5140-9227-409F-9187-B98CCD837415}" dt="2023-03-08T06:05:19.819" v="69" actId="47"/>
-        <pc:sldMkLst>
-          <pc:docMk/>
-          <pc:sldMk cId="511100047" sldId="397"/>
-        </pc:sldMkLst>
-      </pc:sldChg>
-      <pc:sldChg chg="del">
-        <pc:chgData name="Matthieu De Mari" userId="dfb708c9-d8dc-439f-9a3b-c772bf4a311c" providerId="ADAL" clId="{CF6A5140-9227-409F-9187-B98CCD837415}" dt="2023-03-08T06:05:18.882" v="68" actId="47"/>
-        <pc:sldMkLst>
-          <pc:docMk/>
-          <pc:sldMk cId="2174133860" sldId="398"/>
-        </pc:sldMkLst>
-      </pc:sldChg>
-      <pc:sldChg chg="del">
-        <pc:chgData name="Matthieu De Mari" userId="dfb708c9-d8dc-439f-9a3b-c772bf4a311c" providerId="ADAL" clId="{CF6A5140-9227-409F-9187-B98CCD837415}" dt="2023-03-08T06:05:18.882" v="68" actId="47"/>
-        <pc:sldMkLst>
-          <pc:docMk/>
-          <pc:sldMk cId="1114255243" sldId="399"/>
-        </pc:sldMkLst>
-      </pc:sldChg>
-      <pc:sldChg chg="del">
-        <pc:chgData name="Matthieu De Mari" userId="dfb708c9-d8dc-439f-9a3b-c772bf4a311c" providerId="ADAL" clId="{CF6A5140-9227-409F-9187-B98CCD837415}" dt="2023-03-08T06:05:18.882" v="68" actId="47"/>
-        <pc:sldMkLst>
-          <pc:docMk/>
-          <pc:sldMk cId="3412258979" sldId="400"/>
-        </pc:sldMkLst>
-      </pc:sldChg>
-      <pc:sldChg chg="del">
-        <pc:chgData name="Matthieu De Mari" userId="dfb708c9-d8dc-439f-9a3b-c772bf4a311c" providerId="ADAL" clId="{CF6A5140-9227-409F-9187-B98CCD837415}" dt="2023-03-08T06:05:19.819" v="69" actId="47"/>
-        <pc:sldMkLst>
-          <pc:docMk/>
-          <pc:sldMk cId="2615177350" sldId="401"/>
-        </pc:sldMkLst>
-      </pc:sldChg>
-      <pc:sldChg chg="del">
-        <pc:chgData name="Matthieu De Mari" userId="dfb708c9-d8dc-439f-9a3b-c772bf4a311c" providerId="ADAL" clId="{CF6A5140-9227-409F-9187-B98CCD837415}" dt="2023-03-08T06:05:19.819" v="69" actId="47"/>
-        <pc:sldMkLst>
-          <pc:docMk/>
-          <pc:sldMk cId="792071299" sldId="402"/>
-        </pc:sldMkLst>
-      </pc:sldChg>
-      <pc:sldChg chg="del">
-        <pc:chgData name="Matthieu De Mari" userId="dfb708c9-d8dc-439f-9a3b-c772bf4a311c" providerId="ADAL" clId="{CF6A5140-9227-409F-9187-B98CCD837415}" dt="2023-03-08T06:05:19.819" v="69" actId="47"/>
-        <pc:sldMkLst>
-          <pc:docMk/>
-          <pc:sldMk cId="990763623" sldId="403"/>
-        </pc:sldMkLst>
-      </pc:sldChg>
-      <pc:sldChg chg="del">
-        <pc:chgData name="Matthieu De Mari" userId="dfb708c9-d8dc-439f-9a3b-c772bf4a311c" providerId="ADAL" clId="{CF6A5140-9227-409F-9187-B98CCD837415}" dt="2023-03-08T06:05:19.819" v="69" actId="47"/>
-        <pc:sldMkLst>
-          <pc:docMk/>
-          <pc:sldMk cId="3762706142" sldId="404"/>
-        </pc:sldMkLst>
-      </pc:sldChg>
-      <pc:sldChg chg="del">
-        <pc:chgData name="Matthieu De Mari" userId="dfb708c9-d8dc-439f-9a3b-c772bf4a311c" providerId="ADAL" clId="{CF6A5140-9227-409F-9187-B98CCD837415}" dt="2023-03-08T06:05:20.621" v="70" actId="47"/>
-        <pc:sldMkLst>
-          <pc:docMk/>
-          <pc:sldMk cId="4232193198" sldId="405"/>
-        </pc:sldMkLst>
-      </pc:sldChg>
-      <pc:sldChg chg="del">
-        <pc:chgData name="Matthieu De Mari" userId="dfb708c9-d8dc-439f-9a3b-c772bf4a311c" providerId="ADAL" clId="{CF6A5140-9227-409F-9187-B98CCD837415}" dt="2023-03-08T06:05:20.621" v="70" actId="47"/>
-        <pc:sldMkLst>
-          <pc:docMk/>
-          <pc:sldMk cId="1511321219" sldId="406"/>
-        </pc:sldMkLst>
-      </pc:sldChg>
-      <pc:sldChg chg="del">
-        <pc:chgData name="Matthieu De Mari" userId="dfb708c9-d8dc-439f-9a3b-c772bf4a311c" providerId="ADAL" clId="{CF6A5140-9227-409F-9187-B98CCD837415}" dt="2023-03-08T06:05:20.621" v="70" actId="47"/>
-        <pc:sldMkLst>
-          <pc:docMk/>
-          <pc:sldMk cId="3233841990" sldId="407"/>
-        </pc:sldMkLst>
-      </pc:sldChg>
-      <pc:sldChg chg="del">
-        <pc:chgData name="Matthieu De Mari" userId="dfb708c9-d8dc-439f-9a3b-c772bf4a311c" providerId="ADAL" clId="{CF6A5140-9227-409F-9187-B98CCD837415}" dt="2023-03-08T06:05:20.621" v="70" actId="47"/>
-        <pc:sldMkLst>
-          <pc:docMk/>
-          <pc:sldMk cId="1609989787" sldId="408"/>
-        </pc:sldMkLst>
-      </pc:sldChg>
-      <pc:sldChg chg="del">
-        <pc:chgData name="Matthieu De Mari" userId="dfb708c9-d8dc-439f-9a3b-c772bf4a311c" providerId="ADAL" clId="{CF6A5140-9227-409F-9187-B98CCD837415}" dt="2023-03-08T06:05:18.882" v="68" actId="47"/>
-        <pc:sldMkLst>
-          <pc:docMk/>
-          <pc:sldMk cId="3853734329" sldId="409"/>
-        </pc:sldMkLst>
-      </pc:sldChg>
-      <pc:sldChg chg="del">
-        <pc:chgData name="Matthieu De Mari" userId="dfb708c9-d8dc-439f-9a3b-c772bf4a311c" providerId="ADAL" clId="{CF6A5140-9227-409F-9187-B98CCD837415}" dt="2023-03-08T06:05:23.379" v="73" actId="47"/>
-        <pc:sldMkLst>
-          <pc:docMk/>
-          <pc:sldMk cId="4281175894" sldId="410"/>
-        </pc:sldMkLst>
-      </pc:sldChg>
-      <pc:sldChg chg="del">
-        <pc:chgData name="Matthieu De Mari" userId="dfb708c9-d8dc-439f-9a3b-c772bf4a311c" providerId="ADAL" clId="{CF6A5140-9227-409F-9187-B98CCD837415}" dt="2023-03-08T06:05:22.321" v="72" actId="47"/>
-        <pc:sldMkLst>
-          <pc:docMk/>
-          <pc:sldMk cId="3863789620" sldId="411"/>
-        </pc:sldMkLst>
-      </pc:sldChg>
-      <pc:sldChg chg="del">
-        <pc:chgData name="Matthieu De Mari" userId="dfb708c9-d8dc-439f-9a3b-c772bf4a311c" providerId="ADAL" clId="{CF6A5140-9227-409F-9187-B98CCD837415}" dt="2023-03-08T06:05:22.321" v="72" actId="47"/>
-        <pc:sldMkLst>
-          <pc:docMk/>
-          <pc:sldMk cId="3522054596" sldId="412"/>
-        </pc:sldMkLst>
-      </pc:sldChg>
-      <pc:sldChg chg="del">
-        <pc:chgData name="Matthieu De Mari" userId="dfb708c9-d8dc-439f-9a3b-c772bf4a311c" providerId="ADAL" clId="{CF6A5140-9227-409F-9187-B98CCD837415}" dt="2023-03-08T06:05:24.214" v="74" actId="47"/>
-        <pc:sldMkLst>
-          <pc:docMk/>
-          <pc:sldMk cId="2221766967" sldId="413"/>
-        </pc:sldMkLst>
-      </pc:sldChg>
-      <pc:sldChg chg="del">
-        <pc:chgData name="Matthieu De Mari" userId="dfb708c9-d8dc-439f-9a3b-c772bf4a311c" providerId="ADAL" clId="{CF6A5140-9227-409F-9187-B98CCD837415}" dt="2023-03-08T06:05:24.214" v="74" actId="47"/>
-        <pc:sldMkLst>
-          <pc:docMk/>
-          <pc:sldMk cId="912972080" sldId="414"/>
-        </pc:sldMkLst>
-      </pc:sldChg>
-      <pc:sldChg chg="del">
-        <pc:chgData name="Matthieu De Mari" userId="dfb708c9-d8dc-439f-9a3b-c772bf4a311c" providerId="ADAL" clId="{CF6A5140-9227-409F-9187-B98CCD837415}" dt="2023-03-08T06:05:24.214" v="74" actId="47"/>
-        <pc:sldMkLst>
-          <pc:docMk/>
-          <pc:sldMk cId="71985707" sldId="415"/>
-        </pc:sldMkLst>
-      </pc:sldChg>
-      <pc:sldChg chg="del">
-        <pc:chgData name="Matthieu De Mari" userId="dfb708c9-d8dc-439f-9a3b-c772bf4a311c" providerId="ADAL" clId="{CF6A5140-9227-409F-9187-B98CCD837415}" dt="2023-03-08T06:05:24.214" v="74" actId="47"/>
-        <pc:sldMkLst>
-          <pc:docMk/>
-          <pc:sldMk cId="1311368978" sldId="416"/>
-        </pc:sldMkLst>
-      </pc:sldChg>
-      <pc:sldChg chg="del">
-        <pc:chgData name="Matthieu De Mari" userId="dfb708c9-d8dc-439f-9a3b-c772bf4a311c" providerId="ADAL" clId="{CF6A5140-9227-409F-9187-B98CCD837415}" dt="2023-03-08T06:05:22.321" v="72" actId="47"/>
-        <pc:sldMkLst>
-          <pc:docMk/>
-          <pc:sldMk cId="3072427418" sldId="417"/>
-        </pc:sldMkLst>
-      </pc:sldChg>
-      <pc:sldChg chg="del">
-        <pc:chgData name="Matthieu De Mari" userId="dfb708c9-d8dc-439f-9a3b-c772bf4a311c" providerId="ADAL" clId="{CF6A5140-9227-409F-9187-B98CCD837415}" dt="2023-03-08T06:05:22.321" v="72" actId="47"/>
-        <pc:sldMkLst>
-          <pc:docMk/>
-          <pc:sldMk cId="298499389" sldId="418"/>
-        </pc:sldMkLst>
-      </pc:sldChg>
-      <pc:sldChg chg="del">
-        <pc:chgData name="Matthieu De Mari" userId="dfb708c9-d8dc-439f-9a3b-c772bf4a311c" providerId="ADAL" clId="{CF6A5140-9227-409F-9187-B98CCD837415}" dt="2023-03-08T06:05:22.321" v="72" actId="47"/>
-        <pc:sldMkLst>
-          <pc:docMk/>
-          <pc:sldMk cId="3069423319" sldId="419"/>
-        </pc:sldMkLst>
-      </pc:sldChg>
-      <pc:sldChg chg="add del">
-        <pc:chgData name="Matthieu De Mari" userId="dfb708c9-d8dc-439f-9a3b-c772bf4a311c" providerId="ADAL" clId="{CF6A5140-9227-409F-9187-B98CCD837415}" dt="2023-03-08T06:05:53.727" v="81" actId="47"/>
-        <pc:sldMkLst>
-          <pc:docMk/>
-          <pc:sldMk cId="485649805" sldId="420"/>
-        </pc:sldMkLst>
-      </pc:sldChg>
-      <pc:sldChg chg="add del">
-        <pc:chgData name="Matthieu De Mari" userId="dfb708c9-d8dc-439f-9a3b-c772bf4a311c" providerId="ADAL" clId="{CF6A5140-9227-409F-9187-B98CCD837415}" dt="2023-03-09T08:09:47.699" v="10404" actId="47"/>
-        <pc:sldMkLst>
-          <pc:docMk/>
-          <pc:sldMk cId="3351792085" sldId="421"/>
-        </pc:sldMkLst>
-      </pc:sldChg>
-      <pc:sldChg chg="modSp new mod">
-        <pc:chgData name="Matthieu De Mari" userId="dfb708c9-d8dc-439f-9a3b-c772bf4a311c" providerId="ADAL" clId="{CF6A5140-9227-409F-9187-B98CCD837415}" dt="2023-03-08T06:44:09.169" v="552" actId="113"/>
-        <pc:sldMkLst>
-          <pc:docMk/>
-          <pc:sldMk cId="1161233365" sldId="422"/>
-        </pc:sldMkLst>
-      </pc:sldChg>
-      <pc:sldChg chg="add del">
-        <pc:chgData name="Matthieu De Mari" userId="dfb708c9-d8dc-439f-9a3b-c772bf4a311c" providerId="ADAL" clId="{CF6A5140-9227-409F-9187-B98CCD837415}" dt="2023-03-08T06:05:56.432" v="84" actId="47"/>
-        <pc:sldMkLst>
-          <pc:docMk/>
-          <pc:sldMk cId="3421583851" sldId="423"/>
-        </pc:sldMkLst>
-      </pc:sldChg>
-      <pc:sldChg chg="modSp new mod ord">
-        <pc:chgData name="Matthieu De Mari" userId="dfb708c9-d8dc-439f-9a3b-c772bf4a311c" providerId="ADAL" clId="{CF6A5140-9227-409F-9187-B98CCD837415}" dt="2023-03-14T09:22:02.294" v="10731" actId="20577"/>
-        <pc:sldMkLst>
-          <pc:docMk/>
-          <pc:sldMk cId="4226169062" sldId="423"/>
-        </pc:sldMkLst>
-      </pc:sldChg>
-      <pc:sldChg chg="add del">
-        <pc:chgData name="Matthieu De Mari" userId="dfb708c9-d8dc-439f-9a3b-c772bf4a311c" providerId="ADAL" clId="{CF6A5140-9227-409F-9187-B98CCD837415}" dt="2023-03-08T06:05:57.037" v="85" actId="47"/>
-        <pc:sldMkLst>
-          <pc:docMk/>
-          <pc:sldMk cId="2106229472" sldId="424"/>
-        </pc:sldMkLst>
-      </pc:sldChg>
-      <pc:sldChg chg="addSp delSp modSp new mod modClrScheme chgLayout">
-        <pc:chgData name="Matthieu De Mari" userId="dfb708c9-d8dc-439f-9a3b-c772bf4a311c" providerId="ADAL" clId="{CF6A5140-9227-409F-9187-B98CCD837415}" dt="2023-03-14T09:20:40.084" v="10707" actId="20577"/>
-        <pc:sldMkLst>
-          <pc:docMk/>
-          <pc:sldMk cId="4050696508" sldId="424"/>
-        </pc:sldMkLst>
-      </pc:sldChg>
-      <pc:sldChg chg="add del">
-        <pc:chgData name="Matthieu De Mari" userId="dfb708c9-d8dc-439f-9a3b-c772bf4a311c" providerId="ADAL" clId="{CF6A5140-9227-409F-9187-B98CCD837415}" dt="2023-03-08T06:05:55.165" v="82" actId="47"/>
-        <pc:sldMkLst>
-          <pc:docMk/>
-          <pc:sldMk cId="833550183" sldId="425"/>
-        </pc:sldMkLst>
-      </pc:sldChg>
-      <pc:sldChg chg="modSp new mod ord">
-        <pc:chgData name="Matthieu De Mari" userId="dfb708c9-d8dc-439f-9a3b-c772bf4a311c" providerId="ADAL" clId="{CF6A5140-9227-409F-9187-B98CCD837415}" dt="2023-03-09T07:46:53.901" v="8162" actId="20577"/>
-        <pc:sldMkLst>
-          <pc:docMk/>
-          <pc:sldMk cId="2244529904" sldId="425"/>
-        </pc:sldMkLst>
-      </pc:sldChg>
-      <pc:sldChg chg="new del">
-        <pc:chgData name="Matthieu De Mari" userId="dfb708c9-d8dc-439f-9a3b-c772bf4a311c" providerId="ADAL" clId="{CF6A5140-9227-409F-9187-B98CCD837415}" dt="2023-03-09T07:46:49.192" v="8160" actId="47"/>
-        <pc:sldMkLst>
-          <pc:docMk/>
-          <pc:sldMk cId="316413211" sldId="426"/>
-        </pc:sldMkLst>
-      </pc:sldChg>
-      <pc:sldChg chg="add del">
-        <pc:chgData name="Matthieu De Mari" userId="dfb708c9-d8dc-439f-9a3b-c772bf4a311c" providerId="ADAL" clId="{CF6A5140-9227-409F-9187-B98CCD837415}" dt="2023-03-08T06:05:55.848" v="83" actId="47"/>
-        <pc:sldMkLst>
-          <pc:docMk/>
-          <pc:sldMk cId="1650955281" sldId="426"/>
-        </pc:sldMkLst>
-      </pc:sldChg>
-      <pc:sldChg chg="del">
-        <pc:chgData name="Matthieu De Mari" userId="dfb708c9-d8dc-439f-9a3b-c772bf4a311c" providerId="ADAL" clId="{CF6A5140-9227-409F-9187-B98CCD837415}" dt="2023-03-08T06:05:18.882" v="68" actId="47"/>
-        <pc:sldMkLst>
-          <pc:docMk/>
-          <pc:sldMk cId="25607758" sldId="427"/>
-        </pc:sldMkLst>
-      </pc:sldChg>
-      <pc:sldChg chg="addSp modSp new mod modClrScheme chgLayout">
-        <pc:chgData name="Matthieu De Mari" userId="dfb708c9-d8dc-439f-9a3b-c772bf4a311c" providerId="ADAL" clId="{CF6A5140-9227-409F-9187-B98CCD837415}" dt="2023-03-14T09:23:41.572" v="10776" actId="20577"/>
-        <pc:sldMkLst>
-          <pc:docMk/>
-          <pc:sldMk cId="1586635455" sldId="427"/>
-        </pc:sldMkLst>
-      </pc:sldChg>
-      <pc:sldChg chg="new del ord">
-        <pc:chgData name="Matthieu De Mari" userId="dfb708c9-d8dc-439f-9a3b-c772bf4a311c" providerId="ADAL" clId="{CF6A5140-9227-409F-9187-B98CCD837415}" dt="2023-03-09T08:09:50.895" v="10405" actId="47"/>
-        <pc:sldMkLst>
-          <pc:docMk/>
-          <pc:sldMk cId="1021753143" sldId="428"/>
-        </pc:sldMkLst>
-      </pc:sldChg>
-      <pc:sldChg chg="add del">
-        <pc:chgData name="Matthieu De Mari" userId="dfb708c9-d8dc-439f-9a3b-c772bf4a311c" providerId="ADAL" clId="{CF6A5140-9227-409F-9187-B98CCD837415}" dt="2023-03-08T06:05:52.107" v="80" actId="47"/>
-        <pc:sldMkLst>
-          <pc:docMk/>
-          <pc:sldMk cId="2580070337" sldId="428"/>
-        </pc:sldMkLst>
-      </pc:sldChg>
-      <pc:sldChg chg="addSp delSp modSp new mod ord modClrScheme chgLayout">
-        <pc:chgData name="Matthieu De Mari" userId="dfb708c9-d8dc-439f-9a3b-c772bf4a311c" providerId="ADAL" clId="{CF6A5140-9227-409F-9187-B98CCD837415}" dt="2023-03-09T07:13:51.803" v="5418" actId="20577"/>
-        <pc:sldMkLst>
-          <pc:docMk/>
-          <pc:sldMk cId="76065098" sldId="429"/>
-        </pc:sldMkLst>
-      </pc:sldChg>
-      <pc:sldChg chg="add del">
-        <pc:chgData name="Matthieu De Mari" userId="dfb708c9-d8dc-439f-9a3b-c772bf4a311c" providerId="ADAL" clId="{CF6A5140-9227-409F-9187-B98CCD837415}" dt="2023-03-08T06:05:57.672" v="86" actId="47"/>
-        <pc:sldMkLst>
-          <pc:docMk/>
-          <pc:sldMk cId="2609747574" sldId="429"/>
-        </pc:sldMkLst>
-      </pc:sldChg>
-      <pc:sldChg chg="addSp modSp add mod">
-        <pc:chgData name="Matthieu De Mari" userId="dfb708c9-d8dc-439f-9a3b-c772bf4a311c" providerId="ADAL" clId="{CF6A5140-9227-409F-9187-B98CCD837415}" dt="2023-03-08T06:54:24.985" v="1279"/>
-        <pc:sldMkLst>
-          <pc:docMk/>
-          <pc:sldMk cId="600619302" sldId="430"/>
-        </pc:sldMkLst>
-      </pc:sldChg>
-      <pc:sldChg chg="add del">
-        <pc:chgData name="Matthieu De Mari" userId="dfb708c9-d8dc-439f-9a3b-c772bf4a311c" providerId="ADAL" clId="{CF6A5140-9227-409F-9187-B98CCD837415}" dt="2023-03-08T06:05:58.319" v="87" actId="47"/>
-        <pc:sldMkLst>
-          <pc:docMk/>
-          <pc:sldMk cId="1298953197" sldId="430"/>
-        </pc:sldMkLst>
-      </pc:sldChg>
-      <pc:sldChg chg="new del">
-        <pc:chgData name="Matthieu De Mari" userId="dfb708c9-d8dc-439f-9a3b-c772bf4a311c" providerId="ADAL" clId="{CF6A5140-9227-409F-9187-B98CCD837415}" dt="2023-03-08T06:45:49.355" v="652" actId="47"/>
-        <pc:sldMkLst>
-          <pc:docMk/>
-          <pc:sldMk cId="4142767097" sldId="430"/>
-        </pc:sldMkLst>
-      </pc:sldChg>
-      <pc:sldChg chg="add del">
-        <pc:chgData name="Matthieu De Mari" userId="dfb708c9-d8dc-439f-9a3b-c772bf4a311c" providerId="ADAL" clId="{CF6A5140-9227-409F-9187-B98CCD837415}" dt="2023-03-08T06:05:49.339" v="78" actId="47"/>
-        <pc:sldMkLst>
-          <pc:docMk/>
-          <pc:sldMk cId="349686524" sldId="431"/>
-        </pc:sldMkLst>
-      </pc:sldChg>
-      <pc:sldChg chg="addSp delSp modSp add mod">
-        <pc:chgData name="Matthieu De Mari" userId="dfb708c9-d8dc-439f-9a3b-c772bf4a311c" providerId="ADAL" clId="{CF6A5140-9227-409F-9187-B98CCD837415}" dt="2023-03-09T07:14:00.657" v="5421" actId="114"/>
-        <pc:sldMkLst>
-          <pc:docMk/>
-          <pc:sldMk cId="2954873226" sldId="431"/>
-        </pc:sldMkLst>
-      </pc:sldChg>
-      <pc:sldChg chg="addSp modSp add mod">
-        <pc:chgData name="Matthieu De Mari" userId="dfb708c9-d8dc-439f-9a3b-c772bf4a311c" providerId="ADAL" clId="{CF6A5140-9227-409F-9187-B98CCD837415}" dt="2023-03-08T07:14:41.818" v="2737" actId="207"/>
-        <pc:sldMkLst>
-          <pc:docMk/>
-          <pc:sldMk cId="2366763698" sldId="432"/>
-        </pc:sldMkLst>
-      </pc:sldChg>
-      <pc:sldChg chg="add del">
-        <pc:chgData name="Matthieu De Mari" userId="dfb708c9-d8dc-439f-9a3b-c772bf4a311c" providerId="ADAL" clId="{CF6A5140-9227-409F-9187-B98CCD837415}" dt="2023-03-08T06:05:50.083" v="79" actId="47"/>
-        <pc:sldMkLst>
-          <pc:docMk/>
-          <pc:sldMk cId="3417944735" sldId="432"/>
-        </pc:sldMkLst>
-      </pc:sldChg>
-      <pc:sldChg chg="add del">
-        <pc:chgData name="Matthieu De Mari" userId="dfb708c9-d8dc-439f-9a3b-c772bf4a311c" providerId="ADAL" clId="{CF6A5140-9227-409F-9187-B98CCD837415}" dt="2023-03-08T06:58:06.054" v="1587" actId="47"/>
-        <pc:sldMkLst>
-          <pc:docMk/>
-          <pc:sldMk cId="576554638" sldId="433"/>
-        </pc:sldMkLst>
-      </pc:sldChg>
-      <pc:sldChg chg="modSp add mod">
-        <pc:chgData name="Matthieu De Mari" userId="dfb708c9-d8dc-439f-9a3b-c772bf4a311c" providerId="ADAL" clId="{CF6A5140-9227-409F-9187-B98CCD837415}" dt="2023-03-08T07:14:48.710" v="2750" actId="20577"/>
-        <pc:sldMkLst>
-          <pc:docMk/>
-          <pc:sldMk cId="1791834708" sldId="433"/>
-        </pc:sldMkLst>
-      </pc:sldChg>
-      <pc:sldChg chg="add del">
-        <pc:chgData name="Matthieu De Mari" userId="dfb708c9-d8dc-439f-9a3b-c772bf4a311c" providerId="ADAL" clId="{CF6A5140-9227-409F-9187-B98CCD837415}" dt="2023-03-08T06:05:48.218" v="77" actId="47"/>
-        <pc:sldMkLst>
-          <pc:docMk/>
-          <pc:sldMk cId="2653152999" sldId="433"/>
-        </pc:sldMkLst>
-      </pc:sldChg>
-      <pc:sldChg chg="addSp modSp add mod">
-        <pc:chgData name="Matthieu De Mari" userId="dfb708c9-d8dc-439f-9a3b-c772bf4a311c" providerId="ADAL" clId="{CF6A5140-9227-409F-9187-B98CCD837415}" dt="2023-03-15T06:23:26.870" v="10782" actId="20577"/>
-        <pc:sldMkLst>
-          <pc:docMk/>
-          <pc:sldMk cId="2266139316" sldId="434"/>
-        </pc:sldMkLst>
-      </pc:sldChg>
-      <pc:sldChg chg="add del">
-        <pc:chgData name="Matthieu De Mari" userId="dfb708c9-d8dc-439f-9a3b-c772bf4a311c" providerId="ADAL" clId="{CF6A5140-9227-409F-9187-B98CCD837415}" dt="2023-03-08T06:05:48.218" v="77" actId="47"/>
-        <pc:sldMkLst>
-          <pc:docMk/>
-          <pc:sldMk cId="2305199698" sldId="434"/>
-        </pc:sldMkLst>
-      </pc:sldChg>
-      <pc:sldChg chg="add del">
-        <pc:chgData name="Matthieu De Mari" userId="dfb708c9-d8dc-439f-9a3b-c772bf4a311c" providerId="ADAL" clId="{CF6A5140-9227-409F-9187-B98CCD837415}" dt="2023-03-08T06:05:48.218" v="77" actId="47"/>
-        <pc:sldMkLst>
-          <pc:docMk/>
-          <pc:sldMk cId="2095478576" sldId="435"/>
-        </pc:sldMkLst>
-      </pc:sldChg>
-      <pc:sldChg chg="new del">
-        <pc:chgData name="Matthieu De Mari" userId="dfb708c9-d8dc-439f-9a3b-c772bf4a311c" providerId="ADAL" clId="{CF6A5140-9227-409F-9187-B98CCD837415}" dt="2023-03-08T10:36:29.111" v="4632" actId="47"/>
-        <pc:sldMkLst>
-          <pc:docMk/>
-          <pc:sldMk cId="3544061180" sldId="435"/>
-        </pc:sldMkLst>
-      </pc:sldChg>
-      <pc:sldChg chg="add del">
-        <pc:chgData name="Matthieu De Mari" userId="dfb708c9-d8dc-439f-9a3b-c772bf4a311c" providerId="ADAL" clId="{CF6A5140-9227-409F-9187-B98CCD837415}" dt="2023-03-08T06:05:48.218" v="77" actId="47"/>
-        <pc:sldMkLst>
-          <pc:docMk/>
-          <pc:sldMk cId="2087017446" sldId="436"/>
-        </pc:sldMkLst>
-      </pc:sldChg>
-      <pc:sldChg chg="modSp add del mod ord">
-        <pc:chgData name="Matthieu De Mari" userId="dfb708c9-d8dc-439f-9a3b-c772bf4a311c" providerId="ADAL" clId="{CF6A5140-9227-409F-9187-B98CCD837415}" dt="2023-03-08T07:09:45.301" v="2382" actId="47"/>
-        <pc:sldMkLst>
-          <pc:docMk/>
-          <pc:sldMk cId="4002996775" sldId="436"/>
-        </pc:sldMkLst>
-      </pc:sldChg>
-      <pc:sldChg chg="modSp add mod">
-        <pc:chgData name="Matthieu De Mari" userId="dfb708c9-d8dc-439f-9a3b-c772bf4a311c" providerId="ADAL" clId="{CF6A5140-9227-409F-9187-B98CCD837415}" dt="2023-03-08T07:11:01.712" v="2477" actId="207"/>
-        <pc:sldMkLst>
-          <pc:docMk/>
-          <pc:sldMk cId="282863324" sldId="437"/>
-        </pc:sldMkLst>
-      </pc:sldChg>
-      <pc:sldChg chg="add del">
-        <pc:chgData name="Matthieu De Mari" userId="dfb708c9-d8dc-439f-9a3b-c772bf4a311c" providerId="ADAL" clId="{CF6A5140-9227-409F-9187-B98CCD837415}" dt="2023-03-08T06:05:48.218" v="77" actId="47"/>
-        <pc:sldMkLst>
-          <pc:docMk/>
-          <pc:sldMk cId="2927953506" sldId="437"/>
-        </pc:sldMkLst>
-      </pc:sldChg>
-      <pc:sldChg chg="modSp add mod">
-        <pc:chgData name="Matthieu De Mari" userId="dfb708c9-d8dc-439f-9a3b-c772bf4a311c" providerId="ADAL" clId="{CF6A5140-9227-409F-9187-B98CCD837415}" dt="2023-03-08T07:11:06.553" v="2478" actId="207"/>
-        <pc:sldMkLst>
-          <pc:docMk/>
-          <pc:sldMk cId="1648531005" sldId="438"/>
-        </pc:sldMkLst>
-      </pc:sldChg>
-      <pc:sldChg chg="modSp add mod">
-        <pc:chgData name="Matthieu De Mari" userId="dfb708c9-d8dc-439f-9a3b-c772bf4a311c" providerId="ADAL" clId="{CF6A5140-9227-409F-9187-B98CCD837415}" dt="2023-03-08T07:12:30.112" v="2535" actId="20577"/>
-        <pc:sldMkLst>
-          <pc:docMk/>
-          <pc:sldMk cId="2577277130" sldId="439"/>
-        </pc:sldMkLst>
-      </pc:sldChg>
-      <pc:sldChg chg="modSp add mod">
-        <pc:chgData name="Matthieu De Mari" userId="dfb708c9-d8dc-439f-9a3b-c772bf4a311c" providerId="ADAL" clId="{CF6A5140-9227-409F-9187-B98CCD837415}" dt="2023-03-14T09:20:30.564" v="10706" actId="207"/>
-        <pc:sldMkLst>
-          <pc:docMk/>
-          <pc:sldMk cId="2191919470" sldId="440"/>
-        </pc:sldMkLst>
-      </pc:sldChg>
-      <pc:sldChg chg="modSp add mod">
-        <pc:chgData name="Matthieu De Mari" userId="dfb708c9-d8dc-439f-9a3b-c772bf4a311c" providerId="ADAL" clId="{CF6A5140-9227-409F-9187-B98CCD837415}" dt="2023-03-14T09:20:26.333" v="10705" actId="207"/>
-        <pc:sldMkLst>
-          <pc:docMk/>
-          <pc:sldMk cId="2257941384" sldId="441"/>
-        </pc:sldMkLst>
-      </pc:sldChg>
-      <pc:sldChg chg="add del">
-        <pc:chgData name="Matthieu De Mari" userId="dfb708c9-d8dc-439f-9a3b-c772bf4a311c" providerId="ADAL" clId="{CF6A5140-9227-409F-9187-B98CCD837415}" dt="2023-03-09T07:37:39.854" v="7046" actId="47"/>
-        <pc:sldMkLst>
-          <pc:docMk/>
-          <pc:sldMk cId="1481206085" sldId="442"/>
-        </pc:sldMkLst>
-      </pc:sldChg>
-      <pc:sldChg chg="new del">
-        <pc:chgData name="Matthieu De Mari" userId="dfb708c9-d8dc-439f-9a3b-c772bf4a311c" providerId="ADAL" clId="{CF6A5140-9227-409F-9187-B98CCD837415}" dt="2023-03-08T10:12:58.043" v="3162" actId="47"/>
-        <pc:sldMkLst>
-          <pc:docMk/>
-          <pc:sldMk cId="2699636064" sldId="443"/>
-        </pc:sldMkLst>
-      </pc:sldChg>
-      <pc:sldChg chg="addSp modSp add mod">
-        <pc:chgData name="Matthieu De Mari" userId="dfb708c9-d8dc-439f-9a3b-c772bf4a311c" providerId="ADAL" clId="{CF6A5140-9227-409F-9187-B98CCD837415}" dt="2023-03-08T10:26:38.681" v="3947" actId="1076"/>
-        <pc:sldMkLst>
-          <pc:docMk/>
-          <pc:sldMk cId="3705292892" sldId="444"/>
-        </pc:sldMkLst>
-      </pc:sldChg>
-      <pc:sldChg chg="addSp delSp modSp add mod">
-        <pc:chgData name="Matthieu De Mari" userId="dfb708c9-d8dc-439f-9a3b-c772bf4a311c" providerId="ADAL" clId="{CF6A5140-9227-409F-9187-B98CCD837415}" dt="2023-03-08T10:28:53.636" v="4097" actId="1036"/>
-        <pc:sldMkLst>
-          <pc:docMk/>
-          <pc:sldMk cId="3585737502" sldId="445"/>
-        </pc:sldMkLst>
-      </pc:sldChg>
-      <pc:sldChg chg="new del">
-        <pc:chgData name="Matthieu De Mari" userId="dfb708c9-d8dc-439f-9a3b-c772bf4a311c" providerId="ADAL" clId="{CF6A5140-9227-409F-9187-B98CCD837415}" dt="2023-03-08T10:38:28.282" v="4951" actId="47"/>
-        <pc:sldMkLst>
-          <pc:docMk/>
-          <pc:sldMk cId="2236602308" sldId="446"/>
-        </pc:sldMkLst>
-      </pc:sldChg>
-      <pc:sldChg chg="new del">
-        <pc:chgData name="Matthieu De Mari" userId="dfb708c9-d8dc-439f-9a3b-c772bf4a311c" providerId="ADAL" clId="{CF6A5140-9227-409F-9187-B98CCD837415}" dt="2023-03-08T10:30:25.245" v="4107" actId="47"/>
-        <pc:sldMkLst>
-          <pc:docMk/>
-          <pc:sldMk cId="4140690872" sldId="447"/>
-        </pc:sldMkLst>
-      </pc:sldChg>
-      <pc:sldChg chg="modSp add mod">
-        <pc:chgData name="Matthieu De Mari" userId="dfb708c9-d8dc-439f-9a3b-c772bf4a311c" providerId="ADAL" clId="{CF6A5140-9227-409F-9187-B98CCD837415}" dt="2023-03-14T09:21:15.261" v="10710" actId="114"/>
-        <pc:sldMkLst>
-          <pc:docMk/>
-          <pc:sldMk cId="1738845767" sldId="448"/>
-        </pc:sldMkLst>
-      </pc:sldChg>
-      <pc:sldChg chg="addSp delSp modSp add mod">
-        <pc:chgData name="Matthieu De Mari" userId="dfb708c9-d8dc-439f-9a3b-c772bf4a311c" providerId="ADAL" clId="{CF6A5140-9227-409F-9187-B98CCD837415}" dt="2023-03-08T10:33:37.218" v="4438" actId="207"/>
-        <pc:sldMkLst>
-          <pc:docMk/>
-          <pc:sldMk cId="3149159304" sldId="449"/>
-        </pc:sldMkLst>
-      </pc:sldChg>
-      <pc:sldChg chg="modSp add mod">
-        <pc:chgData name="Matthieu De Mari" userId="dfb708c9-d8dc-439f-9a3b-c772bf4a311c" providerId="ADAL" clId="{CF6A5140-9227-409F-9187-B98CCD837415}" dt="2023-03-08T10:36:08.637" v="4631" actId="20577"/>
-        <pc:sldMkLst>
-          <pc:docMk/>
-          <pc:sldMk cId="2020760118" sldId="450"/>
-        </pc:sldMkLst>
-      </pc:sldChg>
-      <pc:sldChg chg="modSp add mod ord">
-        <pc:chgData name="Matthieu De Mari" userId="dfb708c9-d8dc-439f-9a3b-c772bf4a311c" providerId="ADAL" clId="{CF6A5140-9227-409F-9187-B98CCD837415}" dt="2023-03-09T07:15:07.649" v="5433" actId="20577"/>
-        <pc:sldMkLst>
-          <pc:docMk/>
-          <pc:sldMk cId="1242261096" sldId="451"/>
-        </pc:sldMkLst>
-      </pc:sldChg>
-      <pc:sldChg chg="add del">
-        <pc:chgData name="Matthieu De Mari" userId="dfb708c9-d8dc-439f-9a3b-c772bf4a311c" providerId="ADAL" clId="{CF6A5140-9227-409F-9187-B98CCD837415}" dt="2023-03-08T10:38:34.488" v="4952" actId="2696"/>
-        <pc:sldMkLst>
-          <pc:docMk/>
-          <pc:sldMk cId="2550081157" sldId="452"/>
-        </pc:sldMkLst>
-      </pc:sldChg>
-      <pc:sldChg chg="new del">
-        <pc:chgData name="Matthieu De Mari" userId="dfb708c9-d8dc-439f-9a3b-c772bf4a311c" providerId="ADAL" clId="{CF6A5140-9227-409F-9187-B98CCD837415}" dt="2023-03-08T10:40:23.119" v="5298" actId="47"/>
-        <pc:sldMkLst>
-          <pc:docMk/>
-          <pc:sldMk cId="3361891129" sldId="452"/>
-        </pc:sldMkLst>
-      </pc:sldChg>
-      <pc:sldChg chg="modSp add mod">
-        <pc:chgData name="Matthieu De Mari" userId="dfb708c9-d8dc-439f-9a3b-c772bf4a311c" providerId="ADAL" clId="{CF6A5140-9227-409F-9187-B98CCD837415}" dt="2023-03-09T07:15:16.543" v="5435"/>
-        <pc:sldMkLst>
-          <pc:docMk/>
-          <pc:sldMk cId="3102642038" sldId="453"/>
-        </pc:sldMkLst>
-      </pc:sldChg>
-      <pc:sldChg chg="add del">
-        <pc:chgData name="Matthieu De Mari" userId="dfb708c9-d8dc-439f-9a3b-c772bf4a311c" providerId="ADAL" clId="{CF6A5140-9227-409F-9187-B98CCD837415}" dt="2023-03-08T10:38:34.488" v="4952" actId="2696"/>
-        <pc:sldMkLst>
-          <pc:docMk/>
-          <pc:sldMk cId="3145888360" sldId="453"/>
-        </pc:sldMkLst>
-      </pc:sldChg>
-      <pc:sldChg chg="modSp add mod">
-        <pc:chgData name="Matthieu De Mari" userId="dfb708c9-d8dc-439f-9a3b-c772bf4a311c" providerId="ADAL" clId="{CF6A5140-9227-409F-9187-B98CCD837415}" dt="2023-03-09T07:15:11.396" v="5434"/>
-        <pc:sldMkLst>
-          <pc:docMk/>
-          <pc:sldMk cId="4072425385" sldId="454"/>
-        </pc:sldMkLst>
-      </pc:sldChg>
-      <pc:sldChg chg="modSp add mod">
-        <pc:chgData name="Matthieu De Mari" userId="dfb708c9-d8dc-439f-9a3b-c772bf4a311c" providerId="ADAL" clId="{CF6A5140-9227-409F-9187-B98CCD837415}" dt="2023-03-09T07:08:43.528" v="5311" actId="20577"/>
-        <pc:sldMkLst>
-          <pc:docMk/>
-          <pc:sldMk cId="1628282840" sldId="455"/>
-        </pc:sldMkLst>
-      </pc:sldChg>
-      <pc:sldChg chg="modSp add mod">
-        <pc:chgData name="Matthieu De Mari" userId="dfb708c9-d8dc-439f-9a3b-c772bf4a311c" providerId="ADAL" clId="{CF6A5140-9227-409F-9187-B98CCD837415}" dt="2023-03-14T09:24:44.028" v="10778" actId="113"/>
-        <pc:sldMkLst>
-          <pc:docMk/>
-          <pc:sldMk cId="1474802136" sldId="456"/>
-        </pc:sldMkLst>
-      </pc:sldChg>
-      <pc:sldChg chg="modSp new del mod">
-        <pc:chgData name="Matthieu De Mari" userId="dfb708c9-d8dc-439f-9a3b-c772bf4a311c" providerId="ADAL" clId="{CF6A5140-9227-409F-9187-B98CCD837415}" dt="2023-03-09T07:10:26.032" v="5340" actId="47"/>
-        <pc:sldMkLst>
-          <pc:docMk/>
-          <pc:sldMk cId="1747564226" sldId="456"/>
-        </pc:sldMkLst>
-      </pc:sldChg>
-      <pc:sldChg chg="modSp add mod">
-        <pc:chgData name="Matthieu De Mari" userId="dfb708c9-d8dc-439f-9a3b-c772bf4a311c" providerId="ADAL" clId="{CF6A5140-9227-409F-9187-B98CCD837415}" dt="2023-03-09T07:30:09.207" v="6594" actId="113"/>
-        <pc:sldMkLst>
-          <pc:docMk/>
-          <pc:sldMk cId="3858745428" sldId="457"/>
-        </pc:sldMkLst>
-      </pc:sldChg>
-      <pc:sldChg chg="add del">
-        <pc:chgData name="Matthieu De Mari" userId="dfb708c9-d8dc-439f-9a3b-c772bf4a311c" providerId="ADAL" clId="{CF6A5140-9227-409F-9187-B98CCD837415}" dt="2023-03-09T07:28:59.004" v="6288" actId="47"/>
-        <pc:sldMkLst>
-          <pc:docMk/>
-          <pc:sldMk cId="3308586578" sldId="458"/>
-        </pc:sldMkLst>
-      </pc:sldChg>
-      <pc:sldChg chg="modSp add mod">
-        <pc:chgData name="Matthieu De Mari" userId="dfb708c9-d8dc-439f-9a3b-c772bf4a311c" providerId="ADAL" clId="{CF6A5140-9227-409F-9187-B98CCD837415}" dt="2023-03-09T07:34:47.515" v="6856" actId="20577"/>
-        <pc:sldMkLst>
-          <pc:docMk/>
-          <pc:sldMk cId="3624547080" sldId="459"/>
-        </pc:sldMkLst>
-      </pc:sldChg>
-      <pc:sldChg chg="modSp add mod">
-        <pc:chgData name="Matthieu De Mari" userId="dfb708c9-d8dc-439f-9a3b-c772bf4a311c" providerId="ADAL" clId="{CF6A5140-9227-409F-9187-B98CCD837415}" dt="2023-03-15T07:03:13.871" v="10808" actId="20577"/>
-        <pc:sldMkLst>
-          <pc:docMk/>
-          <pc:sldMk cId="727967492" sldId="460"/>
-        </pc:sldMkLst>
-      </pc:sldChg>
-      <pc:sldChg chg="modSp add mod">
-        <pc:chgData name="Matthieu De Mari" userId="dfb708c9-d8dc-439f-9a3b-c772bf4a311c" providerId="ADAL" clId="{CF6A5140-9227-409F-9187-B98CCD837415}" dt="2023-03-09T07:46:59.325" v="8166" actId="20577"/>
-        <pc:sldMkLst>
-          <pc:docMk/>
-          <pc:sldMk cId="813445278" sldId="461"/>
-        </pc:sldMkLst>
-      </pc:sldChg>
-      <pc:sldChg chg="addSp delSp modSp add mod">
-        <pc:chgData name="Matthieu De Mari" userId="dfb708c9-d8dc-439f-9a3b-c772bf4a311c" providerId="ADAL" clId="{CF6A5140-9227-409F-9187-B98CCD837415}" dt="2023-03-15T07:03:11.751" v="10807" actId="20577"/>
-        <pc:sldMkLst>
-          <pc:docMk/>
-          <pc:sldMk cId="2989704858" sldId="462"/>
-        </pc:sldMkLst>
-      </pc:sldChg>
-      <pc:sldChg chg="delSp modSp add mod">
-        <pc:chgData name="Matthieu De Mari" userId="dfb708c9-d8dc-439f-9a3b-c772bf4a311c" providerId="ADAL" clId="{CF6A5140-9227-409F-9187-B98CCD837415}" dt="2023-03-14T09:23:10.137" v="10735" actId="20577"/>
-        <pc:sldMkLst>
-          <pc:docMk/>
-          <pc:sldMk cId="3007767847" sldId="463"/>
-        </pc:sldMkLst>
-      </pc:sldChg>
-      <pc:sldChg chg="addSp delSp modSp add mod">
-        <pc:chgData name="Matthieu De Mari" userId="dfb708c9-d8dc-439f-9a3b-c772bf4a311c" providerId="ADAL" clId="{CF6A5140-9227-409F-9187-B98CCD837415}" dt="2023-03-15T07:05:02.674" v="11042" actId="20577"/>
-        <pc:sldMkLst>
-          <pc:docMk/>
-          <pc:sldMk cId="47889816" sldId="464"/>
-        </pc:sldMkLst>
-      </pc:sldChg>
-      <pc:sldChg chg="addSp delSp modSp new mod">
-        <pc:chgData name="Matthieu De Mari" userId="dfb708c9-d8dc-439f-9a3b-c772bf4a311c" providerId="ADAL" clId="{CF6A5140-9227-409F-9187-B98CCD837415}" dt="2023-03-09T07:51:15.835" v="8554" actId="5793"/>
-        <pc:sldMkLst>
-          <pc:docMk/>
-          <pc:sldMk cId="4050530474" sldId="465"/>
-        </pc:sldMkLst>
-      </pc:sldChg>
-      <pc:sldChg chg="addSp delSp modSp add mod modClrScheme chgLayout">
-        <pc:chgData name="Matthieu De Mari" userId="dfb708c9-d8dc-439f-9a3b-c772bf4a311c" providerId="ADAL" clId="{CF6A5140-9227-409F-9187-B98CCD837415}" dt="2023-03-09T07:53:36" v="8647" actId="20577"/>
-        <pc:sldMkLst>
-          <pc:docMk/>
-          <pc:sldMk cId="4107990403" sldId="466"/>
-        </pc:sldMkLst>
-      </pc:sldChg>
-      <pc:sldChg chg="modSp add mod">
-        <pc:chgData name="Matthieu De Mari" userId="dfb708c9-d8dc-439f-9a3b-c772bf4a311c" providerId="ADAL" clId="{CF6A5140-9227-409F-9187-B98CCD837415}" dt="2023-03-09T07:54:53.992" v="8766" actId="20577"/>
-        <pc:sldMkLst>
-          <pc:docMk/>
-          <pc:sldMk cId="4111616225" sldId="467"/>
-        </pc:sldMkLst>
-      </pc:sldChg>
-      <pc:sldChg chg="modSp add mod">
-        <pc:chgData name="Matthieu De Mari" userId="dfb708c9-d8dc-439f-9a3b-c772bf4a311c" providerId="ADAL" clId="{CF6A5140-9227-409F-9187-B98CCD837415}" dt="2023-03-09T07:50:34.790" v="8460" actId="12"/>
-        <pc:sldMkLst>
-          <pc:docMk/>
-          <pc:sldMk cId="1345006296" sldId="468"/>
-        </pc:sldMkLst>
-      </pc:sldChg>
-      <pc:sldChg chg="modSp add mod">
-        <pc:chgData name="Matthieu De Mari" userId="dfb708c9-d8dc-439f-9a3b-c772bf4a311c" providerId="ADAL" clId="{CF6A5140-9227-409F-9187-B98CCD837415}" dt="2023-03-14T09:24:16.962" v="10777" actId="20577"/>
-        <pc:sldMkLst>
-          <pc:docMk/>
-          <pc:sldMk cId="1003937956" sldId="469"/>
-        </pc:sldMkLst>
-      </pc:sldChg>
-      <pc:sldChg chg="modSp add mod">
-        <pc:chgData name="Matthieu De Mari" userId="dfb708c9-d8dc-439f-9a3b-c772bf4a311c" providerId="ADAL" clId="{CF6A5140-9227-409F-9187-B98CCD837415}" dt="2023-03-09T07:59:32.806" v="9051" actId="20577"/>
-        <pc:sldMkLst>
-          <pc:docMk/>
-          <pc:sldMk cId="1494991067" sldId="470"/>
-        </pc:sldMkLst>
-      </pc:sldChg>
-      <pc:sldChg chg="delSp modSp add mod modClrScheme chgLayout">
-        <pc:chgData name="Matthieu De Mari" userId="dfb708c9-d8dc-439f-9a3b-c772bf4a311c" providerId="ADAL" clId="{CF6A5140-9227-409F-9187-B98CCD837415}" dt="2023-03-09T08:07:31.497" v="10354" actId="20577"/>
-        <pc:sldMkLst>
-          <pc:docMk/>
-          <pc:sldMk cId="3221576718" sldId="471"/>
-        </pc:sldMkLst>
-      </pc:sldChg>
-      <pc:sldChg chg="modSp add mod">
-        <pc:chgData name="Matthieu De Mari" userId="dfb708c9-d8dc-439f-9a3b-c772bf4a311c" providerId="ADAL" clId="{CF6A5140-9227-409F-9187-B98CCD837415}" dt="2023-03-15T07:15:42.443" v="11209" actId="20577"/>
-        <pc:sldMkLst>
-          <pc:docMk/>
-          <pc:sldMk cId="2469439250" sldId="472"/>
-        </pc:sldMkLst>
-      </pc:sldChg>
-      <pc:sldChg chg="modSp add del mod">
-        <pc:chgData name="Matthieu De Mari" userId="dfb708c9-d8dc-439f-9a3b-c772bf4a311c" providerId="ADAL" clId="{CF6A5140-9227-409F-9187-B98CCD837415}" dt="2023-03-09T08:07:37.150" v="10355" actId="47"/>
-        <pc:sldMkLst>
-          <pc:docMk/>
-          <pc:sldMk cId="2634163908" sldId="472"/>
-        </pc:sldMkLst>
-      </pc:sldChg>
-      <pc:sldChg chg="delSp modSp add mod">
-        <pc:chgData name="Matthieu De Mari" userId="dfb708c9-d8dc-439f-9a3b-c772bf4a311c" providerId="ADAL" clId="{CF6A5140-9227-409F-9187-B98CCD837415}" dt="2023-03-15T07:04:13.450" v="11006" actId="113"/>
-        <pc:sldMkLst>
-          <pc:docMk/>
-          <pc:sldMk cId="2053185467" sldId="473"/>
-        </pc:sldMkLst>
-      </pc:sldChg>
-      <pc:sldChg chg="modSp new mod">
-        <pc:chgData name="Matthieu De Mari" userId="dfb708c9-d8dc-439f-9a3b-c772bf4a311c" providerId="ADAL" clId="{CF6A5140-9227-409F-9187-B98CCD837415}" dt="2023-03-15T07:14:37.756" v="11159" actId="20577"/>
-        <pc:sldMkLst>
-          <pc:docMk/>
-          <pc:sldMk cId="197640958" sldId="474"/>
-        </pc:sldMkLst>
-      </pc:sldChg>
-      <pc:sldChg chg="modSp new mod ord">
-        <pc:chgData name="Matthieu De Mari" userId="dfb708c9-d8dc-439f-9a3b-c772bf4a311c" providerId="ADAL" clId="{CF6A5140-9227-409F-9187-B98CCD837415}" dt="2023-03-15T07:15:39.990" v="11207" actId="20577"/>
-        <pc:sldMkLst>
-          <pc:docMk/>
-          <pc:sldMk cId="453310084" sldId="475"/>
-        </pc:sldMkLst>
-      </pc:sldChg>
-    </pc:docChg>
-  </pc:docChgLst>
-  <pc:docChgLst>
-    <pc:chgData name="Matthieu De Mari" userId="dfb708c9-d8dc-439f-9a3b-c772bf4a311c" providerId="ADAL" clId="{5AF9E225-0E3D-4808-B523-40F6E9A1D59D}"/>
-    <pc:docChg chg="undo custSel mod addSld delSld modSld sldOrd modMainMaster addSection modSection">
-      <pc:chgData name="Matthieu De Mari" userId="dfb708c9-d8dc-439f-9a3b-c772bf4a311c" providerId="ADAL" clId="{5AF9E225-0E3D-4808-B523-40F6E9A1D59D}" dt="2023-03-02T09:21:50.474" v="4687" actId="17846"/>
-      <pc:docMkLst>
-        <pc:docMk/>
-      </pc:docMkLst>
-      <pc:sldChg chg="modSp add del mod">
-        <pc:chgData name="Matthieu De Mari" userId="dfb708c9-d8dc-439f-9a3b-c772bf4a311c" providerId="ADAL" clId="{5AF9E225-0E3D-4808-B523-40F6E9A1D59D}" dt="2023-03-02T09:21:44.969" v="4686" actId="47"/>
-        <pc:sldMkLst>
-          <pc:docMk/>
-          <pc:sldMk cId="901767542" sldId="256"/>
-        </pc:sldMkLst>
-      </pc:sldChg>
-      <pc:sldChg chg="addSp delSp modSp add mod chgLayout">
-        <pc:chgData name="Matthieu De Mari" userId="dfb708c9-d8dc-439f-9a3b-c772bf4a311c" providerId="ADAL" clId="{5AF9E225-0E3D-4808-B523-40F6E9A1D59D}" dt="2023-03-02T07:05:19.188" v="526" actId="20577"/>
-        <pc:sldMkLst>
-          <pc:docMk/>
-          <pc:sldMk cId="3239548726" sldId="257"/>
-        </pc:sldMkLst>
-      </pc:sldChg>
-      <pc:sldChg chg="modSp add mod">
-        <pc:chgData name="Matthieu De Mari" userId="dfb708c9-d8dc-439f-9a3b-c772bf4a311c" providerId="ADAL" clId="{5AF9E225-0E3D-4808-B523-40F6E9A1D59D}" dt="2023-03-02T07:01:55.363" v="524" actId="20577"/>
-        <pc:sldMkLst>
-          <pc:docMk/>
-          <pc:sldMk cId="1495819743" sldId="258"/>
-        </pc:sldMkLst>
-      </pc:sldChg>
-      <pc:sldChg chg="addSp modSp add mod modClrScheme chgLayout">
-        <pc:chgData name="Matthieu De Mari" userId="dfb708c9-d8dc-439f-9a3b-c772bf4a311c" providerId="ADAL" clId="{5AF9E225-0E3D-4808-B523-40F6E9A1D59D}" dt="2023-03-02T07:07:22.195" v="628" actId="20577"/>
-        <pc:sldMkLst>
-          <pc:docMk/>
-          <pc:sldMk cId="609186567" sldId="259"/>
-        </pc:sldMkLst>
-      </pc:sldChg>
-      <pc:sldChg chg="modSp add mod">
-        <pc:chgData name="Matthieu De Mari" userId="dfb708c9-d8dc-439f-9a3b-c772bf4a311c" providerId="ADAL" clId="{5AF9E225-0E3D-4808-B523-40F6E9A1D59D}" dt="2023-03-02T07:05:58.205" v="582" actId="20577"/>
-        <pc:sldMkLst>
-          <pc:docMk/>
-          <pc:sldMk cId="1812694891" sldId="260"/>
-        </pc:sldMkLst>
-      </pc:sldChg>
-      <pc:sldChg chg="modSp add mod">
-        <pc:chgData name="Matthieu De Mari" userId="dfb708c9-d8dc-439f-9a3b-c772bf4a311c" providerId="ADAL" clId="{5AF9E225-0E3D-4808-B523-40F6E9A1D59D}" dt="2023-03-02T07:08:41.284" v="667" actId="20577"/>
-        <pc:sldMkLst>
-          <pc:docMk/>
-          <pc:sldMk cId="2172647381" sldId="261"/>
-        </pc:sldMkLst>
-      </pc:sldChg>
-      <pc:sldChg chg="modSp add mod">
-        <pc:chgData name="Matthieu De Mari" userId="dfb708c9-d8dc-439f-9a3b-c772bf4a311c" providerId="ADAL" clId="{5AF9E225-0E3D-4808-B523-40F6E9A1D59D}" dt="2023-03-02T07:09:13.009" v="690" actId="20577"/>
-        <pc:sldMkLst>
-          <pc:docMk/>
-          <pc:sldMk cId="3166947328" sldId="262"/>
-        </pc:sldMkLst>
-      </pc:sldChg>
-      <pc:sldChg chg="modSp add mod">
-        <pc:chgData name="Matthieu De Mari" userId="dfb708c9-d8dc-439f-9a3b-c772bf4a311c" providerId="ADAL" clId="{5AF9E225-0E3D-4808-B523-40F6E9A1D59D}" dt="2023-03-02T07:09:44.442" v="694" actId="20577"/>
-        <pc:sldMkLst>
-          <pc:docMk/>
-          <pc:sldMk cId="2723458640" sldId="263"/>
-        </pc:sldMkLst>
-      </pc:sldChg>
-      <pc:sldChg chg="add">
-        <pc:chgData name="Matthieu De Mari" userId="dfb708c9-d8dc-439f-9a3b-c772bf4a311c" providerId="ADAL" clId="{5AF9E225-0E3D-4808-B523-40F6E9A1D59D}" dt="2023-03-02T06:54:29.623" v="2"/>
-        <pc:sldMkLst>
-          <pc:docMk/>
-          <pc:sldMk cId="649892368" sldId="264"/>
-        </pc:sldMkLst>
-      </pc:sldChg>
-      <pc:sldChg chg="add">
-        <pc:chgData name="Matthieu De Mari" userId="dfb708c9-d8dc-439f-9a3b-c772bf4a311c" providerId="ADAL" clId="{5AF9E225-0E3D-4808-B523-40F6E9A1D59D}" dt="2023-03-02T06:54:29.623" v="2"/>
-        <pc:sldMkLst>
-          <pc:docMk/>
-          <pc:sldMk cId="4127898596" sldId="265"/>
-        </pc:sldMkLst>
-      </pc:sldChg>
-      <pc:sldChg chg="addSp delSp modSp add mod modClrScheme chgLayout">
-        <pc:chgData name="Matthieu De Mari" userId="dfb708c9-d8dc-439f-9a3b-c772bf4a311c" providerId="ADAL" clId="{5AF9E225-0E3D-4808-B523-40F6E9A1D59D}" dt="2023-03-02T08:47:11.979" v="3217" actId="20577"/>
-        <pc:sldMkLst>
-          <pc:docMk/>
-          <pc:sldMk cId="256269341" sldId="266"/>
-        </pc:sldMkLst>
-      </pc:sldChg>
-      <pc:sldChg chg="modSp add mod">
-        <pc:chgData name="Matthieu De Mari" userId="dfb708c9-d8dc-439f-9a3b-c772bf4a311c" providerId="ADAL" clId="{5AF9E225-0E3D-4808-B523-40F6E9A1D59D}" dt="2023-03-02T07:01:21.208" v="484" actId="115"/>
-        <pc:sldMkLst>
-          <pc:docMk/>
-          <pc:sldMk cId="2566504203" sldId="267"/>
-        </pc:sldMkLst>
-      </pc:sldChg>
-      <pc:sldChg chg="addSp delSp modSp add mod chgLayout">
-        <pc:chgData name="Matthieu De Mari" userId="dfb708c9-d8dc-439f-9a3b-c772bf4a311c" providerId="ADAL" clId="{5AF9E225-0E3D-4808-B523-40F6E9A1D59D}" dt="2023-03-02T07:00:12.794" v="471" actId="115"/>
-        <pc:sldMkLst>
-          <pc:docMk/>
-          <pc:sldMk cId="1205920737" sldId="268"/>
-        </pc:sldMkLst>
-      </pc:sldChg>
-      <pc:sldChg chg="delSp modSp add mod modClrScheme chgLayout">
-        <pc:chgData name="Matthieu De Mari" userId="dfb708c9-d8dc-439f-9a3b-c772bf4a311c" providerId="ADAL" clId="{5AF9E225-0E3D-4808-B523-40F6E9A1D59D}" dt="2023-03-02T07:13:38.493" v="793" actId="114"/>
-        <pc:sldMkLst>
-          <pc:docMk/>
-          <pc:sldMk cId="4188287311" sldId="269"/>
-        </pc:sldMkLst>
-      </pc:sldChg>
-      <pc:sldChg chg="modSp add mod">
-        <pc:chgData name="Matthieu De Mari" userId="dfb708c9-d8dc-439f-9a3b-c772bf4a311c" providerId="ADAL" clId="{5AF9E225-0E3D-4808-B523-40F6E9A1D59D}" dt="2023-03-02T07:25:33.827" v="1288" actId="1076"/>
-        <pc:sldMkLst>
-          <pc:docMk/>
-          <pc:sldMk cId="997896339" sldId="270"/>
-        </pc:sldMkLst>
-      </pc:sldChg>
-      <pc:sldChg chg="modSp add mod">
-        <pc:chgData name="Matthieu De Mari" userId="dfb708c9-d8dc-439f-9a3b-c772bf4a311c" providerId="ADAL" clId="{5AF9E225-0E3D-4808-B523-40F6E9A1D59D}" dt="2023-03-02T07:23:39.008" v="1244" actId="113"/>
-        <pc:sldMkLst>
-          <pc:docMk/>
-          <pc:sldMk cId="961845771" sldId="271"/>
-        </pc:sldMkLst>
-      </pc:sldChg>
-      <pc:sldChg chg="addSp delSp modSp new mod ord modClrScheme chgLayout">
-        <pc:chgData name="Matthieu De Mari" userId="dfb708c9-d8dc-439f-9a3b-c772bf4a311c" providerId="ADAL" clId="{5AF9E225-0E3D-4808-B523-40F6E9A1D59D}" dt="2023-03-02T07:31:21.011" v="1491" actId="20577"/>
-        <pc:sldMkLst>
-          <pc:docMk/>
-          <pc:sldMk cId="1628130454" sldId="272"/>
-        </pc:sldMkLst>
-      </pc:sldChg>
-      <pc:sldChg chg="addSp delSp modSp add mod modClrScheme chgLayout">
-        <pc:chgData name="Matthieu De Mari" userId="dfb708c9-d8dc-439f-9a3b-c772bf4a311c" providerId="ADAL" clId="{5AF9E225-0E3D-4808-B523-40F6E9A1D59D}" dt="2023-03-02T07:30:59.874" v="1470" actId="1076"/>
-        <pc:sldMkLst>
-          <pc:docMk/>
-          <pc:sldMk cId="3014069118" sldId="273"/>
-        </pc:sldMkLst>
-      </pc:sldChg>
-      <pc:sldChg chg="addSp delSp modSp new mod modClrScheme chgLayout">
-        <pc:chgData name="Matthieu De Mari" userId="dfb708c9-d8dc-439f-9a3b-c772bf4a311c" providerId="ADAL" clId="{5AF9E225-0E3D-4808-B523-40F6E9A1D59D}" dt="2023-03-02T09:06:53.193" v="4236" actId="20577"/>
-        <pc:sldMkLst>
-          <pc:docMk/>
-          <pc:sldMk cId="1813455260" sldId="274"/>
-        </pc:sldMkLst>
-      </pc:sldChg>
-      <pc:sldChg chg="addSp modSp add mod modClrScheme chgLayout">
-        <pc:chgData name="Matthieu De Mari" userId="dfb708c9-d8dc-439f-9a3b-c772bf4a311c" providerId="ADAL" clId="{5AF9E225-0E3D-4808-B523-40F6E9A1D59D}" dt="2023-03-02T08:43:42.183" v="3020" actId="13822"/>
-        <pc:sldMkLst>
-          <pc:docMk/>
-          <pc:sldMk cId="144954399" sldId="275"/>
-        </pc:sldMkLst>
-      </pc:sldChg>
-      <pc:sldChg chg="modSp add mod modClrScheme chgLayout">
-        <pc:chgData name="Matthieu De Mari" userId="dfb708c9-d8dc-439f-9a3b-c772bf4a311c" providerId="ADAL" clId="{5AF9E225-0E3D-4808-B523-40F6E9A1D59D}" dt="2023-03-02T08:31:32.489" v="2596" actId="20577"/>
-        <pc:sldMkLst>
-          <pc:docMk/>
-          <pc:sldMk cId="4217769597" sldId="276"/>
-        </pc:sldMkLst>
-      </pc:sldChg>
-      <pc:sldChg chg="modSp add mod modClrScheme chgLayout">
-        <pc:chgData name="Matthieu De Mari" userId="dfb708c9-d8dc-439f-9a3b-c772bf4a311c" providerId="ADAL" clId="{5AF9E225-0E3D-4808-B523-40F6E9A1D59D}" dt="2023-03-02T09:05:04.931" v="4179" actId="207"/>
-        <pc:sldMkLst>
-          <pc:docMk/>
-          <pc:sldMk cId="1233188664" sldId="277"/>
-        </pc:sldMkLst>
-      </pc:sldChg>
-      <pc:sldChg chg="addSp modSp add mod chgLayout">
-        <pc:chgData name="Matthieu De Mari" userId="dfb708c9-d8dc-439f-9a3b-c772bf4a311c" providerId="ADAL" clId="{5AF9E225-0E3D-4808-B523-40F6E9A1D59D}" dt="2023-03-02T07:40:29.138" v="1964" actId="20577"/>
-        <pc:sldMkLst>
-          <pc:docMk/>
-          <pc:sldMk cId="885607022" sldId="278"/>
-        </pc:sldMkLst>
-      </pc:sldChg>
-      <pc:sldChg chg="modSp add mod">
-        <pc:chgData name="Matthieu De Mari" userId="dfb708c9-d8dc-439f-9a3b-c772bf4a311c" providerId="ADAL" clId="{5AF9E225-0E3D-4808-B523-40F6E9A1D59D}" dt="2023-03-02T07:41:39.244" v="2020" actId="27636"/>
-        <pc:sldMkLst>
-          <pc:docMk/>
-          <pc:sldMk cId="3941141626" sldId="279"/>
-        </pc:sldMkLst>
-      </pc:sldChg>
-      <pc:sldChg chg="modSp add mod">
-        <pc:chgData name="Matthieu De Mari" userId="dfb708c9-d8dc-439f-9a3b-c772bf4a311c" providerId="ADAL" clId="{5AF9E225-0E3D-4808-B523-40F6E9A1D59D}" dt="2023-03-02T07:42:09.869" v="2043" actId="14100"/>
-        <pc:sldMkLst>
-          <pc:docMk/>
-          <pc:sldMk cId="2409304258" sldId="280"/>
-        </pc:sldMkLst>
-      </pc:sldChg>
-      <pc:sldChg chg="modSp add mod">
-        <pc:chgData name="Matthieu De Mari" userId="dfb708c9-d8dc-439f-9a3b-c772bf4a311c" providerId="ADAL" clId="{5AF9E225-0E3D-4808-B523-40F6E9A1D59D}" dt="2023-03-02T07:43:05.203" v="2098" actId="27636"/>
-        <pc:sldMkLst>
-          <pc:docMk/>
-          <pc:sldMk cId="2949375831" sldId="281"/>
-        </pc:sldMkLst>
-      </pc:sldChg>
-      <pc:sldChg chg="addSp delSp modSp add mod modClrScheme chgLayout">
-        <pc:chgData name="Matthieu De Mari" userId="dfb708c9-d8dc-439f-9a3b-c772bf4a311c" providerId="ADAL" clId="{5AF9E225-0E3D-4808-B523-40F6E9A1D59D}" dt="2023-03-02T08:43:47.428" v="3024"/>
-        <pc:sldMkLst>
-          <pc:docMk/>
-          <pc:sldMk cId="2432782764" sldId="282"/>
-        </pc:sldMkLst>
-      </pc:sldChg>
-      <pc:sldChg chg="modSp add del mod modClrScheme chgLayout">
-        <pc:chgData name="Matthieu De Mari" userId="dfb708c9-d8dc-439f-9a3b-c772bf4a311c" providerId="ADAL" clId="{5AF9E225-0E3D-4808-B523-40F6E9A1D59D}" dt="2023-03-02T07:50:30.713" v="2314" actId="47"/>
-        <pc:sldMkLst>
-          <pc:docMk/>
-          <pc:sldMk cId="3346743662" sldId="283"/>
-        </pc:sldMkLst>
-      </pc:sldChg>
-      <pc:sldChg chg="modSp add mod">
-        <pc:chgData name="Matthieu De Mari" userId="dfb708c9-d8dc-439f-9a3b-c772bf4a311c" providerId="ADAL" clId="{5AF9E225-0E3D-4808-B523-40F6E9A1D59D}" dt="2023-03-02T08:49:01.268" v="3268" actId="20577"/>
-        <pc:sldMkLst>
-          <pc:docMk/>
-          <pc:sldMk cId="3869391851" sldId="284"/>
-        </pc:sldMkLst>
-      </pc:sldChg>
-      <pc:sldChg chg="modSp add mod ord">
-        <pc:chgData name="Matthieu De Mari" userId="dfb708c9-d8dc-439f-9a3b-c772bf4a311c" providerId="ADAL" clId="{5AF9E225-0E3D-4808-B523-40F6E9A1D59D}" dt="2023-03-02T08:47:17.468" v="3221" actId="20577"/>
-        <pc:sldMkLst>
-          <pc:docMk/>
-          <pc:sldMk cId="1567445271" sldId="285"/>
-        </pc:sldMkLst>
-      </pc:sldChg>
-      <pc:sldChg chg="new del">
-        <pc:chgData name="Matthieu De Mari" userId="dfb708c9-d8dc-439f-9a3b-c772bf4a311c" providerId="ADAL" clId="{5AF9E225-0E3D-4808-B523-40F6E9A1D59D}" dt="2023-03-02T09:20:57.277" v="4650" actId="47"/>
-        <pc:sldMkLst>
-          <pc:docMk/>
-          <pc:sldMk cId="1786940851" sldId="286"/>
-        </pc:sldMkLst>
-      </pc:sldChg>
-      <pc:sldChg chg="addSp delSp modSp add del mod">
-        <pc:chgData name="Matthieu De Mari" userId="dfb708c9-d8dc-439f-9a3b-c772bf4a311c" providerId="ADAL" clId="{5AF9E225-0E3D-4808-B523-40F6E9A1D59D}" dt="2023-03-02T07:52:04.495" v="2352" actId="47"/>
-        <pc:sldMkLst>
-          <pc:docMk/>
-          <pc:sldMk cId="2521085326" sldId="286"/>
-        </pc:sldMkLst>
-      </pc:sldChg>
-      <pc:sldChg chg="add">
-        <pc:chgData name="Matthieu De Mari" userId="dfb708c9-d8dc-439f-9a3b-c772bf4a311c" providerId="ADAL" clId="{5AF9E225-0E3D-4808-B523-40F6E9A1D59D}" dt="2023-03-02T08:31:29.223" v="2595" actId="2890"/>
-        <pc:sldMkLst>
-          <pc:docMk/>
-          <pc:sldMk cId="2870852187" sldId="287"/>
-        </pc:sldMkLst>
-      </pc:sldChg>
-      <pc:sldChg chg="addSp delSp modSp new mod modClrScheme chgLayout">
-        <pc:chgData name="Matthieu De Mari" userId="dfb708c9-d8dc-439f-9a3b-c772bf4a311c" providerId="ADAL" clId="{5AF9E225-0E3D-4808-B523-40F6E9A1D59D}" dt="2023-03-02T08:35:16.091" v="2758" actId="20577"/>
-        <pc:sldMkLst>
-          <pc:docMk/>
-          <pc:sldMk cId="3486387661" sldId="288"/>
-        </pc:sldMkLst>
-      </pc:sldChg>
-      <pc:sldChg chg="addSp delSp modSp add mod">
-        <pc:chgData name="Matthieu De Mari" userId="dfb708c9-d8dc-439f-9a3b-c772bf4a311c" providerId="ADAL" clId="{5AF9E225-0E3D-4808-B523-40F6E9A1D59D}" dt="2023-03-02T08:38:16.072" v="2894" actId="113"/>
-        <pc:sldMkLst>
-          <pc:docMk/>
-          <pc:sldMk cId="2118681498" sldId="289"/>
-        </pc:sldMkLst>
-      </pc:sldChg>
-      <pc:sldChg chg="addSp delSp modSp new mod modClrScheme chgLayout">
-        <pc:chgData name="Matthieu De Mari" userId="dfb708c9-d8dc-439f-9a3b-c772bf4a311c" providerId="ADAL" clId="{5AF9E225-0E3D-4808-B523-40F6E9A1D59D}" dt="2023-03-02T08:44:18.884" v="3062" actId="1036"/>
-        <pc:sldMkLst>
-          <pc:docMk/>
-          <pc:sldMk cId="2562857934" sldId="290"/>
-        </pc:sldMkLst>
-      </pc:sldChg>
-      <pc:sldChg chg="delSp modSp add mod">
-        <pc:chgData name="Matthieu De Mari" userId="dfb708c9-d8dc-439f-9a3b-c772bf4a311c" providerId="ADAL" clId="{5AF9E225-0E3D-4808-B523-40F6E9A1D59D}" dt="2023-03-02T08:47:27.886" v="3225" actId="20577"/>
-        <pc:sldMkLst>
-          <pc:docMk/>
-          <pc:sldMk cId="3292482358" sldId="291"/>
-        </pc:sldMkLst>
-      </pc:sldChg>
-      <pc:sldChg chg="addSp delSp modSp add mod">
-        <pc:chgData name="Matthieu De Mari" userId="dfb708c9-d8dc-439f-9a3b-c772bf4a311c" providerId="ADAL" clId="{5AF9E225-0E3D-4808-B523-40F6E9A1D59D}" dt="2023-03-02T08:44:21.897" v="3064"/>
-        <pc:sldMkLst>
-          <pc:docMk/>
-          <pc:sldMk cId="3520355124" sldId="292"/>
-        </pc:sldMkLst>
-      </pc:sldChg>
-      <pc:sldChg chg="modSp new mod">
-        <pc:chgData name="Matthieu De Mari" userId="dfb708c9-d8dc-439f-9a3b-c772bf4a311c" providerId="ADAL" clId="{5AF9E225-0E3D-4808-B523-40F6E9A1D59D}" dt="2023-03-02T08:47:53.024" v="3226" actId="114"/>
-        <pc:sldMkLst>
-          <pc:docMk/>
-          <pc:sldMk cId="3046349634" sldId="293"/>
-        </pc:sldMkLst>
-      </pc:sldChg>
-      <pc:sldChg chg="modSp add mod">
-        <pc:chgData name="Matthieu De Mari" userId="dfb708c9-d8dc-439f-9a3b-c772bf4a311c" providerId="ADAL" clId="{5AF9E225-0E3D-4808-B523-40F6E9A1D59D}" dt="2023-03-02T09:04:46.904" v="4174" actId="27636"/>
-        <pc:sldMkLst>
-          <pc:docMk/>
-          <pc:sldMk cId="427136966" sldId="294"/>
-        </pc:sldMkLst>
-      </pc:sldChg>
-      <pc:sldChg chg="addSp delSp modSp new mod modClrScheme chgLayout">
-        <pc:chgData name="Matthieu De Mari" userId="dfb708c9-d8dc-439f-9a3b-c772bf4a311c" providerId="ADAL" clId="{5AF9E225-0E3D-4808-B523-40F6E9A1D59D}" dt="2023-03-02T09:05:33.864" v="4216" actId="20577"/>
-        <pc:sldMkLst>
-          <pc:docMk/>
-          <pc:sldMk cId="323951598" sldId="295"/>
-        </pc:sldMkLst>
-      </pc:sldChg>
-      <pc:sldChg chg="addSp delSp modSp new mod modClrScheme chgLayout">
-        <pc:chgData name="Matthieu De Mari" userId="dfb708c9-d8dc-439f-9a3b-c772bf4a311c" providerId="ADAL" clId="{5AF9E225-0E3D-4808-B523-40F6E9A1D59D}" dt="2023-03-02T09:06:28.328" v="4228" actId="20577"/>
-        <pc:sldMkLst>
-          <pc:docMk/>
-          <pc:sldMk cId="1855779909" sldId="296"/>
-        </pc:sldMkLst>
-      </pc:sldChg>
-      <pc:sldChg chg="modSp add mod">
-        <pc:chgData name="Matthieu De Mari" userId="dfb708c9-d8dc-439f-9a3b-c772bf4a311c" providerId="ADAL" clId="{5AF9E225-0E3D-4808-B523-40F6E9A1D59D}" dt="2023-03-02T08:56:04.515" v="3607" actId="20577"/>
-        <pc:sldMkLst>
-          <pc:docMk/>
-          <pc:sldMk cId="1514077654" sldId="297"/>
-        </pc:sldMkLst>
-      </pc:sldChg>
-      <pc:sldChg chg="modSp new mod">
-        <pc:chgData name="Matthieu De Mari" userId="dfb708c9-d8dc-439f-9a3b-c772bf4a311c" providerId="ADAL" clId="{5AF9E225-0E3D-4808-B523-40F6E9A1D59D}" dt="2023-03-02T08:56:36.889" v="3652" actId="14100"/>
-        <pc:sldMkLst>
-          <pc:docMk/>
-          <pc:sldMk cId="2514894683" sldId="298"/>
-        </pc:sldMkLst>
-      </pc:sldChg>
-      <pc:sldChg chg="addSp delSp modSp new mod">
-        <pc:chgData name="Matthieu De Mari" userId="dfb708c9-d8dc-439f-9a3b-c772bf4a311c" providerId="ADAL" clId="{5AF9E225-0E3D-4808-B523-40F6E9A1D59D}" dt="2023-03-02T08:59:30.392" v="3889" actId="21"/>
-        <pc:sldMkLst>
-          <pc:docMk/>
-          <pc:sldMk cId="1452574487" sldId="299"/>
-        </pc:sldMkLst>
-      </pc:sldChg>
-      <pc:sldChg chg="addSp delSp modSp add mod modClrScheme chgLayout">
-        <pc:chgData name="Matthieu De Mari" userId="dfb708c9-d8dc-439f-9a3b-c772bf4a311c" providerId="ADAL" clId="{5AF9E225-0E3D-4808-B523-40F6E9A1D59D}" dt="2023-03-02T09:03:33.636" v="4087" actId="20577"/>
-        <pc:sldMkLst>
-          <pc:docMk/>
-          <pc:sldMk cId="1699114457" sldId="300"/>
-        </pc:sldMkLst>
-      </pc:sldChg>
-      <pc:sldChg chg="addSp delSp modSp add mod modClrScheme chgLayout">
-        <pc:chgData name="Matthieu De Mari" userId="dfb708c9-d8dc-439f-9a3b-c772bf4a311c" providerId="ADAL" clId="{5AF9E225-0E3D-4808-B523-40F6E9A1D59D}" dt="2023-03-02T09:03:43.897" v="4104" actId="20577"/>
-        <pc:sldMkLst>
-          <pc:docMk/>
-          <pc:sldMk cId="1276239023" sldId="301"/>
-        </pc:sldMkLst>
-      </pc:sldChg>
-      <pc:sldChg chg="addSp delSp modSp add mod modClrScheme chgLayout">
-        <pc:chgData name="Matthieu De Mari" userId="dfb708c9-d8dc-439f-9a3b-c772bf4a311c" providerId="ADAL" clId="{5AF9E225-0E3D-4808-B523-40F6E9A1D59D}" dt="2023-03-02T09:04:08.494" v="4134" actId="20577"/>
-        <pc:sldMkLst>
-          <pc:docMk/>
-          <pc:sldMk cId="3968924669" sldId="302"/>
-        </pc:sldMkLst>
-      </pc:sldChg>
-      <pc:sldChg chg="modSp new mod">
-        <pc:chgData name="Matthieu De Mari" userId="dfb708c9-d8dc-439f-9a3b-c772bf4a311c" providerId="ADAL" clId="{5AF9E225-0E3D-4808-B523-40F6E9A1D59D}" dt="2023-03-02T09:09:23.148" v="4269" actId="113"/>
-        <pc:sldMkLst>
-          <pc:docMk/>
-          <pc:sldMk cId="4232115997" sldId="303"/>
-        </pc:sldMkLst>
-      </pc:sldChg>
-      <pc:sldChg chg="modSp add mod">
-        <pc:chgData name="Matthieu De Mari" userId="dfb708c9-d8dc-439f-9a3b-c772bf4a311c" providerId="ADAL" clId="{5AF9E225-0E3D-4808-B523-40F6E9A1D59D}" dt="2023-03-02T09:06:47.611" v="4234" actId="20577"/>
-        <pc:sldMkLst>
-          <pc:docMk/>
-          <pc:sldMk cId="354883896" sldId="304"/>
-        </pc:sldMkLst>
-      </pc:sldChg>
-      <pc:sldChg chg="modSp add mod">
-        <pc:chgData name="Matthieu De Mari" userId="dfb708c9-d8dc-439f-9a3b-c772bf4a311c" providerId="ADAL" clId="{5AF9E225-0E3D-4808-B523-40F6E9A1D59D}" dt="2023-03-02T09:10:35.361" v="4304" actId="27636"/>
-        <pc:sldMkLst>
-          <pc:docMk/>
-          <pc:sldMk cId="4099824996" sldId="305"/>
-        </pc:sldMkLst>
-      </pc:sldChg>
-      <pc:sldChg chg="modSp add mod">
-        <pc:chgData name="Matthieu De Mari" userId="dfb708c9-d8dc-439f-9a3b-c772bf4a311c" providerId="ADAL" clId="{5AF9E225-0E3D-4808-B523-40F6E9A1D59D}" dt="2023-03-02T09:09:27.720" v="4270" actId="207"/>
-        <pc:sldMkLst>
-          <pc:docMk/>
-          <pc:sldMk cId="4051912021" sldId="306"/>
-        </pc:sldMkLst>
-      </pc:sldChg>
-      <pc:sldChg chg="modSp add mod">
-        <pc:chgData name="Matthieu De Mari" userId="dfb708c9-d8dc-439f-9a3b-c772bf4a311c" providerId="ADAL" clId="{5AF9E225-0E3D-4808-B523-40F6E9A1D59D}" dt="2023-03-02T09:11:43.126" v="4415" actId="20577"/>
-        <pc:sldMkLst>
-          <pc:docMk/>
-          <pc:sldMk cId="2900176786" sldId="307"/>
-        </pc:sldMkLst>
-      </pc:sldChg>
-      <pc:sldChg chg="modSp add mod">
-        <pc:chgData name="Matthieu De Mari" userId="dfb708c9-d8dc-439f-9a3b-c772bf4a311c" providerId="ADAL" clId="{5AF9E225-0E3D-4808-B523-40F6E9A1D59D}" dt="2023-03-02T09:10:43.209" v="4307" actId="207"/>
-        <pc:sldMkLst>
-          <pc:docMk/>
-          <pc:sldMk cId="1601297533" sldId="308"/>
-        </pc:sldMkLst>
-      </pc:sldChg>
-      <pc:sldChg chg="modSp add mod ord">
-        <pc:chgData name="Matthieu De Mari" userId="dfb708c9-d8dc-439f-9a3b-c772bf4a311c" providerId="ADAL" clId="{5AF9E225-0E3D-4808-B523-40F6E9A1D59D}" dt="2023-03-02T09:20:16.513" v="4645"/>
-        <pc:sldMkLst>
-          <pc:docMk/>
-          <pc:sldMk cId="3331075550" sldId="309"/>
-        </pc:sldMkLst>
-      </pc:sldChg>
-      <pc:sldChg chg="modSp add mod">
-        <pc:chgData name="Matthieu De Mari" userId="dfb708c9-d8dc-439f-9a3b-c772bf4a311c" providerId="ADAL" clId="{5AF9E225-0E3D-4808-B523-40F6E9A1D59D}" dt="2023-03-02T09:13:28.270" v="4475" actId="20577"/>
-        <pc:sldMkLst>
-          <pc:docMk/>
-          <pc:sldMk cId="4251184714" sldId="310"/>
-        </pc:sldMkLst>
-      </pc:sldChg>
-      <pc:sldChg chg="modSp add mod ord">
-        <pc:chgData name="Matthieu De Mari" userId="dfb708c9-d8dc-439f-9a3b-c772bf4a311c" providerId="ADAL" clId="{5AF9E225-0E3D-4808-B523-40F6E9A1D59D}" dt="2023-03-02T09:20:16.513" v="4645"/>
-        <pc:sldMkLst>
-          <pc:docMk/>
-          <pc:sldMk cId="3629183510" sldId="311"/>
-        </pc:sldMkLst>
-      </pc:sldChg>
-      <pc:sldChg chg="modSp add mod">
-        <pc:chgData name="Matthieu De Mari" userId="dfb708c9-d8dc-439f-9a3b-c772bf4a311c" providerId="ADAL" clId="{5AF9E225-0E3D-4808-B523-40F6E9A1D59D}" dt="2023-03-02T09:14:09.472" v="4486" actId="207"/>
-        <pc:sldMkLst>
-          <pc:docMk/>
-          <pc:sldMk cId="7996884" sldId="312"/>
-        </pc:sldMkLst>
-      </pc:sldChg>
-      <pc:sldChg chg="add">
-        <pc:chgData name="Matthieu De Mari" userId="dfb708c9-d8dc-439f-9a3b-c772bf4a311c" providerId="ADAL" clId="{5AF9E225-0E3D-4808-B523-40F6E9A1D59D}" dt="2023-03-02T09:14:04.028" v="4484" actId="2890"/>
-        <pc:sldMkLst>
-          <pc:docMk/>
-          <pc:sldMk cId="1140638742" sldId="313"/>
-        </pc:sldMkLst>
-      </pc:sldChg>
-      <pc:sldChg chg="modSp new mod">
-        <pc:chgData name="Matthieu De Mari" userId="dfb708c9-d8dc-439f-9a3b-c772bf4a311c" providerId="ADAL" clId="{5AF9E225-0E3D-4808-B523-40F6E9A1D59D}" dt="2023-03-02T09:19:43.572" v="4643" actId="20577"/>
-        <pc:sldMkLst>
-          <pc:docMk/>
-          <pc:sldMk cId="2858358615" sldId="314"/>
-        </pc:sldMkLst>
-      </pc:sldChg>
-      <pc:sldChg chg="modSp add mod ord">
-        <pc:chgData name="Matthieu De Mari" userId="dfb708c9-d8dc-439f-9a3b-c772bf4a311c" providerId="ADAL" clId="{5AF9E225-0E3D-4808-B523-40F6E9A1D59D}" dt="2023-03-02T09:21:38.413" v="4685" actId="20577"/>
-        <pc:sldMkLst>
-          <pc:docMk/>
-          <pc:sldMk cId="1040156172" sldId="377"/>
-        </pc:sldMkLst>
-      </pc:sldChg>
-      <pc:sldChg chg="add ord">
-        <pc:chgData name="Matthieu De Mari" userId="dfb708c9-d8dc-439f-9a3b-c772bf4a311c" providerId="ADAL" clId="{5AF9E225-0E3D-4808-B523-40F6E9A1D59D}" dt="2023-03-02T09:20:56.065" v="4649" actId="20578"/>
-        <pc:sldMkLst>
-          <pc:docMk/>
-          <pc:sldMk cId="3338565690" sldId="378"/>
-        </pc:sldMkLst>
-      </pc:sldChg>
-      <pc:sldMasterChg chg="addSp mod">
-        <pc:chgData name="Matthieu De Mari" userId="dfb708c9-d8dc-439f-9a3b-c772bf4a311c" providerId="ADAL" clId="{5AF9E225-0E3D-4808-B523-40F6E9A1D59D}" dt="2023-03-02T06:54:28.184" v="0" actId="33475"/>
-        <pc:sldMasterMkLst>
-          <pc:docMk/>
-          <pc:sldMasterMk cId="1162895350" sldId="2147483648"/>
-        </pc:sldMasterMkLst>
-      </pc:sldMasterChg>
-    </pc:docChg>
-  </pc:docChgLst>
-  <pc:docChgLst>
-    <pc:chgData name="Matthieu De Mari" userId="dfb708c9-d8dc-439f-9a3b-c772bf4a311c" providerId="ADAL" clId="{970E96D1-FF5F-4C4C-82CE-7498097B3DF7}"/>
-    <pc:docChg chg="modSld">
-      <pc:chgData name="Matthieu De Mari" userId="dfb708c9-d8dc-439f-9a3b-c772bf4a311c" providerId="ADAL" clId="{970E96D1-FF5F-4C4C-82CE-7498097B3DF7}" dt="2024-12-07T17:54:28.694" v="1" actId="20577"/>
-      <pc:docMkLst>
-        <pc:docMk/>
-      </pc:docMkLst>
-      <pc:sldChg chg="modSp mod">
-        <pc:chgData name="Matthieu De Mari" userId="dfb708c9-d8dc-439f-9a3b-c772bf4a311c" providerId="ADAL" clId="{970E96D1-FF5F-4C4C-82CE-7498097B3DF7}" dt="2024-12-07T17:54:28.694" v="1" actId="20577"/>
-        <pc:sldMkLst>
-          <pc:docMk/>
-          <pc:sldMk cId="1040156172" sldId="377"/>
-        </pc:sldMkLst>
-        <pc:spChg chg="mod">
-          <ac:chgData name="Matthieu De Mari" userId="dfb708c9-d8dc-439f-9a3b-c772bf4a311c" providerId="ADAL" clId="{970E96D1-FF5F-4C4C-82CE-7498097B3DF7}" dt="2024-12-07T17:54:28.694" v="1" actId="20577"/>
-          <ac:spMkLst>
-            <pc:docMk/>
-            <pc:sldMk cId="1040156172" sldId="377"/>
-            <ac:spMk id="2" creationId="{080CEB46-CC16-4D19-8C2C-AEE9471D8168}"/>
-          </ac:spMkLst>
-        </pc:spChg>
-      </pc:sldChg>
-    </pc:docChg>
-  </pc:docChgLst>
-  <pc:docChgLst>
-    <pc:chgData name="Matthieu De Mari" userId="dfb708c9-d8dc-439f-9a3b-c772bf4a311c" providerId="ADAL" clId="{2E25C175-47A3-4BC7-8EFD-372D97A42A64}"/>
-    <pc:docChg chg="undo custSel addSld delSld modSld sldOrd addSection delSection modSection">
-      <pc:chgData name="Matthieu De Mari" userId="dfb708c9-d8dc-439f-9a3b-c772bf4a311c" providerId="ADAL" clId="{2E25C175-47A3-4BC7-8EFD-372D97A42A64}" dt="2023-03-07T10:46:51.155" v="7359" actId="20577"/>
-      <pc:docMkLst>
-        <pc:docMk/>
-      </pc:docMkLst>
-      <pc:sldChg chg="del">
-        <pc:chgData name="Matthieu De Mari" userId="dfb708c9-d8dc-439f-9a3b-c772bf4a311c" providerId="ADAL" clId="{2E25C175-47A3-4BC7-8EFD-372D97A42A64}" dt="2023-03-07T06:12:37.449" v="3" actId="47"/>
-        <pc:sldMkLst>
-          <pc:docMk/>
-          <pc:sldMk cId="3239548726" sldId="257"/>
-        </pc:sldMkLst>
-      </pc:sldChg>
-      <pc:sldChg chg="del">
-        <pc:chgData name="Matthieu De Mari" userId="dfb708c9-d8dc-439f-9a3b-c772bf4a311c" providerId="ADAL" clId="{2E25C175-47A3-4BC7-8EFD-372D97A42A64}" dt="2023-03-07T06:13:07.499" v="6" actId="47"/>
-        <pc:sldMkLst>
-          <pc:docMk/>
-          <pc:sldMk cId="1495819743" sldId="258"/>
-        </pc:sldMkLst>
-      </pc:sldChg>
-      <pc:sldChg chg="del">
-        <pc:chgData name="Matthieu De Mari" userId="dfb708c9-d8dc-439f-9a3b-c772bf4a311c" providerId="ADAL" clId="{2E25C175-47A3-4BC7-8EFD-372D97A42A64}" dt="2023-03-07T06:12:37.449" v="3" actId="47"/>
-        <pc:sldMkLst>
-          <pc:docMk/>
-          <pc:sldMk cId="609186567" sldId="259"/>
-        </pc:sldMkLst>
-      </pc:sldChg>
-      <pc:sldChg chg="del">
-        <pc:chgData name="Matthieu De Mari" userId="dfb708c9-d8dc-439f-9a3b-c772bf4a311c" providerId="ADAL" clId="{2E25C175-47A3-4BC7-8EFD-372D97A42A64}" dt="2023-03-07T06:12:37.449" v="3" actId="47"/>
-        <pc:sldMkLst>
-          <pc:docMk/>
-          <pc:sldMk cId="1812694891" sldId="260"/>
-        </pc:sldMkLst>
-      </pc:sldChg>
-      <pc:sldChg chg="del">
-        <pc:chgData name="Matthieu De Mari" userId="dfb708c9-d8dc-439f-9a3b-c772bf4a311c" providerId="ADAL" clId="{2E25C175-47A3-4BC7-8EFD-372D97A42A64}" dt="2023-03-07T06:12:37.449" v="3" actId="47"/>
-        <pc:sldMkLst>
-          <pc:docMk/>
-          <pc:sldMk cId="2172647381" sldId="261"/>
-        </pc:sldMkLst>
-      </pc:sldChg>
-      <pc:sldChg chg="del">
-        <pc:chgData name="Matthieu De Mari" userId="dfb708c9-d8dc-439f-9a3b-c772bf4a311c" providerId="ADAL" clId="{2E25C175-47A3-4BC7-8EFD-372D97A42A64}" dt="2023-03-07T06:12:37.449" v="3" actId="47"/>
-        <pc:sldMkLst>
-          <pc:docMk/>
-          <pc:sldMk cId="3166947328" sldId="262"/>
-        </pc:sldMkLst>
-      </pc:sldChg>
-      <pc:sldChg chg="del">
-        <pc:chgData name="Matthieu De Mari" userId="dfb708c9-d8dc-439f-9a3b-c772bf4a311c" providerId="ADAL" clId="{2E25C175-47A3-4BC7-8EFD-372D97A42A64}" dt="2023-03-07T06:12:41.881" v="4" actId="47"/>
-        <pc:sldMkLst>
-          <pc:docMk/>
-          <pc:sldMk cId="2723458640" sldId="263"/>
-        </pc:sldMkLst>
-      </pc:sldChg>
-      <pc:sldChg chg="del">
-        <pc:chgData name="Matthieu De Mari" userId="dfb708c9-d8dc-439f-9a3b-c772bf4a311c" providerId="ADAL" clId="{2E25C175-47A3-4BC7-8EFD-372D97A42A64}" dt="2023-03-07T06:12:37.449" v="3" actId="47"/>
-        <pc:sldMkLst>
-          <pc:docMk/>
-          <pc:sldMk cId="649892368" sldId="264"/>
-        </pc:sldMkLst>
-      </pc:sldChg>
-      <pc:sldChg chg="del">
-        <pc:chgData name="Matthieu De Mari" userId="dfb708c9-d8dc-439f-9a3b-c772bf4a311c" providerId="ADAL" clId="{2E25C175-47A3-4BC7-8EFD-372D97A42A64}" dt="2023-03-07T06:12:41.881" v="4" actId="47"/>
-        <pc:sldMkLst>
-          <pc:docMk/>
-          <pc:sldMk cId="4127898596" sldId="265"/>
-        </pc:sldMkLst>
-      </pc:sldChg>
-      <pc:sldChg chg="del">
-        <pc:chgData name="Matthieu De Mari" userId="dfb708c9-d8dc-439f-9a3b-c772bf4a311c" providerId="ADAL" clId="{2E25C175-47A3-4BC7-8EFD-372D97A42A64}" dt="2023-03-07T06:12:41.881" v="4" actId="47"/>
-        <pc:sldMkLst>
-          <pc:docMk/>
-          <pc:sldMk cId="256269341" sldId="266"/>
-        </pc:sldMkLst>
-      </pc:sldChg>
-      <pc:sldChg chg="del">
-        <pc:chgData name="Matthieu De Mari" userId="dfb708c9-d8dc-439f-9a3b-c772bf4a311c" providerId="ADAL" clId="{2E25C175-47A3-4BC7-8EFD-372D97A42A64}" dt="2023-03-07T06:12:44.957" v="5" actId="47"/>
-        <pc:sldMkLst>
-          <pc:docMk/>
-          <pc:sldMk cId="2566504203" sldId="267"/>
-        </pc:sldMkLst>
-      </pc:sldChg>
-      <pc:sldChg chg="del">
-        <pc:chgData name="Matthieu De Mari" userId="dfb708c9-d8dc-439f-9a3b-c772bf4a311c" providerId="ADAL" clId="{2E25C175-47A3-4BC7-8EFD-372D97A42A64}" dt="2023-03-07T06:12:37.449" v="3" actId="47"/>
-        <pc:sldMkLst>
-          <pc:docMk/>
-          <pc:sldMk cId="1205920737" sldId="268"/>
-        </pc:sldMkLst>
-      </pc:sldChg>
-      <pc:sldChg chg="del">
-        <pc:chgData name="Matthieu De Mari" userId="dfb708c9-d8dc-439f-9a3b-c772bf4a311c" providerId="ADAL" clId="{2E25C175-47A3-4BC7-8EFD-372D97A42A64}" dt="2023-03-07T06:12:44.957" v="5" actId="47"/>
-        <pc:sldMkLst>
-          <pc:docMk/>
-          <pc:sldMk cId="4188287311" sldId="269"/>
-        </pc:sldMkLst>
-      </pc:sldChg>
-      <pc:sldChg chg="del">
-        <pc:chgData name="Matthieu De Mari" userId="dfb708c9-d8dc-439f-9a3b-c772bf4a311c" providerId="ADAL" clId="{2E25C175-47A3-4BC7-8EFD-372D97A42A64}" dt="2023-03-07T06:12:41.881" v="4" actId="47"/>
-        <pc:sldMkLst>
-          <pc:docMk/>
-          <pc:sldMk cId="997896339" sldId="270"/>
-        </pc:sldMkLst>
-      </pc:sldChg>
-      <pc:sldChg chg="del">
-        <pc:chgData name="Matthieu De Mari" userId="dfb708c9-d8dc-439f-9a3b-c772bf4a311c" providerId="ADAL" clId="{2E25C175-47A3-4BC7-8EFD-372D97A42A64}" dt="2023-03-07T06:12:41.881" v="4" actId="47"/>
-        <pc:sldMkLst>
-          <pc:docMk/>
-          <pc:sldMk cId="961845771" sldId="271"/>
-        </pc:sldMkLst>
-      </pc:sldChg>
-      <pc:sldChg chg="modSp add del mod ord">
-        <pc:chgData name="Matthieu De Mari" userId="dfb708c9-d8dc-439f-9a3b-c772bf4a311c" providerId="ADAL" clId="{2E25C175-47A3-4BC7-8EFD-372D97A42A64}" dt="2023-03-07T06:35:53.661" v="220"/>
-        <pc:sldMkLst>
-          <pc:docMk/>
-          <pc:sldMk cId="1813455260" sldId="274"/>
-        </pc:sldMkLst>
-      </pc:sldChg>
-      <pc:sldChg chg="del">
-        <pc:chgData name="Matthieu De Mari" userId="dfb708c9-d8dc-439f-9a3b-c772bf4a311c" providerId="ADAL" clId="{2E25C175-47A3-4BC7-8EFD-372D97A42A64}" dt="2023-03-07T06:13:16.183" v="8" actId="47"/>
-        <pc:sldMkLst>
-          <pc:docMk/>
-          <pc:sldMk cId="144954399" sldId="275"/>
-        </pc:sldMkLst>
-      </pc:sldChg>
-      <pc:sldChg chg="del">
-        <pc:chgData name="Matthieu De Mari" userId="dfb708c9-d8dc-439f-9a3b-c772bf4a311c" providerId="ADAL" clId="{2E25C175-47A3-4BC7-8EFD-372D97A42A64}" dt="2023-03-07T06:13:17.350" v="9" actId="47"/>
-        <pc:sldMkLst>
-          <pc:docMk/>
-          <pc:sldMk cId="4217769597" sldId="276"/>
-        </pc:sldMkLst>
-      </pc:sldChg>
-      <pc:sldChg chg="del">
-        <pc:chgData name="Matthieu De Mari" userId="dfb708c9-d8dc-439f-9a3b-c772bf4a311c" providerId="ADAL" clId="{2E25C175-47A3-4BC7-8EFD-372D97A42A64}" dt="2023-03-07T06:13:18.262" v="10" actId="47"/>
-        <pc:sldMkLst>
-          <pc:docMk/>
-          <pc:sldMk cId="1233188664" sldId="277"/>
-        </pc:sldMkLst>
-      </pc:sldChg>
-      <pc:sldChg chg="del">
-        <pc:chgData name="Matthieu De Mari" userId="dfb708c9-d8dc-439f-9a3b-c772bf4a311c" providerId="ADAL" clId="{2E25C175-47A3-4BC7-8EFD-372D97A42A64}" dt="2023-03-07T06:13:16.183" v="8" actId="47"/>
-        <pc:sldMkLst>
-          <pc:docMk/>
-          <pc:sldMk cId="885607022" sldId="278"/>
-        </pc:sldMkLst>
-      </pc:sldChg>
-      <pc:sldChg chg="del">
-        <pc:chgData name="Matthieu De Mari" userId="dfb708c9-d8dc-439f-9a3b-c772bf4a311c" providerId="ADAL" clId="{2E25C175-47A3-4BC7-8EFD-372D97A42A64}" dt="2023-03-07T06:13:16.183" v="8" actId="47"/>
-        <pc:sldMkLst>
-          <pc:docMk/>
-          <pc:sldMk cId="3941141626" sldId="279"/>
-        </pc:sldMkLst>
-      </pc:sldChg>
-      <pc:sldChg chg="del">
-        <pc:chgData name="Matthieu De Mari" userId="dfb708c9-d8dc-439f-9a3b-c772bf4a311c" providerId="ADAL" clId="{2E25C175-47A3-4BC7-8EFD-372D97A42A64}" dt="2023-03-07T06:13:16.183" v="8" actId="47"/>
-        <pc:sldMkLst>
-          <pc:docMk/>
-          <pc:sldMk cId="2409304258" sldId="280"/>
-        </pc:sldMkLst>
-      </pc:sldChg>
-      <pc:sldChg chg="del">
-        <pc:chgData name="Matthieu De Mari" userId="dfb708c9-d8dc-439f-9a3b-c772bf4a311c" providerId="ADAL" clId="{2E25C175-47A3-4BC7-8EFD-372D97A42A64}" dt="2023-03-07T06:13:16.183" v="8" actId="47"/>
-        <pc:sldMkLst>
-          <pc:docMk/>
-          <pc:sldMk cId="2949375831" sldId="281"/>
-        </pc:sldMkLst>
-      </pc:sldChg>
-      <pc:sldChg chg="del">
-        <pc:chgData name="Matthieu De Mari" userId="dfb708c9-d8dc-439f-9a3b-c772bf4a311c" providerId="ADAL" clId="{2E25C175-47A3-4BC7-8EFD-372D97A42A64}" dt="2023-03-07T06:13:16.183" v="8" actId="47"/>
-        <pc:sldMkLst>
-          <pc:docMk/>
-          <pc:sldMk cId="2432782764" sldId="282"/>
-        </pc:sldMkLst>
-      </pc:sldChg>
-      <pc:sldChg chg="del">
-        <pc:chgData name="Matthieu De Mari" userId="dfb708c9-d8dc-439f-9a3b-c772bf4a311c" providerId="ADAL" clId="{2E25C175-47A3-4BC7-8EFD-372D97A42A64}" dt="2023-03-07T06:13:16.183" v="8" actId="47"/>
-        <pc:sldMkLst>
-          <pc:docMk/>
-          <pc:sldMk cId="3869391851" sldId="284"/>
-        </pc:sldMkLst>
-      </pc:sldChg>
-      <pc:sldChg chg="del">
-        <pc:chgData name="Matthieu De Mari" userId="dfb708c9-d8dc-439f-9a3b-c772bf4a311c" providerId="ADAL" clId="{2E25C175-47A3-4BC7-8EFD-372D97A42A64}" dt="2023-03-07T06:13:16.183" v="8" actId="47"/>
-        <pc:sldMkLst>
-          <pc:docMk/>
-          <pc:sldMk cId="1567445271" sldId="285"/>
-        </pc:sldMkLst>
-      </pc:sldChg>
-      <pc:sldChg chg="del">
-        <pc:chgData name="Matthieu De Mari" userId="dfb708c9-d8dc-439f-9a3b-c772bf4a311c" providerId="ADAL" clId="{2E25C175-47A3-4BC7-8EFD-372D97A42A64}" dt="2023-03-07T06:13:17.350" v="9" actId="47"/>
-        <pc:sldMkLst>
-          <pc:docMk/>
-          <pc:sldMk cId="2870852187" sldId="287"/>
-        </pc:sldMkLst>
-      </pc:sldChg>
-      <pc:sldChg chg="del">
-        <pc:chgData name="Matthieu De Mari" userId="dfb708c9-d8dc-439f-9a3b-c772bf4a311c" providerId="ADAL" clId="{2E25C175-47A3-4BC7-8EFD-372D97A42A64}" dt="2023-03-07T06:13:17.350" v="9" actId="47"/>
-        <pc:sldMkLst>
-          <pc:docMk/>
-          <pc:sldMk cId="3486387661" sldId="288"/>
-        </pc:sldMkLst>
-      </pc:sldChg>
-      <pc:sldChg chg="del">
-        <pc:chgData name="Matthieu De Mari" userId="dfb708c9-d8dc-439f-9a3b-c772bf4a311c" providerId="ADAL" clId="{2E25C175-47A3-4BC7-8EFD-372D97A42A64}" dt="2023-03-07T06:13:17.350" v="9" actId="47"/>
-        <pc:sldMkLst>
-          <pc:docMk/>
-          <pc:sldMk cId="2118681498" sldId="289"/>
-        </pc:sldMkLst>
-      </pc:sldChg>
-      <pc:sldChg chg="del">
-        <pc:chgData name="Matthieu De Mari" userId="dfb708c9-d8dc-439f-9a3b-c772bf4a311c" providerId="ADAL" clId="{2E25C175-47A3-4BC7-8EFD-372D97A42A64}" dt="2023-03-07T06:13:17.350" v="9" actId="47"/>
-        <pc:sldMkLst>
-          <pc:docMk/>
-          <pc:sldMk cId="2562857934" sldId="290"/>
-        </pc:sldMkLst>
-      </pc:sldChg>
-      <pc:sldChg chg="del">
-        <pc:chgData name="Matthieu De Mari" userId="dfb708c9-d8dc-439f-9a3b-c772bf4a311c" providerId="ADAL" clId="{2E25C175-47A3-4BC7-8EFD-372D97A42A64}" dt="2023-03-07T06:13:17.350" v="9" actId="47"/>
-        <pc:sldMkLst>
-          <pc:docMk/>
-          <pc:sldMk cId="3292482358" sldId="291"/>
-        </pc:sldMkLst>
-      </pc:sldChg>
-      <pc:sldChg chg="del">
-        <pc:chgData name="Matthieu De Mari" userId="dfb708c9-d8dc-439f-9a3b-c772bf4a311c" providerId="ADAL" clId="{2E25C175-47A3-4BC7-8EFD-372D97A42A64}" dt="2023-03-07T06:13:17.350" v="9" actId="47"/>
-        <pc:sldMkLst>
-          <pc:docMk/>
-          <pc:sldMk cId="3520355124" sldId="292"/>
-        </pc:sldMkLst>
-      </pc:sldChg>
-      <pc:sldChg chg="del">
-        <pc:chgData name="Matthieu De Mari" userId="dfb708c9-d8dc-439f-9a3b-c772bf4a311c" providerId="ADAL" clId="{2E25C175-47A3-4BC7-8EFD-372D97A42A64}" dt="2023-03-07T06:13:17.350" v="9" actId="47"/>
-        <pc:sldMkLst>
-          <pc:docMk/>
-          <pc:sldMk cId="3046349634" sldId="293"/>
-        </pc:sldMkLst>
-      </pc:sldChg>
-      <pc:sldChg chg="del">
-        <pc:chgData name="Matthieu De Mari" userId="dfb708c9-d8dc-439f-9a3b-c772bf4a311c" providerId="ADAL" clId="{2E25C175-47A3-4BC7-8EFD-372D97A42A64}" dt="2023-03-07T06:13:17.350" v="9" actId="47"/>
-        <pc:sldMkLst>
-          <pc:docMk/>
-          <pc:sldMk cId="427136966" sldId="294"/>
-        </pc:sldMkLst>
-      </pc:sldChg>
-      <pc:sldChg chg="del">
-        <pc:chgData name="Matthieu De Mari" userId="dfb708c9-d8dc-439f-9a3b-c772bf4a311c" providerId="ADAL" clId="{2E25C175-47A3-4BC7-8EFD-372D97A42A64}" dt="2023-03-07T06:13:18.262" v="10" actId="47"/>
-        <pc:sldMkLst>
-          <pc:docMk/>
-          <pc:sldMk cId="323951598" sldId="295"/>
-        </pc:sldMkLst>
-      </pc:sldChg>
-      <pc:sldChg chg="del">
-        <pc:chgData name="Matthieu De Mari" userId="dfb708c9-d8dc-439f-9a3b-c772bf4a311c" providerId="ADAL" clId="{2E25C175-47A3-4BC7-8EFD-372D97A42A64}" dt="2023-03-07T06:13:18.262" v="10" actId="47"/>
-        <pc:sldMkLst>
-          <pc:docMk/>
-          <pc:sldMk cId="1855779909" sldId="296"/>
-        </pc:sldMkLst>
-      </pc:sldChg>
-      <pc:sldChg chg="del">
-        <pc:chgData name="Matthieu De Mari" userId="dfb708c9-d8dc-439f-9a3b-c772bf4a311c" providerId="ADAL" clId="{2E25C175-47A3-4BC7-8EFD-372D97A42A64}" dt="2023-03-07T06:13:18.262" v="10" actId="47"/>
-        <pc:sldMkLst>
-          <pc:docMk/>
-          <pc:sldMk cId="1514077654" sldId="297"/>
-        </pc:sldMkLst>
-      </pc:sldChg>
-      <pc:sldChg chg="del">
-        <pc:chgData name="Matthieu De Mari" userId="dfb708c9-d8dc-439f-9a3b-c772bf4a311c" providerId="ADAL" clId="{2E25C175-47A3-4BC7-8EFD-372D97A42A64}" dt="2023-03-07T06:13:18.262" v="10" actId="47"/>
-        <pc:sldMkLst>
-          <pc:docMk/>
-          <pc:sldMk cId="2514894683" sldId="298"/>
-        </pc:sldMkLst>
-      </pc:sldChg>
-      <pc:sldChg chg="del">
-        <pc:chgData name="Matthieu De Mari" userId="dfb708c9-d8dc-439f-9a3b-c772bf4a311c" providerId="ADAL" clId="{2E25C175-47A3-4BC7-8EFD-372D97A42A64}" dt="2023-03-07T06:13:18.262" v="10" actId="47"/>
-        <pc:sldMkLst>
-          <pc:docMk/>
-          <pc:sldMk cId="1452574487" sldId="299"/>
-        </pc:sldMkLst>
-      </pc:sldChg>
-      <pc:sldChg chg="del">
-        <pc:chgData name="Matthieu De Mari" userId="dfb708c9-d8dc-439f-9a3b-c772bf4a311c" providerId="ADAL" clId="{2E25C175-47A3-4BC7-8EFD-372D97A42A64}" dt="2023-03-07T06:13:18.262" v="10" actId="47"/>
-        <pc:sldMkLst>
-          <pc:docMk/>
-          <pc:sldMk cId="1699114457" sldId="300"/>
-        </pc:sldMkLst>
-      </pc:sldChg>
-      <pc:sldChg chg="del">
-        <pc:chgData name="Matthieu De Mari" userId="dfb708c9-d8dc-439f-9a3b-c772bf4a311c" providerId="ADAL" clId="{2E25C175-47A3-4BC7-8EFD-372D97A42A64}" dt="2023-03-07T06:13:18.262" v="10" actId="47"/>
-        <pc:sldMkLst>
-          <pc:docMk/>
-          <pc:sldMk cId="1276239023" sldId="301"/>
-        </pc:sldMkLst>
-      </pc:sldChg>
-      <pc:sldChg chg="del">
-        <pc:chgData name="Matthieu De Mari" userId="dfb708c9-d8dc-439f-9a3b-c772bf4a311c" providerId="ADAL" clId="{2E25C175-47A3-4BC7-8EFD-372D97A42A64}" dt="2023-03-07T06:13:18.262" v="10" actId="47"/>
-        <pc:sldMkLst>
-          <pc:docMk/>
-          <pc:sldMk cId="3968924669" sldId="302"/>
-        </pc:sldMkLst>
-      </pc:sldChg>
-      <pc:sldChg chg="modSp add del mod">
-        <pc:chgData name="Matthieu De Mari" userId="dfb708c9-d8dc-439f-9a3b-c772bf4a311c" providerId="ADAL" clId="{2E25C175-47A3-4BC7-8EFD-372D97A42A64}" dt="2023-03-07T10:16:35.251" v="5714" actId="20577"/>
-        <pc:sldMkLst>
-          <pc:docMk/>
-          <pc:sldMk cId="4232115997" sldId="303"/>
-        </pc:sldMkLst>
-      </pc:sldChg>
-      <pc:sldChg chg="del">
-        <pc:chgData name="Matthieu De Mari" userId="dfb708c9-d8dc-439f-9a3b-c772bf4a311c" providerId="ADAL" clId="{2E25C175-47A3-4BC7-8EFD-372D97A42A64}" dt="2023-03-07T06:13:22.745" v="11" actId="47"/>
-        <pc:sldMkLst>
-          <pc:docMk/>
-          <pc:sldMk cId="354883896" sldId="304"/>
-        </pc:sldMkLst>
-      </pc:sldChg>
-      <pc:sldChg chg="del">
-        <pc:chgData name="Matthieu De Mari" userId="dfb708c9-d8dc-439f-9a3b-c772bf4a311c" providerId="ADAL" clId="{2E25C175-47A3-4BC7-8EFD-372D97A42A64}" dt="2023-03-07T06:13:22.745" v="11" actId="47"/>
-        <pc:sldMkLst>
-          <pc:docMk/>
-          <pc:sldMk cId="4099824996" sldId="305"/>
-        </pc:sldMkLst>
-      </pc:sldChg>
-      <pc:sldChg chg="del">
-        <pc:chgData name="Matthieu De Mari" userId="dfb708c9-d8dc-439f-9a3b-c772bf4a311c" providerId="ADAL" clId="{2E25C175-47A3-4BC7-8EFD-372D97A42A64}" dt="2023-03-07T06:13:22.745" v="11" actId="47"/>
-        <pc:sldMkLst>
-          <pc:docMk/>
-          <pc:sldMk cId="4051912021" sldId="306"/>
-        </pc:sldMkLst>
-      </pc:sldChg>
-      <pc:sldChg chg="del">
-        <pc:chgData name="Matthieu De Mari" userId="dfb708c9-d8dc-439f-9a3b-c772bf4a311c" providerId="ADAL" clId="{2E25C175-47A3-4BC7-8EFD-372D97A42A64}" dt="2023-03-07T06:13:22.745" v="11" actId="47"/>
-        <pc:sldMkLst>
-          <pc:docMk/>
-          <pc:sldMk cId="2900176786" sldId="307"/>
-        </pc:sldMkLst>
-      </pc:sldChg>
-      <pc:sldChg chg="del">
-        <pc:chgData name="Matthieu De Mari" userId="dfb708c9-d8dc-439f-9a3b-c772bf4a311c" providerId="ADAL" clId="{2E25C175-47A3-4BC7-8EFD-372D97A42A64}" dt="2023-03-07T06:13:22.745" v="11" actId="47"/>
-        <pc:sldMkLst>
-          <pc:docMk/>
-          <pc:sldMk cId="1601297533" sldId="308"/>
-        </pc:sldMkLst>
-      </pc:sldChg>
-      <pc:sldChg chg="del">
-        <pc:chgData name="Matthieu De Mari" userId="dfb708c9-d8dc-439f-9a3b-c772bf4a311c" providerId="ADAL" clId="{2E25C175-47A3-4BC7-8EFD-372D97A42A64}" dt="2023-03-07T06:13:22.745" v="11" actId="47"/>
-        <pc:sldMkLst>
-          <pc:docMk/>
-          <pc:sldMk cId="3331075550" sldId="309"/>
-        </pc:sldMkLst>
-      </pc:sldChg>
-      <pc:sldChg chg="del">
-        <pc:chgData name="Matthieu De Mari" userId="dfb708c9-d8dc-439f-9a3b-c772bf4a311c" providerId="ADAL" clId="{2E25C175-47A3-4BC7-8EFD-372D97A42A64}" dt="2023-03-07T06:13:22.745" v="11" actId="47"/>
-        <pc:sldMkLst>
-          <pc:docMk/>
-          <pc:sldMk cId="4251184714" sldId="310"/>
-        </pc:sldMkLst>
-      </pc:sldChg>
-      <pc:sldChg chg="del">
-        <pc:chgData name="Matthieu De Mari" userId="dfb708c9-d8dc-439f-9a3b-c772bf4a311c" providerId="ADAL" clId="{2E25C175-47A3-4BC7-8EFD-372D97A42A64}" dt="2023-03-07T06:13:22.745" v="11" actId="47"/>
-        <pc:sldMkLst>
-          <pc:docMk/>
-          <pc:sldMk cId="3629183510" sldId="311"/>
-        </pc:sldMkLst>
-      </pc:sldChg>
-      <pc:sldChg chg="del">
-        <pc:chgData name="Matthieu De Mari" userId="dfb708c9-d8dc-439f-9a3b-c772bf4a311c" providerId="ADAL" clId="{2E25C175-47A3-4BC7-8EFD-372D97A42A64}" dt="2023-03-07T06:13:22.745" v="11" actId="47"/>
-        <pc:sldMkLst>
-          <pc:docMk/>
-          <pc:sldMk cId="7996884" sldId="312"/>
-        </pc:sldMkLst>
-      </pc:sldChg>
-      <pc:sldChg chg="del">
-        <pc:chgData name="Matthieu De Mari" userId="dfb708c9-d8dc-439f-9a3b-c772bf4a311c" providerId="ADAL" clId="{2E25C175-47A3-4BC7-8EFD-372D97A42A64}" dt="2023-03-07T06:13:22.745" v="11" actId="47"/>
-        <pc:sldMkLst>
-          <pc:docMk/>
-          <pc:sldMk cId="1140638742" sldId="313"/>
-        </pc:sldMkLst>
-      </pc:sldChg>
-      <pc:sldChg chg="modSp mod">
-        <pc:chgData name="Matthieu De Mari" userId="dfb708c9-d8dc-439f-9a3b-c772bf4a311c" providerId="ADAL" clId="{2E25C175-47A3-4BC7-8EFD-372D97A42A64}" dt="2023-03-07T10:46:51.155" v="7359" actId="20577"/>
-        <pc:sldMkLst>
-          <pc:docMk/>
-          <pc:sldMk cId="2858358615" sldId="314"/>
-        </pc:sldMkLst>
-      </pc:sldChg>
-      <pc:sldChg chg="modSp mod">
-        <pc:chgData name="Matthieu De Mari" userId="dfb708c9-d8dc-439f-9a3b-c772bf4a311c" providerId="ADAL" clId="{2E25C175-47A3-4BC7-8EFD-372D97A42A64}" dt="2023-03-07T06:12:25.909" v="1" actId="20577"/>
-        <pc:sldMkLst>
-          <pc:docMk/>
-          <pc:sldMk cId="1040156172" sldId="377"/>
-        </pc:sldMkLst>
-      </pc:sldChg>
-      <pc:sldChg chg="addSp delSp modSp new mod modClrScheme chgLayout">
-        <pc:chgData name="Matthieu De Mari" userId="dfb708c9-d8dc-439f-9a3b-c772bf4a311c" providerId="ADAL" clId="{2E25C175-47A3-4BC7-8EFD-372D97A42A64}" dt="2023-03-07T06:51:43.777" v="743" actId="693"/>
-        <pc:sldMkLst>
-          <pc:docMk/>
-          <pc:sldMk cId="820057187" sldId="378"/>
-        </pc:sldMkLst>
-      </pc:sldChg>
-      <pc:sldChg chg="del">
-        <pc:chgData name="Matthieu De Mari" userId="dfb708c9-d8dc-439f-9a3b-c772bf4a311c" providerId="ADAL" clId="{2E25C175-47A3-4BC7-8EFD-372D97A42A64}" dt="2023-03-07T06:12:31.958" v="2" actId="47"/>
-        <pc:sldMkLst>
-          <pc:docMk/>
-          <pc:sldMk cId="3338565690" sldId="378"/>
-        </pc:sldMkLst>
-      </pc:sldChg>
-      <pc:sldChg chg="addSp delSp modSp new mod modClrScheme chgLayout">
-        <pc:chgData name="Matthieu De Mari" userId="dfb708c9-d8dc-439f-9a3b-c772bf4a311c" providerId="ADAL" clId="{2E25C175-47A3-4BC7-8EFD-372D97A42A64}" dt="2023-03-07T09:36:26.056" v="3847" actId="27636"/>
-        <pc:sldMkLst>
-          <pc:docMk/>
-          <pc:sldMk cId="691565538" sldId="379"/>
-        </pc:sldMkLst>
-      </pc:sldChg>
-      <pc:sldChg chg="addSp delSp modSp add mod">
-        <pc:chgData name="Matthieu De Mari" userId="dfb708c9-d8dc-439f-9a3b-c772bf4a311c" providerId="ADAL" clId="{2E25C175-47A3-4BC7-8EFD-372D97A42A64}" dt="2023-03-07T09:52:47.258" v="4759" actId="20577"/>
-        <pc:sldMkLst>
-          <pc:docMk/>
-          <pc:sldMk cId="4217274173" sldId="380"/>
-        </pc:sldMkLst>
-      </pc:sldChg>
-      <pc:sldChg chg="modSp add mod ord">
-        <pc:chgData name="Matthieu De Mari" userId="dfb708c9-d8dc-439f-9a3b-c772bf4a311c" providerId="ADAL" clId="{2E25C175-47A3-4BC7-8EFD-372D97A42A64}" dt="2023-03-07T09:52:40.373" v="4748" actId="20577"/>
-        <pc:sldMkLst>
-          <pc:docMk/>
-          <pc:sldMk cId="1253114987" sldId="381"/>
-        </pc:sldMkLst>
-      </pc:sldChg>
-      <pc:sldChg chg="add del">
-        <pc:chgData name="Matthieu De Mari" userId="dfb708c9-d8dc-439f-9a3b-c772bf4a311c" providerId="ADAL" clId="{2E25C175-47A3-4BC7-8EFD-372D97A42A64}" dt="2023-03-07T06:33:39.066" v="156"/>
-        <pc:sldMkLst>
-          <pc:docMk/>
-          <pc:sldMk cId="3859619901" sldId="381"/>
-        </pc:sldMkLst>
-      </pc:sldChg>
-      <pc:sldChg chg="modSp add mod">
-        <pc:chgData name="Matthieu De Mari" userId="dfb708c9-d8dc-439f-9a3b-c772bf4a311c" providerId="ADAL" clId="{2E25C175-47A3-4BC7-8EFD-372D97A42A64}" dt="2023-03-07T10:20:58.594" v="5878" actId="20577"/>
-        <pc:sldMkLst>
-          <pc:docMk/>
-          <pc:sldMk cId="336152115" sldId="382"/>
-        </pc:sldMkLst>
-      </pc:sldChg>
-      <pc:sldChg chg="modSp add mod">
-        <pc:chgData name="Matthieu De Mari" userId="dfb708c9-d8dc-439f-9a3b-c772bf4a311c" providerId="ADAL" clId="{2E25C175-47A3-4BC7-8EFD-372D97A42A64}" dt="2023-03-07T09:19:27.741" v="2933"/>
-        <pc:sldMkLst>
-          <pc:docMk/>
-          <pc:sldMk cId="1681210728" sldId="383"/>
-        </pc:sldMkLst>
-      </pc:sldChg>
-      <pc:sldChg chg="modSp new mod ord">
-        <pc:chgData name="Matthieu De Mari" userId="dfb708c9-d8dc-439f-9a3b-c772bf4a311c" providerId="ADAL" clId="{2E25C175-47A3-4BC7-8EFD-372D97A42A64}" dt="2023-03-07T07:15:22.193" v="1643" actId="207"/>
-        <pc:sldMkLst>
-          <pc:docMk/>
-          <pc:sldMk cId="1342602480" sldId="384"/>
-        </pc:sldMkLst>
-      </pc:sldChg>
-      <pc:sldChg chg="modSp add mod">
-        <pc:chgData name="Matthieu De Mari" userId="dfb708c9-d8dc-439f-9a3b-c772bf4a311c" providerId="ADAL" clId="{2E25C175-47A3-4BC7-8EFD-372D97A42A64}" dt="2023-03-07T06:52:07.120" v="746" actId="20577"/>
-        <pc:sldMkLst>
-          <pc:docMk/>
-          <pc:sldMk cId="3061177336" sldId="385"/>
-        </pc:sldMkLst>
-      </pc:sldChg>
-      <pc:sldChg chg="modSp add mod">
-        <pc:chgData name="Matthieu De Mari" userId="dfb708c9-d8dc-439f-9a3b-c772bf4a311c" providerId="ADAL" clId="{2E25C175-47A3-4BC7-8EFD-372D97A42A64}" dt="2023-03-07T10:21:04.127" v="5879"/>
-        <pc:sldMkLst>
-          <pc:docMk/>
-          <pc:sldMk cId="1114751945" sldId="386"/>
-        </pc:sldMkLst>
-      </pc:sldChg>
-      <pc:sldChg chg="modSp add mod">
-        <pc:chgData name="Matthieu De Mari" userId="dfb708c9-d8dc-439f-9a3b-c772bf4a311c" providerId="ADAL" clId="{2E25C175-47A3-4BC7-8EFD-372D97A42A64}" dt="2023-03-07T10:21:07.278" v="5880"/>
-        <pc:sldMkLst>
-          <pc:docMk/>
-          <pc:sldMk cId="881014307" sldId="387"/>
-        </pc:sldMkLst>
-      </pc:sldChg>
-      <pc:sldChg chg="addSp delSp modSp new del mod modClrScheme chgLayout">
-        <pc:chgData name="Matthieu De Mari" userId="dfb708c9-d8dc-439f-9a3b-c772bf4a311c" providerId="ADAL" clId="{2E25C175-47A3-4BC7-8EFD-372D97A42A64}" dt="2023-03-07T07:39:02.444" v="2518" actId="47"/>
-        <pc:sldMkLst>
-          <pc:docMk/>
-          <pc:sldMk cId="2957584795" sldId="388"/>
-        </pc:sldMkLst>
-      </pc:sldChg>
-      <pc:sldChg chg="addSp delSp modSp new mod">
-        <pc:chgData name="Matthieu De Mari" userId="dfb708c9-d8dc-439f-9a3b-c772bf4a311c" providerId="ADAL" clId="{2E25C175-47A3-4BC7-8EFD-372D97A42A64}" dt="2023-03-07T07:36:38.453" v="2381" actId="1076"/>
-        <pc:sldMkLst>
-          <pc:docMk/>
-          <pc:sldMk cId="1359818059" sldId="389"/>
-        </pc:sldMkLst>
-      </pc:sldChg>
-      <pc:sldChg chg="addSp delSp modSp new mod">
-        <pc:chgData name="Matthieu De Mari" userId="dfb708c9-d8dc-439f-9a3b-c772bf4a311c" providerId="ADAL" clId="{2E25C175-47A3-4BC7-8EFD-372D97A42A64}" dt="2023-03-07T07:35:30.101" v="2369" actId="1076"/>
-        <pc:sldMkLst>
-          <pc:docMk/>
-          <pc:sldMk cId="1233822438" sldId="390"/>
-        </pc:sldMkLst>
-      </pc:sldChg>
-      <pc:sldChg chg="addSp delSp modSp add mod ord modClrScheme chgLayout">
-        <pc:chgData name="Matthieu De Mari" userId="dfb708c9-d8dc-439f-9a3b-c772bf4a311c" providerId="ADAL" clId="{2E25C175-47A3-4BC7-8EFD-372D97A42A64}" dt="2023-03-07T07:38:39.051" v="2509" actId="1036"/>
-        <pc:sldMkLst>
-          <pc:docMk/>
-          <pc:sldMk cId="2406012581" sldId="391"/>
-        </pc:sldMkLst>
-      </pc:sldChg>
-      <pc:sldChg chg="addSp delSp modSp add mod">
-        <pc:chgData name="Matthieu De Mari" userId="dfb708c9-d8dc-439f-9a3b-c772bf4a311c" providerId="ADAL" clId="{2E25C175-47A3-4BC7-8EFD-372D97A42A64}" dt="2023-03-07T07:35:59.217" v="2376" actId="14100"/>
-        <pc:sldMkLst>
-          <pc:docMk/>
-          <pc:sldMk cId="1269624659" sldId="392"/>
-        </pc:sldMkLst>
-      </pc:sldChg>
-      <pc:sldChg chg="modSp new mod">
-        <pc:chgData name="Matthieu De Mari" userId="dfb708c9-d8dc-439f-9a3b-c772bf4a311c" providerId="ADAL" clId="{2E25C175-47A3-4BC7-8EFD-372D97A42A64}" dt="2023-03-07T07:45:56.776" v="2772" actId="20577"/>
-        <pc:sldMkLst>
-          <pc:docMk/>
-          <pc:sldMk cId="1060213588" sldId="393"/>
-        </pc:sldMkLst>
-      </pc:sldChg>
-      <pc:sldChg chg="addSp delSp modSp add mod modClrScheme chgLayout">
-        <pc:chgData name="Matthieu De Mari" userId="dfb708c9-d8dc-439f-9a3b-c772bf4a311c" providerId="ADAL" clId="{2E25C175-47A3-4BC7-8EFD-372D97A42A64}" dt="2023-03-07T07:34:46.250" v="2362" actId="1076"/>
-        <pc:sldMkLst>
-          <pc:docMk/>
-          <pc:sldMk cId="1215328976" sldId="394"/>
-        </pc:sldMkLst>
-      </pc:sldChg>
-      <pc:sldChg chg="addSp delSp modSp new mod modClrScheme chgLayout">
-        <pc:chgData name="Matthieu De Mari" userId="dfb708c9-d8dc-439f-9a3b-c772bf4a311c" providerId="ADAL" clId="{2E25C175-47A3-4BC7-8EFD-372D97A42A64}" dt="2023-03-07T07:28:47.793" v="2301" actId="20577"/>
-        <pc:sldMkLst>
-          <pc:docMk/>
-          <pc:sldMk cId="3544056403" sldId="395"/>
-        </pc:sldMkLst>
-      </pc:sldChg>
-      <pc:sldChg chg="addSp delSp modSp add del mod">
-        <pc:chgData name="Matthieu De Mari" userId="dfb708c9-d8dc-439f-9a3b-c772bf4a311c" providerId="ADAL" clId="{2E25C175-47A3-4BC7-8EFD-372D97A42A64}" dt="2023-03-07T07:33:16.168" v="2350" actId="47"/>
-        <pc:sldMkLst>
-          <pc:docMk/>
-          <pc:sldMk cId="1465774430" sldId="396"/>
-        </pc:sldMkLst>
-      </pc:sldChg>
-      <pc:sldChg chg="addSp delSp modSp add mod">
-        <pc:chgData name="Matthieu De Mari" userId="dfb708c9-d8dc-439f-9a3b-c772bf4a311c" providerId="ADAL" clId="{2E25C175-47A3-4BC7-8EFD-372D97A42A64}" dt="2023-03-07T07:44:01.388" v="2686" actId="20577"/>
-        <pc:sldMkLst>
-          <pc:docMk/>
-          <pc:sldMk cId="511100047" sldId="397"/>
-        </pc:sldMkLst>
-      </pc:sldChg>
-      <pc:sldChg chg="addSp delSp modSp add mod ord modClrScheme chgLayout">
-        <pc:chgData name="Matthieu De Mari" userId="dfb708c9-d8dc-439f-9a3b-c772bf4a311c" providerId="ADAL" clId="{2E25C175-47A3-4BC7-8EFD-372D97A42A64}" dt="2023-03-07T07:48:10.066" v="2811" actId="20577"/>
-        <pc:sldMkLst>
-          <pc:docMk/>
-          <pc:sldMk cId="2174133860" sldId="398"/>
-        </pc:sldMkLst>
-      </pc:sldChg>
-      <pc:sldChg chg="addSp delSp modSp add mod ord modClrScheme chgLayout">
-        <pc:chgData name="Matthieu De Mari" userId="dfb708c9-d8dc-439f-9a3b-c772bf4a311c" providerId="ADAL" clId="{2E25C175-47A3-4BC7-8EFD-372D97A42A64}" dt="2023-03-07T07:38:53.195" v="2516" actId="700"/>
-        <pc:sldMkLst>
-          <pc:docMk/>
-          <pc:sldMk cId="1114255243" sldId="399"/>
-        </pc:sldMkLst>
-      </pc:sldChg>
-      <pc:sldChg chg="add">
-        <pc:chgData name="Matthieu De Mari" userId="dfb708c9-d8dc-439f-9a3b-c772bf4a311c" providerId="ADAL" clId="{2E25C175-47A3-4BC7-8EFD-372D97A42A64}" dt="2023-03-07T07:39:00.501" v="2517"/>
-        <pc:sldMkLst>
-          <pc:docMk/>
-          <pc:sldMk cId="3412258979" sldId="400"/>
-        </pc:sldMkLst>
-      </pc:sldChg>
-      <pc:sldChg chg="addSp delSp modSp new mod modClrScheme chgLayout">
-        <pc:chgData name="Matthieu De Mari" userId="dfb708c9-d8dc-439f-9a3b-c772bf4a311c" providerId="ADAL" clId="{2E25C175-47A3-4BC7-8EFD-372D97A42A64}" dt="2023-03-07T07:44:19.570" v="2733" actId="20577"/>
-        <pc:sldMkLst>
-          <pc:docMk/>
-          <pc:sldMk cId="2615177350" sldId="401"/>
-        </pc:sldMkLst>
-      </pc:sldChg>
-      <pc:sldChg chg="addSp delSp modSp add mod ord modClrScheme chgLayout">
-        <pc:chgData name="Matthieu De Mari" userId="dfb708c9-d8dc-439f-9a3b-c772bf4a311c" providerId="ADAL" clId="{2E25C175-47A3-4BC7-8EFD-372D97A42A64}" dt="2023-03-07T07:45:19.255" v="2765"/>
-        <pc:sldMkLst>
-          <pc:docMk/>
-          <pc:sldMk cId="792071299" sldId="402"/>
-        </pc:sldMkLst>
-      </pc:sldChg>
-      <pc:sldChg chg="add del">
-        <pc:chgData name="Matthieu De Mari" userId="dfb708c9-d8dc-439f-9a3b-c772bf4a311c" providerId="ADAL" clId="{2E25C175-47A3-4BC7-8EFD-372D97A42A64}" dt="2023-03-07T07:43:26.095" v="2668" actId="47"/>
-        <pc:sldMkLst>
-          <pc:docMk/>
-          <pc:sldMk cId="2323503086" sldId="402"/>
-        </pc:sldMkLst>
-      </pc:sldChg>
-      <pc:sldChg chg="addSp delSp modSp add mod modClrScheme chgLayout">
-        <pc:chgData name="Matthieu De Mari" userId="dfb708c9-d8dc-439f-9a3b-c772bf4a311c" providerId="ADAL" clId="{2E25C175-47A3-4BC7-8EFD-372D97A42A64}" dt="2023-03-07T07:45:28.874" v="2770" actId="1076"/>
-        <pc:sldMkLst>
-          <pc:docMk/>
-          <pc:sldMk cId="990763623" sldId="403"/>
-        </pc:sldMkLst>
-      </pc:sldChg>
-      <pc:sldChg chg="modSp add mod">
-        <pc:chgData name="Matthieu De Mari" userId="dfb708c9-d8dc-439f-9a3b-c772bf4a311c" providerId="ADAL" clId="{2E25C175-47A3-4BC7-8EFD-372D97A42A64}" dt="2023-03-07T09:27:55.594" v="3381" actId="207"/>
-        <pc:sldMkLst>
-          <pc:docMk/>
-          <pc:sldMk cId="3762706142" sldId="404"/>
-        </pc:sldMkLst>
-      </pc:sldChg>
-      <pc:sldChg chg="addSp delSp modSp new mod modClrScheme chgLayout">
-        <pc:chgData name="Matthieu De Mari" userId="dfb708c9-d8dc-439f-9a3b-c772bf4a311c" providerId="ADAL" clId="{2E25C175-47A3-4BC7-8EFD-372D97A42A64}" dt="2023-03-07T09:21:37.295" v="3027" actId="1076"/>
-        <pc:sldMkLst>
-          <pc:docMk/>
-          <pc:sldMk cId="4232193198" sldId="405"/>
-        </pc:sldMkLst>
-      </pc:sldChg>
-      <pc:sldChg chg="addSp delSp modSp new mod">
-        <pc:chgData name="Matthieu De Mari" userId="dfb708c9-d8dc-439f-9a3b-c772bf4a311c" providerId="ADAL" clId="{2E25C175-47A3-4BC7-8EFD-372D97A42A64}" dt="2023-03-07T09:27:15.834" v="3347" actId="14100"/>
-        <pc:sldMkLst>
-          <pc:docMk/>
-          <pc:sldMk cId="1511321219" sldId="406"/>
-        </pc:sldMkLst>
-      </pc:sldChg>
-      <pc:sldChg chg="modSp add mod">
-        <pc:chgData name="Matthieu De Mari" userId="dfb708c9-d8dc-439f-9a3b-c772bf4a311c" providerId="ADAL" clId="{2E25C175-47A3-4BC7-8EFD-372D97A42A64}" dt="2023-03-07T09:26:18.953" v="3297" actId="27636"/>
-        <pc:sldMkLst>
-          <pc:docMk/>
-          <pc:sldMk cId="3233841990" sldId="407"/>
-        </pc:sldMkLst>
-      </pc:sldChg>
-      <pc:sldChg chg="modSp add mod">
-        <pc:chgData name="Matthieu De Mari" userId="dfb708c9-d8dc-439f-9a3b-c772bf4a311c" providerId="ADAL" clId="{2E25C175-47A3-4BC7-8EFD-372D97A42A64}" dt="2023-03-07T09:27:48.031" v="3380" actId="207"/>
-        <pc:sldMkLst>
-          <pc:docMk/>
-          <pc:sldMk cId="1609989787" sldId="408"/>
-        </pc:sldMkLst>
-      </pc:sldChg>
-      <pc:sldChg chg="addSp delSp modSp add mod modClrScheme chgLayout">
-        <pc:chgData name="Matthieu De Mari" userId="dfb708c9-d8dc-439f-9a3b-c772bf4a311c" providerId="ADAL" clId="{2E25C175-47A3-4BC7-8EFD-372D97A42A64}" dt="2023-03-07T10:24:07.578" v="6039" actId="207"/>
-        <pc:sldMkLst>
-          <pc:docMk/>
-          <pc:sldMk cId="3853734329" sldId="409"/>
-        </pc:sldMkLst>
-      </pc:sldChg>
-      <pc:sldChg chg="modSp add del mod">
-        <pc:chgData name="Matthieu De Mari" userId="dfb708c9-d8dc-439f-9a3b-c772bf4a311c" providerId="ADAL" clId="{2E25C175-47A3-4BC7-8EFD-372D97A42A64}" dt="2023-03-07T09:50:47.923" v="4520" actId="2696"/>
-        <pc:sldMkLst>
-          <pc:docMk/>
-          <pc:sldMk cId="2230671212" sldId="410"/>
-        </pc:sldMkLst>
-      </pc:sldChg>
-      <pc:sldChg chg="modSp add mod">
-        <pc:chgData name="Matthieu De Mari" userId="dfb708c9-d8dc-439f-9a3b-c772bf4a311c" providerId="ADAL" clId="{2E25C175-47A3-4BC7-8EFD-372D97A42A64}" dt="2023-03-07T10:04:11.442" v="5348" actId="20577"/>
-        <pc:sldMkLst>
-          <pc:docMk/>
-          <pc:sldMk cId="4281175894" sldId="410"/>
-        </pc:sldMkLst>
-      </pc:sldChg>
-      <pc:sldChg chg="modSp add del mod">
-        <pc:chgData name="Matthieu De Mari" userId="dfb708c9-d8dc-439f-9a3b-c772bf4a311c" providerId="ADAL" clId="{2E25C175-47A3-4BC7-8EFD-372D97A42A64}" dt="2023-03-07T09:50:47.923" v="4520" actId="2696"/>
-        <pc:sldMkLst>
-          <pc:docMk/>
-          <pc:sldMk cId="2214876847" sldId="411"/>
-        </pc:sldMkLst>
-      </pc:sldChg>
-      <pc:sldChg chg="modSp add mod">
-        <pc:chgData name="Matthieu De Mari" userId="dfb708c9-d8dc-439f-9a3b-c772bf4a311c" providerId="ADAL" clId="{2E25C175-47A3-4BC7-8EFD-372D97A42A64}" dt="2023-03-07T10:01:47.419" v="5118" actId="20577"/>
-        <pc:sldMkLst>
-          <pc:docMk/>
-          <pc:sldMk cId="3863789620" sldId="411"/>
-        </pc:sldMkLst>
-      </pc:sldChg>
-      <pc:sldChg chg="modSp add del mod">
-        <pc:chgData name="Matthieu De Mari" userId="dfb708c9-d8dc-439f-9a3b-c772bf4a311c" providerId="ADAL" clId="{2E25C175-47A3-4BC7-8EFD-372D97A42A64}" dt="2023-03-07T09:50:47.923" v="4520" actId="2696"/>
-        <pc:sldMkLst>
-          <pc:docMk/>
-          <pc:sldMk cId="1824916093" sldId="412"/>
-        </pc:sldMkLst>
-      </pc:sldChg>
-      <pc:sldChg chg="modSp add mod">
-        <pc:chgData name="Matthieu De Mari" userId="dfb708c9-d8dc-439f-9a3b-c772bf4a311c" providerId="ADAL" clId="{2E25C175-47A3-4BC7-8EFD-372D97A42A64}" dt="2023-03-07T10:11:33.236" v="5507" actId="20577"/>
-        <pc:sldMkLst>
-          <pc:docMk/>
-          <pc:sldMk cId="3522054596" sldId="412"/>
-        </pc:sldMkLst>
-      </pc:sldChg>
-      <pc:sldChg chg="addSp delSp modSp add mod">
-        <pc:chgData name="Matthieu De Mari" userId="dfb708c9-d8dc-439f-9a3b-c772bf4a311c" providerId="ADAL" clId="{2E25C175-47A3-4BC7-8EFD-372D97A42A64}" dt="2023-03-07T09:59:16.475" v="4959" actId="1076"/>
-        <pc:sldMkLst>
-          <pc:docMk/>
-          <pc:sldMk cId="2221766967" sldId="413"/>
-        </pc:sldMkLst>
-      </pc:sldChg>
-      <pc:sldChg chg="addSp delSp modSp new mod modClrScheme chgLayout">
-        <pc:chgData name="Matthieu De Mari" userId="dfb708c9-d8dc-439f-9a3b-c772bf4a311c" providerId="ADAL" clId="{2E25C175-47A3-4BC7-8EFD-372D97A42A64}" dt="2023-03-07T09:58:35.438" v="4956" actId="1076"/>
-        <pc:sldMkLst>
-          <pc:docMk/>
-          <pc:sldMk cId="912972080" sldId="414"/>
-        </pc:sldMkLst>
-      </pc:sldChg>
-      <pc:sldChg chg="modSp add mod">
-        <pc:chgData name="Matthieu De Mari" userId="dfb708c9-d8dc-439f-9a3b-c772bf4a311c" providerId="ADAL" clId="{2E25C175-47A3-4BC7-8EFD-372D97A42A64}" dt="2023-03-07T09:53:39.541" v="4799" actId="114"/>
-        <pc:sldMkLst>
-          <pc:docMk/>
-          <pc:sldMk cId="71985707" sldId="415"/>
-        </pc:sldMkLst>
-      </pc:sldChg>
-      <pc:sldChg chg="addSp modSp add mod">
-        <pc:chgData name="Matthieu De Mari" userId="dfb708c9-d8dc-439f-9a3b-c772bf4a311c" providerId="ADAL" clId="{2E25C175-47A3-4BC7-8EFD-372D97A42A64}" dt="2023-03-07T10:05:35.903" v="5356" actId="1076"/>
-        <pc:sldMkLst>
-          <pc:docMk/>
-          <pc:sldMk cId="1311368978" sldId="416"/>
-        </pc:sldMkLst>
-      </pc:sldChg>
-      <pc:sldChg chg="addSp delSp modSp add mod">
-        <pc:chgData name="Matthieu De Mari" userId="dfb708c9-d8dc-439f-9a3b-c772bf4a311c" providerId="ADAL" clId="{2E25C175-47A3-4BC7-8EFD-372D97A42A64}" dt="2023-03-07T10:10:43.605" v="5384" actId="14100"/>
-        <pc:sldMkLst>
-          <pc:docMk/>
-          <pc:sldMk cId="3072427418" sldId="417"/>
-        </pc:sldMkLst>
-      </pc:sldChg>
-      <pc:sldChg chg="addSp modSp add mod">
-        <pc:chgData name="Matthieu De Mari" userId="dfb708c9-d8dc-439f-9a3b-c772bf4a311c" providerId="ADAL" clId="{2E25C175-47A3-4BC7-8EFD-372D97A42A64}" dt="2023-03-07T10:11:59.407" v="5512" actId="207"/>
-        <pc:sldMkLst>
-          <pc:docMk/>
-          <pc:sldMk cId="298499389" sldId="418"/>
-        </pc:sldMkLst>
-      </pc:sldChg>
-      <pc:sldChg chg="modSp add mod">
-        <pc:chgData name="Matthieu De Mari" userId="dfb708c9-d8dc-439f-9a3b-c772bf4a311c" providerId="ADAL" clId="{2E25C175-47A3-4BC7-8EFD-372D97A42A64}" dt="2023-03-07T10:12:50.723" v="5624" actId="20577"/>
-        <pc:sldMkLst>
-          <pc:docMk/>
-          <pc:sldMk cId="3069423319" sldId="419"/>
-        </pc:sldMkLst>
-      </pc:sldChg>
-      <pc:sldChg chg="add">
-        <pc:chgData name="Matthieu De Mari" userId="dfb708c9-d8dc-439f-9a3b-c772bf4a311c" providerId="ADAL" clId="{2E25C175-47A3-4BC7-8EFD-372D97A42A64}" dt="2023-03-07T10:13:31.207" v="5629"/>
-        <pc:sldMkLst>
-          <pc:docMk/>
-          <pc:sldMk cId="485649805" sldId="420"/>
-        </pc:sldMkLst>
-      </pc:sldChg>
-      <pc:sldChg chg="add del">
-        <pc:chgData name="Matthieu De Mari" userId="dfb708c9-d8dc-439f-9a3b-c772bf4a311c" providerId="ADAL" clId="{2E25C175-47A3-4BC7-8EFD-372D97A42A64}" dt="2023-03-07T10:13:21.390" v="5626" actId="2696"/>
-        <pc:sldMkLst>
-          <pc:docMk/>
-          <pc:sldMk cId="1259014801" sldId="420"/>
-        </pc:sldMkLst>
-      </pc:sldChg>
-      <pc:sldChg chg="modSp add mod">
-        <pc:chgData name="Matthieu De Mari" userId="dfb708c9-d8dc-439f-9a3b-c772bf4a311c" providerId="ADAL" clId="{2E25C175-47A3-4BC7-8EFD-372D97A42A64}" dt="2023-03-07T10:16:44.162" v="5758" actId="20577"/>
-        <pc:sldMkLst>
-          <pc:docMk/>
-          <pc:sldMk cId="3351792085" sldId="421"/>
-        </pc:sldMkLst>
-      </pc:sldChg>
-      <pc:sldChg chg="new del">
-        <pc:chgData name="Matthieu De Mari" userId="dfb708c9-d8dc-439f-9a3b-c772bf4a311c" providerId="ADAL" clId="{2E25C175-47A3-4BC7-8EFD-372D97A42A64}" dt="2023-03-07T10:13:52.815" v="5632" actId="47"/>
-        <pc:sldMkLst>
-          <pc:docMk/>
-          <pc:sldMk cId="4263020084" sldId="421"/>
-        </pc:sldMkLst>
-      </pc:sldChg>
-      <pc:sldChg chg="new del">
-        <pc:chgData name="Matthieu De Mari" userId="dfb708c9-d8dc-439f-9a3b-c772bf4a311c" providerId="ADAL" clId="{2E25C175-47A3-4BC7-8EFD-372D97A42A64}" dt="2023-03-07T10:26:41.441" v="6051" actId="47"/>
-        <pc:sldMkLst>
-          <pc:docMk/>
-          <pc:sldMk cId="1402562889" sldId="422"/>
-        </pc:sldMkLst>
-      </pc:sldChg>
-      <pc:sldChg chg="modSp add mod ord">
-        <pc:chgData name="Matthieu De Mari" userId="dfb708c9-d8dc-439f-9a3b-c772bf4a311c" providerId="ADAL" clId="{2E25C175-47A3-4BC7-8EFD-372D97A42A64}" dt="2023-03-07T10:17:54.203" v="5801" actId="20577"/>
-        <pc:sldMkLst>
-          <pc:docMk/>
-          <pc:sldMk cId="3421583851" sldId="423"/>
-        </pc:sldMkLst>
-      </pc:sldChg>
-      <pc:sldChg chg="modSp add mod">
-        <pc:chgData name="Matthieu De Mari" userId="dfb708c9-d8dc-439f-9a3b-c772bf4a311c" providerId="ADAL" clId="{2E25C175-47A3-4BC7-8EFD-372D97A42A64}" dt="2023-03-07T10:18:00.790" v="5804" actId="207"/>
-        <pc:sldMkLst>
-          <pc:docMk/>
-          <pc:sldMk cId="2106229472" sldId="424"/>
-        </pc:sldMkLst>
-      </pc:sldChg>
-      <pc:sldChg chg="modSp add mod">
-        <pc:chgData name="Matthieu De Mari" userId="dfb708c9-d8dc-439f-9a3b-c772bf4a311c" providerId="ADAL" clId="{2E25C175-47A3-4BC7-8EFD-372D97A42A64}" dt="2023-03-07T10:19:35.729" v="5860" actId="113"/>
-        <pc:sldMkLst>
-          <pc:docMk/>
-          <pc:sldMk cId="833550183" sldId="425"/>
-        </pc:sldMkLst>
-      </pc:sldChg>
-      <pc:sldChg chg="modSp add mod">
-        <pc:chgData name="Matthieu De Mari" userId="dfb708c9-d8dc-439f-9a3b-c772bf4a311c" providerId="ADAL" clId="{2E25C175-47A3-4BC7-8EFD-372D97A42A64}" dt="2023-03-07T10:19:50.985" v="5865" actId="14100"/>
-        <pc:sldMkLst>
-          <pc:docMk/>
-          <pc:sldMk cId="1650955281" sldId="426"/>
-        </pc:sldMkLst>
-      </pc:sldChg>
-      <pc:sldChg chg="modSp add mod ord">
-        <pc:chgData name="Matthieu De Mari" userId="dfb708c9-d8dc-439f-9a3b-c772bf4a311c" providerId="ADAL" clId="{2E25C175-47A3-4BC7-8EFD-372D97A42A64}" dt="2023-03-07T10:24:33.206" v="6049" actId="207"/>
-        <pc:sldMkLst>
-          <pc:docMk/>
-          <pc:sldMk cId="25607758" sldId="427"/>
-        </pc:sldMkLst>
-      </pc:sldChg>
-      <pc:sldChg chg="modSp add mod">
-        <pc:chgData name="Matthieu De Mari" userId="dfb708c9-d8dc-439f-9a3b-c772bf4a311c" providerId="ADAL" clId="{2E25C175-47A3-4BC7-8EFD-372D97A42A64}" dt="2023-03-07T10:32:08.804" v="6515" actId="20577"/>
-        <pc:sldMkLst>
-          <pc:docMk/>
-          <pc:sldMk cId="2580070337" sldId="428"/>
-        </pc:sldMkLst>
-      </pc:sldChg>
-      <pc:sldChg chg="modSp add mod">
-        <pc:chgData name="Matthieu De Mari" userId="dfb708c9-d8dc-439f-9a3b-c772bf4a311c" providerId="ADAL" clId="{2E25C175-47A3-4BC7-8EFD-372D97A42A64}" dt="2023-03-07T10:32:13.911" v="6528" actId="20577"/>
-        <pc:sldMkLst>
-          <pc:docMk/>
-          <pc:sldMk cId="2609747574" sldId="429"/>
-        </pc:sldMkLst>
-      </pc:sldChg>
-      <pc:sldChg chg="modSp add mod">
-        <pc:chgData name="Matthieu De Mari" userId="dfb708c9-d8dc-439f-9a3b-c772bf4a311c" providerId="ADAL" clId="{2E25C175-47A3-4BC7-8EFD-372D97A42A64}" dt="2023-03-07T10:32:39.787" v="6641" actId="20577"/>
-        <pc:sldMkLst>
-          <pc:docMk/>
-          <pc:sldMk cId="1298953197" sldId="430"/>
-        </pc:sldMkLst>
-      </pc:sldChg>
-      <pc:sldChg chg="add del">
-        <pc:chgData name="Matthieu De Mari" userId="dfb708c9-d8dc-439f-9a3b-c772bf4a311c" providerId="ADAL" clId="{2E25C175-47A3-4BC7-8EFD-372D97A42A64}" dt="2023-03-07T10:30:25.877" v="6383" actId="47"/>
-        <pc:sldMkLst>
-          <pc:docMk/>
-          <pc:sldMk cId="3766509564" sldId="430"/>
-        </pc:sldMkLst>
-      </pc:sldChg>
-      <pc:sldChg chg="modSp new mod">
-        <pc:chgData name="Matthieu De Mari" userId="dfb708c9-d8dc-439f-9a3b-c772bf4a311c" providerId="ADAL" clId="{2E25C175-47A3-4BC7-8EFD-372D97A42A64}" dt="2023-03-07T10:34:48.172" v="6763" actId="20577"/>
-        <pc:sldMkLst>
-          <pc:docMk/>
-          <pc:sldMk cId="349686524" sldId="431"/>
-        </pc:sldMkLst>
-      </pc:sldChg>
-      <pc:sldChg chg="modSp add mod">
-        <pc:chgData name="Matthieu De Mari" userId="dfb708c9-d8dc-439f-9a3b-c772bf4a311c" providerId="ADAL" clId="{2E25C175-47A3-4BC7-8EFD-372D97A42A64}" dt="2023-03-07T10:33:02.161" v="6657" actId="207"/>
-        <pc:sldMkLst>
-          <pc:docMk/>
-          <pc:sldMk cId="3417944735" sldId="432"/>
-        </pc:sldMkLst>
-      </pc:sldChg>
-      <pc:sldChg chg="modSp add mod">
-        <pc:chgData name="Matthieu De Mari" userId="dfb708c9-d8dc-439f-9a3b-c772bf4a311c" providerId="ADAL" clId="{2E25C175-47A3-4BC7-8EFD-372D97A42A64}" dt="2023-03-07T10:35:45.030" v="6878" actId="207"/>
-        <pc:sldMkLst>
-          <pc:docMk/>
-          <pc:sldMk cId="2653152999" sldId="433"/>
-        </pc:sldMkLst>
-      </pc:sldChg>
-      <pc:sldChg chg="modSp add mod">
-        <pc:chgData name="Matthieu De Mari" userId="dfb708c9-d8dc-439f-9a3b-c772bf4a311c" providerId="ADAL" clId="{2E25C175-47A3-4BC7-8EFD-372D97A42A64}" dt="2023-03-07T10:36:00.421" v="6882" actId="207"/>
-        <pc:sldMkLst>
-          <pc:docMk/>
-          <pc:sldMk cId="2305199698" sldId="434"/>
-        </pc:sldMkLst>
-      </pc:sldChg>
-      <pc:sldChg chg="modSp add mod">
-        <pc:chgData name="Matthieu De Mari" userId="dfb708c9-d8dc-439f-9a3b-c772bf4a311c" providerId="ADAL" clId="{2E25C175-47A3-4BC7-8EFD-372D97A42A64}" dt="2023-03-07T10:39:44.701" v="7119" actId="20577"/>
-        <pc:sldMkLst>
-          <pc:docMk/>
-          <pc:sldMk cId="2095478576" sldId="435"/>
-        </pc:sldMkLst>
-      </pc:sldChg>
-      <pc:sldChg chg="modSp new mod">
-        <pc:chgData name="Matthieu De Mari" userId="dfb708c9-d8dc-439f-9a3b-c772bf4a311c" providerId="ADAL" clId="{2E25C175-47A3-4BC7-8EFD-372D97A42A64}" dt="2023-03-07T10:40:55.253" v="7150" actId="27636"/>
-        <pc:sldMkLst>
-          <pc:docMk/>
-          <pc:sldMk cId="2087017446" sldId="436"/>
-        </pc:sldMkLst>
-      </pc:sldChg>
-      <pc:sldChg chg="modSp add mod">
-        <pc:chgData name="Matthieu De Mari" userId="dfb708c9-d8dc-439f-9a3b-c772bf4a311c" providerId="ADAL" clId="{2E25C175-47A3-4BC7-8EFD-372D97A42A64}" dt="2023-03-07T10:46:33.418" v="7352" actId="20577"/>
-        <pc:sldMkLst>
-          <pc:docMk/>
-          <pc:sldMk cId="2927953506" sldId="437"/>
-        </pc:sldMkLst>
       </pc:sldChg>
     </pc:docChg>
   </pc:docChgLst>
@@ -4139,7 +333,7 @@
           <a:p>
             <a:fld id="{98CFC6A4-B085-437B-8084-693BEB2A32DE}" type="datetimeFigureOut">
               <a:rPr lang="en-SG" smtClean="0"/>
-              <a:t>27/2/2025</a:t>
+              <a:t>25/2/2026</a:t>
             </a:fld>
             <a:endParaRPr lang="en-SG"/>
           </a:p>
@@ -4556,7 +750,7 @@
           <a:p>
             <a:fld id="{AB35F6B0-D468-4997-9CE3-CF2A1AE5E3F9}" type="datetimeFigureOut">
               <a:rPr lang="en-SG" smtClean="0"/>
-              <a:t>27/2/2025</a:t>
+              <a:t>25/2/2026</a:t>
             </a:fld>
             <a:endParaRPr lang="en-SG"/>
           </a:p>
@@ -4756,7 +950,7 @@
           <a:p>
             <a:fld id="{AB35F6B0-D468-4997-9CE3-CF2A1AE5E3F9}" type="datetimeFigureOut">
               <a:rPr lang="en-SG" smtClean="0"/>
-              <a:t>27/2/2025</a:t>
+              <a:t>25/2/2026</a:t>
             </a:fld>
             <a:endParaRPr lang="en-SG"/>
           </a:p>
@@ -4966,7 +1160,7 @@
           <a:p>
             <a:fld id="{AB35F6B0-D468-4997-9CE3-CF2A1AE5E3F9}" type="datetimeFigureOut">
               <a:rPr lang="en-SG" smtClean="0"/>
-              <a:t>27/2/2025</a:t>
+              <a:t>25/2/2026</a:t>
             </a:fld>
             <a:endParaRPr lang="en-SG"/>
           </a:p>
@@ -5166,7 +1360,7 @@
           <a:p>
             <a:fld id="{AB35F6B0-D468-4997-9CE3-CF2A1AE5E3F9}" type="datetimeFigureOut">
               <a:rPr lang="en-SG" smtClean="0"/>
-              <a:t>27/2/2025</a:t>
+              <a:t>25/2/2026</a:t>
             </a:fld>
             <a:endParaRPr lang="en-SG"/>
           </a:p>
@@ -5442,7 +1636,7 @@
           <a:p>
             <a:fld id="{AB35F6B0-D468-4997-9CE3-CF2A1AE5E3F9}" type="datetimeFigureOut">
               <a:rPr lang="en-SG" smtClean="0"/>
-              <a:t>27/2/2025</a:t>
+              <a:t>25/2/2026</a:t>
             </a:fld>
             <a:endParaRPr lang="en-SG"/>
           </a:p>
@@ -5710,7 +1904,7 @@
           <a:p>
             <a:fld id="{AB35F6B0-D468-4997-9CE3-CF2A1AE5E3F9}" type="datetimeFigureOut">
               <a:rPr lang="en-SG" smtClean="0"/>
-              <a:t>27/2/2025</a:t>
+              <a:t>25/2/2026</a:t>
             </a:fld>
             <a:endParaRPr lang="en-SG"/>
           </a:p>
@@ -6125,7 +2319,7 @@
           <a:p>
             <a:fld id="{AB35F6B0-D468-4997-9CE3-CF2A1AE5E3F9}" type="datetimeFigureOut">
               <a:rPr lang="en-SG" smtClean="0"/>
-              <a:t>27/2/2025</a:t>
+              <a:t>25/2/2026</a:t>
             </a:fld>
             <a:endParaRPr lang="en-SG"/>
           </a:p>
@@ -6267,7 +2461,7 @@
           <a:p>
             <a:fld id="{AB35F6B0-D468-4997-9CE3-CF2A1AE5E3F9}" type="datetimeFigureOut">
               <a:rPr lang="en-SG" smtClean="0"/>
-              <a:t>27/2/2025</a:t>
+              <a:t>25/2/2026</a:t>
             </a:fld>
             <a:endParaRPr lang="en-SG"/>
           </a:p>
@@ -6380,7 +2574,7 @@
           <a:p>
             <a:fld id="{AB35F6B0-D468-4997-9CE3-CF2A1AE5E3F9}" type="datetimeFigureOut">
               <a:rPr lang="en-SG" smtClean="0"/>
-              <a:t>27/2/2025</a:t>
+              <a:t>25/2/2026</a:t>
             </a:fld>
             <a:endParaRPr lang="en-SG"/>
           </a:p>
@@ -6693,7 +2887,7 @@
           <a:p>
             <a:fld id="{AB35F6B0-D468-4997-9CE3-CF2A1AE5E3F9}" type="datetimeFigureOut">
               <a:rPr lang="en-SG" smtClean="0"/>
-              <a:t>27/2/2025</a:t>
+              <a:t>25/2/2026</a:t>
             </a:fld>
             <a:endParaRPr lang="en-SG"/>
           </a:p>
@@ -6982,7 +3176,7 @@
           <a:p>
             <a:fld id="{AB35F6B0-D468-4997-9CE3-CF2A1AE5E3F9}" type="datetimeFigureOut">
               <a:rPr lang="en-SG" smtClean="0"/>
-              <a:t>27/2/2025</a:t>
+              <a:t>25/2/2026</a:t>
             </a:fld>
             <a:endParaRPr lang="en-SG"/>
           </a:p>
@@ -7225,7 +3419,7 @@
           <a:p>
             <a:fld id="{AB35F6B0-D468-4997-9CE3-CF2A1AE5E3F9}" type="datetimeFigureOut">
               <a:rPr lang="en-SG" smtClean="0"/>
-              <a:t>27/2/2025</a:t>
+              <a:t>25/2/2026</a:t>
             </a:fld>
             <a:endParaRPr lang="en-SG"/>
           </a:p>
@@ -8376,11 +4570,7 @@
             </a:r>
             <a:r>
               <a:rPr lang="en-GB" dirty="0"/>
-              <a:t>Again, many possible answers </a:t>
-            </a:r>
-            <a:r>
-              <a:rPr lang="en-GB"/>
-              <a:t>here.</a:t>
+              <a:t>Again, many possible answers here.</a:t>
             </a:r>
             <a:endParaRPr lang="en-GB" b="1" dirty="0"/>
           </a:p>
@@ -8389,12 +4579,8 @@
               <a:buNone/>
             </a:pPr>
             <a:r>
-              <a:rPr lang="en-GB"/>
-              <a:t>The </a:t>
-            </a:r>
-            <a:r>
-              <a:rPr lang="en-GB" dirty="0"/>
-              <a:t>most common one was ^[+-]?(0|[1-9]\d*)$.</a:t>
+              <a:rPr lang="en-GB" dirty="0"/>
+              <a:t>The most common one was ^(\+|-)?(0|[1-9]\d*)$.</a:t>
             </a:r>
           </a:p>
           <a:p>
@@ -8422,7 +4608,7 @@
             </a:pPr>
             <a:r>
               <a:rPr lang="en-GB" dirty="0"/>
-              <a:t>The most common one was ^[+-]?(0|[1-9]\d*)(\.\d+)?$.</a:t>
+              <a:t>The most common one was ^(\+|-)?(0|[1-9]\d*)(\.\d+)?$.</a:t>
             </a:r>
           </a:p>
           <a:p>
@@ -8431,7 +4617,15 @@
             </a:pPr>
             <a:r>
               <a:rPr lang="en-GB" i="1" dirty="0"/>
-              <a:t>It might have to be modified into ^[+-]?(0|[1-9]\d*)?(\.\d+)?$ to accept numbers such as “.57”.</a:t>
+              <a:t>It might have to be modified into ^</a:t>
+            </a:r>
+            <a:r>
+              <a:rPr lang="en-GB" dirty="0"/>
+              <a:t>(\+|-)</a:t>
+            </a:r>
+            <a:r>
+              <a:rPr lang="en-GB" i="1" dirty="0"/>
+              <a:t>?(0|[1-9]\d*)?(\.\d+)?$ to accept numbers such as “.57”.</a:t>
             </a:r>
           </a:p>
         </p:txBody>
